--- a/BCHAIN-ACCESS_Package/images/Figure_4.pptx
+++ b/BCHAIN-ACCESS_Package/images/Figure_4.pptx
@@ -1,19 +1,19 @@
 
 <file path=ppt/presentation.xml><?xml version="1.0" encoding="utf-8"?>
-<p:presentation xmlns:a="http://schemas.openxmlformats.org/drawingml/2006/main" xmlns:r="http://schemas.openxmlformats.org/officeDocument/2006/relationships" xmlns:p="http://schemas.openxmlformats.org/presentationml/2006/main" saveSubsetFonts="1" autoCompressPictures="0">
+<p:presentation xmlns:a="http://schemas.openxmlformats.org/drawingml/2006/main" xmlns:r="http://schemas.openxmlformats.org/officeDocument/2006/relationships" xmlns:p="http://schemas.openxmlformats.org/presentationml/2006/main" saveSubsetFonts="1">
   <p:sldMasterIdLst>
     <p:sldMasterId id="2147483648" r:id="rId1"/>
   </p:sldMasterIdLst>
   <p:sldIdLst>
-    <p:sldId id="256" r:id="rId7"/>
+    <p:sldId id="259" r:id="rId2"/>
   </p:sldIdLst>
-  <p:sldSz cx="12191695" cy="8381790" type="screen4x3"/>
+  <p:sldSz cx="12192000" cy="6858000"/>
   <p:notesSz cx="6858000" cy="9144000"/>
   <p:defaultTextStyle>
     <a:defPPr>
       <a:defRPr lang="en-US"/>
     </a:defPPr>
-    <a:lvl1pPr marL="0" algn="l" defTabSz="457200" rtl="0" eaLnBrk="1" latinLnBrk="0" hangingPunct="1">
+    <a:lvl1pPr marL="0" algn="l" defTabSz="914400" rtl="0" eaLnBrk="1" latinLnBrk="0" hangingPunct="1">
       <a:defRPr sz="1800" kern="1200">
         <a:solidFill>
           <a:schemeClr val="tx1"/>
@@ -23,7 +23,7 @@
         <a:cs typeface="+mn-cs"/>
       </a:defRPr>
     </a:lvl1pPr>
-    <a:lvl2pPr marL="457200" algn="l" defTabSz="457200" rtl="0" eaLnBrk="1" latinLnBrk="0" hangingPunct="1">
+    <a:lvl2pPr marL="457200" algn="l" defTabSz="914400" rtl="0" eaLnBrk="1" latinLnBrk="0" hangingPunct="1">
       <a:defRPr sz="1800" kern="1200">
         <a:solidFill>
           <a:schemeClr val="tx1"/>
@@ -33,7 +33,7 @@
         <a:cs typeface="+mn-cs"/>
       </a:defRPr>
     </a:lvl2pPr>
-    <a:lvl3pPr marL="914400" algn="l" defTabSz="457200" rtl="0" eaLnBrk="1" latinLnBrk="0" hangingPunct="1">
+    <a:lvl3pPr marL="914400" algn="l" defTabSz="914400" rtl="0" eaLnBrk="1" latinLnBrk="0" hangingPunct="1">
       <a:defRPr sz="1800" kern="1200">
         <a:solidFill>
           <a:schemeClr val="tx1"/>
@@ -43,7 +43,7 @@
         <a:cs typeface="+mn-cs"/>
       </a:defRPr>
     </a:lvl3pPr>
-    <a:lvl4pPr marL="1371600" algn="l" defTabSz="457200" rtl="0" eaLnBrk="1" latinLnBrk="0" hangingPunct="1">
+    <a:lvl4pPr marL="1371600" algn="l" defTabSz="914400" rtl="0" eaLnBrk="1" latinLnBrk="0" hangingPunct="1">
       <a:defRPr sz="1800" kern="1200">
         <a:solidFill>
           <a:schemeClr val="tx1"/>
@@ -53,7 +53,7 @@
         <a:cs typeface="+mn-cs"/>
       </a:defRPr>
     </a:lvl4pPr>
-    <a:lvl5pPr marL="1828800" algn="l" defTabSz="457200" rtl="0" eaLnBrk="1" latinLnBrk="0" hangingPunct="1">
+    <a:lvl5pPr marL="1828800" algn="l" defTabSz="914400" rtl="0" eaLnBrk="1" latinLnBrk="0" hangingPunct="1">
       <a:defRPr sz="1800" kern="1200">
         <a:solidFill>
           <a:schemeClr val="tx1"/>
@@ -63,7 +63,7 @@
         <a:cs typeface="+mn-cs"/>
       </a:defRPr>
     </a:lvl5pPr>
-    <a:lvl6pPr marL="2286000" algn="l" defTabSz="457200" rtl="0" eaLnBrk="1" latinLnBrk="0" hangingPunct="1">
+    <a:lvl6pPr marL="2286000" algn="l" defTabSz="914400" rtl="0" eaLnBrk="1" latinLnBrk="0" hangingPunct="1">
       <a:defRPr sz="1800" kern="1200">
         <a:solidFill>
           <a:schemeClr val="tx1"/>
@@ -73,7 +73,7 @@
         <a:cs typeface="+mn-cs"/>
       </a:defRPr>
     </a:lvl6pPr>
-    <a:lvl7pPr marL="2743200" algn="l" defTabSz="457200" rtl="0" eaLnBrk="1" latinLnBrk="0" hangingPunct="1">
+    <a:lvl7pPr marL="2743200" algn="l" defTabSz="914400" rtl="0" eaLnBrk="1" latinLnBrk="0" hangingPunct="1">
       <a:defRPr sz="1800" kern="1200">
         <a:solidFill>
           <a:schemeClr val="tx1"/>
@@ -83,7 +83,7 @@
         <a:cs typeface="+mn-cs"/>
       </a:defRPr>
     </a:lvl7pPr>
-    <a:lvl8pPr marL="3200400" algn="l" defTabSz="457200" rtl="0" eaLnBrk="1" latinLnBrk="0" hangingPunct="1">
+    <a:lvl8pPr marL="3200400" algn="l" defTabSz="914400" rtl="0" eaLnBrk="1" latinLnBrk="0" hangingPunct="1">
       <a:defRPr sz="1800" kern="1200">
         <a:solidFill>
           <a:schemeClr val="tx1"/>
@@ -93,7 +93,7 @@
         <a:cs typeface="+mn-cs"/>
       </a:defRPr>
     </a:lvl8pPr>
-    <a:lvl9pPr marL="3657600" algn="l" defTabSz="457200" rtl="0" eaLnBrk="1" latinLnBrk="0" hangingPunct="1">
+    <a:lvl9pPr marL="3657600" algn="l" defTabSz="914400" rtl="0" eaLnBrk="1" latinLnBrk="0" hangingPunct="1">
       <a:defRPr sz="1800" kern="1200">
         <a:solidFill>
           <a:schemeClr val="tx1"/>
@@ -126,7 +126,13 @@
       </p:grpSpPr>
       <p:sp>
         <p:nvSpPr>
-          <p:cNvPr id="2" name="Title 1"/>
+          <p:cNvPr id="2" name="Title 1">
+            <a:extLst>
+              <a:ext uri="{FF2B5EF4-FFF2-40B4-BE49-F238E27FC236}">
+                <a16:creationId xmlns:a16="http://schemas.microsoft.com/office/drawing/2014/main" id="{70141C82-2A11-C39A-B160-2C60767F34D4}"/>
+              </a:ext>
+            </a:extLst>
+          </p:cNvPr>
           <p:cNvSpPr>
             <a:spLocks noGrp="1"/>
           </p:cNvSpPr>
@@ -136,25 +142,34 @@
         </p:nvSpPr>
         <p:spPr>
           <a:xfrm>
-            <a:off x="685800" y="2130425"/>
-            <a:ext cx="7772400" cy="1470025"/>
-          </a:xfrm>
-        </p:spPr>
-        <p:txBody>
-          <a:bodyPr/>
-          <a:lstStyle/>
-          <a:p>
-            <a:r>
-              <a:rPr lang="en-US" smtClean="0"/>
+            <a:off x="1524000" y="1122363"/>
+            <a:ext cx="9144000" cy="2387600"/>
+          </a:xfrm>
+        </p:spPr>
+        <p:txBody>
+          <a:bodyPr anchor="b"/>
+          <a:lstStyle>
+            <a:lvl1pPr algn="ctr">
+              <a:defRPr sz="6000"/>
+            </a:lvl1pPr>
+          </a:lstStyle>
+          <a:p>
+            <a:r>
+              <a:rPr lang="en-US"/>
               <a:t>Click to edit Master title style</a:t>
             </a:r>
-            <a:endParaRPr lang="en-US"/>
-          </a:p>
-        </p:txBody>
-      </p:sp>
-      <p:sp>
-        <p:nvSpPr>
-          <p:cNvPr id="3" name="Subtitle 2"/>
+          </a:p>
+        </p:txBody>
+      </p:sp>
+      <p:sp>
+        <p:nvSpPr>
+          <p:cNvPr id="3" name="Subtitle 2">
+            <a:extLst>
+              <a:ext uri="{FF2B5EF4-FFF2-40B4-BE49-F238E27FC236}">
+                <a16:creationId xmlns:a16="http://schemas.microsoft.com/office/drawing/2014/main" id="{CF87CEF6-D5A5-0F12-6895-8DF8BE7FA7D6}"/>
+              </a:ext>
+            </a:extLst>
+          </p:cNvPr>
           <p:cNvSpPr>
             <a:spLocks noGrp="1"/>
           </p:cNvSpPr>
@@ -164,8 +179,8 @@
         </p:nvSpPr>
         <p:spPr>
           <a:xfrm>
-            <a:off x="1371600" y="3886200"/>
-            <a:ext cx="6400800" cy="1752600"/>
+            <a:off x="1524000" y="3602038"/>
+            <a:ext cx="9144000" cy="1655762"/>
           </a:xfrm>
         </p:spPr>
         <p:txBody>
@@ -173,122 +188,73 @@
           <a:lstStyle>
             <a:lvl1pPr marL="0" indent="0" algn="ctr">
               <a:buNone/>
-              <a:defRPr>
-                <a:solidFill>
-                  <a:schemeClr val="tx1">
-                    <a:tint val="75000"/>
-                  </a:schemeClr>
-                </a:solidFill>
-              </a:defRPr>
+              <a:defRPr sz="2400"/>
             </a:lvl1pPr>
             <a:lvl2pPr marL="457200" indent="0" algn="ctr">
               <a:buNone/>
-              <a:defRPr>
-                <a:solidFill>
-                  <a:schemeClr val="tx1">
-                    <a:tint val="75000"/>
-                  </a:schemeClr>
-                </a:solidFill>
-              </a:defRPr>
+              <a:defRPr sz="2000"/>
             </a:lvl2pPr>
             <a:lvl3pPr marL="914400" indent="0" algn="ctr">
               <a:buNone/>
-              <a:defRPr>
-                <a:solidFill>
-                  <a:schemeClr val="tx1">
-                    <a:tint val="75000"/>
-                  </a:schemeClr>
-                </a:solidFill>
-              </a:defRPr>
+              <a:defRPr sz="1800"/>
             </a:lvl3pPr>
             <a:lvl4pPr marL="1371600" indent="0" algn="ctr">
               <a:buNone/>
-              <a:defRPr>
-                <a:solidFill>
-                  <a:schemeClr val="tx1">
-                    <a:tint val="75000"/>
-                  </a:schemeClr>
-                </a:solidFill>
-              </a:defRPr>
+              <a:defRPr sz="1600"/>
             </a:lvl4pPr>
             <a:lvl5pPr marL="1828800" indent="0" algn="ctr">
               <a:buNone/>
-              <a:defRPr>
-                <a:solidFill>
-                  <a:schemeClr val="tx1">
-                    <a:tint val="75000"/>
-                  </a:schemeClr>
-                </a:solidFill>
-              </a:defRPr>
+              <a:defRPr sz="1600"/>
             </a:lvl5pPr>
             <a:lvl6pPr marL="2286000" indent="0" algn="ctr">
               <a:buNone/>
-              <a:defRPr>
-                <a:solidFill>
-                  <a:schemeClr val="tx1">
-                    <a:tint val="75000"/>
-                  </a:schemeClr>
-                </a:solidFill>
-              </a:defRPr>
+              <a:defRPr sz="1600"/>
             </a:lvl6pPr>
             <a:lvl7pPr marL="2743200" indent="0" algn="ctr">
               <a:buNone/>
-              <a:defRPr>
-                <a:solidFill>
-                  <a:schemeClr val="tx1">
-                    <a:tint val="75000"/>
-                  </a:schemeClr>
-                </a:solidFill>
-              </a:defRPr>
+              <a:defRPr sz="1600"/>
             </a:lvl7pPr>
             <a:lvl8pPr marL="3200400" indent="0" algn="ctr">
               <a:buNone/>
-              <a:defRPr>
-                <a:solidFill>
-                  <a:schemeClr val="tx1">
-                    <a:tint val="75000"/>
-                  </a:schemeClr>
-                </a:solidFill>
-              </a:defRPr>
+              <a:defRPr sz="1600"/>
             </a:lvl8pPr>
             <a:lvl9pPr marL="3657600" indent="0" algn="ctr">
               <a:buNone/>
-              <a:defRPr>
-                <a:solidFill>
-                  <a:schemeClr val="tx1">
-                    <a:tint val="75000"/>
-                  </a:schemeClr>
-                </a:solidFill>
-              </a:defRPr>
+              <a:defRPr sz="1600"/>
             </a:lvl9pPr>
           </a:lstStyle>
           <a:p>
             <a:r>
+              <a:rPr lang="en-US"/>
+              <a:t>Click to edit Master subtitle style</a:t>
+            </a:r>
+          </a:p>
+        </p:txBody>
+      </p:sp>
+      <p:sp>
+        <p:nvSpPr>
+          <p:cNvPr id="4" name="Date Placeholder 3">
+            <a:extLst>
+              <a:ext uri="{FF2B5EF4-FFF2-40B4-BE49-F238E27FC236}">
+                <a16:creationId xmlns:a16="http://schemas.microsoft.com/office/drawing/2014/main" id="{7565321E-E24E-9CAC-69CC-EA2A8ACFE3A7}"/>
+              </a:ext>
+            </a:extLst>
+          </p:cNvPr>
+          <p:cNvSpPr>
+            <a:spLocks noGrp="1"/>
+          </p:cNvSpPr>
+          <p:nvPr>
+            <p:ph type="dt" sz="half" idx="10"/>
+          </p:nvPr>
+        </p:nvSpPr>
+        <p:spPr/>
+        <p:txBody>
+          <a:bodyPr/>
+          <a:lstStyle/>
+          <a:p>
+            <a:fld id="{7994B958-401A-4A89-98CA-0A39E34EFB4D}" type="datetimeFigureOut">
               <a:rPr lang="en-US" smtClean="0"/>
-              <a:t>Click to edit Master subtitle style</a:t>
-            </a:r>
-            <a:endParaRPr lang="en-US"/>
-          </a:p>
-        </p:txBody>
-      </p:sp>
-      <p:sp>
-        <p:nvSpPr>
-          <p:cNvPr id="4" name="Date Placeholder 3"/>
-          <p:cNvSpPr>
-            <a:spLocks noGrp="1"/>
-          </p:cNvSpPr>
-          <p:nvPr>
-            <p:ph type="dt" sz="half" idx="10"/>
-          </p:nvPr>
-        </p:nvSpPr>
-        <p:spPr/>
-        <p:txBody>
-          <a:bodyPr/>
-          <a:lstStyle/>
-          <a:p>
-            <a:fld id="{5BCAD085-E8A6-8845-BD4E-CB4CCA059FC4}" type="datetimeFigureOut">
-              <a:rPr lang="en-US" smtClean="0"/>
-              <a:t>1/27/13</a:t>
+              <a:t>7/13/2026</a:t>
             </a:fld>
             <a:endParaRPr lang="en-US"/>
           </a:p>
@@ -296,7 +262,13 @@
       </p:sp>
       <p:sp>
         <p:nvSpPr>
-          <p:cNvPr id="5" name="Footer Placeholder 4"/>
+          <p:cNvPr id="5" name="Footer Placeholder 4">
+            <a:extLst>
+              <a:ext uri="{FF2B5EF4-FFF2-40B4-BE49-F238E27FC236}">
+                <a16:creationId xmlns:a16="http://schemas.microsoft.com/office/drawing/2014/main" id="{1490C4A8-A28B-A1E5-FF64-57C4020911AB}"/>
+              </a:ext>
+            </a:extLst>
+          </p:cNvPr>
           <p:cNvSpPr>
             <a:spLocks noGrp="1"/>
           </p:cNvSpPr>
@@ -315,7 +287,13 @@
       </p:sp>
       <p:sp>
         <p:nvSpPr>
-          <p:cNvPr id="6" name="Slide Number Placeholder 5"/>
+          <p:cNvPr id="6" name="Slide Number Placeholder 5">
+            <a:extLst>
+              <a:ext uri="{FF2B5EF4-FFF2-40B4-BE49-F238E27FC236}">
+                <a16:creationId xmlns:a16="http://schemas.microsoft.com/office/drawing/2014/main" id="{3658B07B-B32B-479D-1413-77AD81D9D6AE}"/>
+              </a:ext>
+            </a:extLst>
+          </p:cNvPr>
           <p:cNvSpPr>
             <a:spLocks noGrp="1"/>
           </p:cNvSpPr>
@@ -328,7 +306,7 @@
           <a:bodyPr/>
           <a:lstStyle/>
           <a:p>
-            <a:fld id="{C1FF6DA9-008F-8B48-92A6-B652298478BF}" type="slidenum">
+            <a:fld id="{76A5515E-906D-4A46-88BA-63D09FD3EC7D}" type="slidenum">
               <a:rPr lang="en-US" smtClean="0"/>
               <a:t>‹#›</a:t>
             </a:fld>
@@ -339,7 +317,7 @@
     </p:spTree>
     <p:extLst>
       <p:ext uri="{BB962C8B-B14F-4D97-AF65-F5344CB8AC3E}">
-        <p14:creationId xmlns:p14="http://schemas.microsoft.com/office/powerpoint/2010/main" val="3168075583"/>
+        <p14:creationId xmlns:p14="http://schemas.microsoft.com/office/powerpoint/2010/main" val="128311456"/>
       </p:ext>
     </p:extLst>
   </p:cSld>
@@ -368,7 +346,13 @@
       </p:grpSpPr>
       <p:sp>
         <p:nvSpPr>
-          <p:cNvPr id="2" name="Title 1"/>
+          <p:cNvPr id="2" name="Title 1">
+            <a:extLst>
+              <a:ext uri="{FF2B5EF4-FFF2-40B4-BE49-F238E27FC236}">
+                <a16:creationId xmlns:a16="http://schemas.microsoft.com/office/drawing/2014/main" id="{76EF9FDE-0B95-BC41-68B7-154BB4D9125C}"/>
+              </a:ext>
+            </a:extLst>
+          </p:cNvPr>
           <p:cNvSpPr>
             <a:spLocks noGrp="1"/>
           </p:cNvSpPr>
@@ -382,83 +366,93 @@
           <a:lstStyle/>
           <a:p>
             <a:r>
+              <a:rPr lang="en-US"/>
+              <a:t>Click to edit Master title style</a:t>
+            </a:r>
+          </a:p>
+        </p:txBody>
+      </p:sp>
+      <p:sp>
+        <p:nvSpPr>
+          <p:cNvPr id="3" name="Vertical Text Placeholder 2">
+            <a:extLst>
+              <a:ext uri="{FF2B5EF4-FFF2-40B4-BE49-F238E27FC236}">
+                <a16:creationId xmlns:a16="http://schemas.microsoft.com/office/drawing/2014/main" id="{B76C11D1-A4EC-9FFC-5A49-084DFE84C87A}"/>
+              </a:ext>
+            </a:extLst>
+          </p:cNvPr>
+          <p:cNvSpPr>
+            <a:spLocks noGrp="1"/>
+          </p:cNvSpPr>
+          <p:nvPr>
+            <p:ph type="body" orient="vert" idx="1"/>
+          </p:nvPr>
+        </p:nvSpPr>
+        <p:spPr/>
+        <p:txBody>
+          <a:bodyPr vert="eaVert"/>
+          <a:lstStyle/>
+          <a:p>
+            <a:pPr lvl="0"/>
+            <a:r>
+              <a:rPr lang="en-US"/>
+              <a:t>Click to edit Master text styles</a:t>
+            </a:r>
+          </a:p>
+          <a:p>
+            <a:pPr lvl="1"/>
+            <a:r>
+              <a:rPr lang="en-US"/>
+              <a:t>Second level</a:t>
+            </a:r>
+          </a:p>
+          <a:p>
+            <a:pPr lvl="2"/>
+            <a:r>
+              <a:rPr lang="en-US"/>
+              <a:t>Third level</a:t>
+            </a:r>
+          </a:p>
+          <a:p>
+            <a:pPr lvl="3"/>
+            <a:r>
+              <a:rPr lang="en-US"/>
+              <a:t>Fourth level</a:t>
+            </a:r>
+          </a:p>
+          <a:p>
+            <a:pPr lvl="4"/>
+            <a:r>
+              <a:rPr lang="en-US"/>
+              <a:t>Fifth level</a:t>
+            </a:r>
+          </a:p>
+        </p:txBody>
+      </p:sp>
+      <p:sp>
+        <p:nvSpPr>
+          <p:cNvPr id="4" name="Date Placeholder 3">
+            <a:extLst>
+              <a:ext uri="{FF2B5EF4-FFF2-40B4-BE49-F238E27FC236}">
+                <a16:creationId xmlns:a16="http://schemas.microsoft.com/office/drawing/2014/main" id="{D2966BF8-16E6-ED7E-2F7D-32559BF42695}"/>
+              </a:ext>
+            </a:extLst>
+          </p:cNvPr>
+          <p:cNvSpPr>
+            <a:spLocks noGrp="1"/>
+          </p:cNvSpPr>
+          <p:nvPr>
+            <p:ph type="dt" sz="half" idx="10"/>
+          </p:nvPr>
+        </p:nvSpPr>
+        <p:spPr/>
+        <p:txBody>
+          <a:bodyPr/>
+          <a:lstStyle/>
+          <a:p>
+            <a:fld id="{7994B958-401A-4A89-98CA-0A39E34EFB4D}" type="datetimeFigureOut">
               <a:rPr lang="en-US" smtClean="0"/>
-              <a:t>Click to edit Master title style</a:t>
-            </a:r>
-            <a:endParaRPr lang="en-US"/>
-          </a:p>
-        </p:txBody>
-      </p:sp>
-      <p:sp>
-        <p:nvSpPr>
-          <p:cNvPr id="3" name="Vertical Text Placeholder 2"/>
-          <p:cNvSpPr>
-            <a:spLocks noGrp="1"/>
-          </p:cNvSpPr>
-          <p:nvPr>
-            <p:ph type="body" orient="vert" idx="1"/>
-          </p:nvPr>
-        </p:nvSpPr>
-        <p:spPr/>
-        <p:txBody>
-          <a:bodyPr vert="eaVert"/>
-          <a:lstStyle/>
-          <a:p>
-            <a:pPr lvl="0"/>
-            <a:r>
-              <a:rPr lang="en-US" smtClean="0"/>
-              <a:t>Click to edit Master text styles</a:t>
-            </a:r>
-          </a:p>
-          <a:p>
-            <a:pPr lvl="1"/>
-            <a:r>
-              <a:rPr lang="en-US" smtClean="0"/>
-              <a:t>Second level</a:t>
-            </a:r>
-          </a:p>
-          <a:p>
-            <a:pPr lvl="2"/>
-            <a:r>
-              <a:rPr lang="en-US" smtClean="0"/>
-              <a:t>Third level</a:t>
-            </a:r>
-          </a:p>
-          <a:p>
-            <a:pPr lvl="3"/>
-            <a:r>
-              <a:rPr lang="en-US" smtClean="0"/>
-              <a:t>Fourth level</a:t>
-            </a:r>
-          </a:p>
-          <a:p>
-            <a:pPr lvl="4"/>
-            <a:r>
-              <a:rPr lang="en-US" smtClean="0"/>
-              <a:t>Fifth level</a:t>
-            </a:r>
-            <a:endParaRPr lang="en-US"/>
-          </a:p>
-        </p:txBody>
-      </p:sp>
-      <p:sp>
-        <p:nvSpPr>
-          <p:cNvPr id="4" name="Date Placeholder 3"/>
-          <p:cNvSpPr>
-            <a:spLocks noGrp="1"/>
-          </p:cNvSpPr>
-          <p:nvPr>
-            <p:ph type="dt" sz="half" idx="10"/>
-          </p:nvPr>
-        </p:nvSpPr>
-        <p:spPr/>
-        <p:txBody>
-          <a:bodyPr/>
-          <a:lstStyle/>
-          <a:p>
-            <a:fld id="{5BCAD085-E8A6-8845-BD4E-CB4CCA059FC4}" type="datetimeFigureOut">
-              <a:rPr lang="en-US" smtClean="0"/>
-              <a:t>1/27/13</a:t>
+              <a:t>7/13/2026</a:t>
             </a:fld>
             <a:endParaRPr lang="en-US"/>
           </a:p>
@@ -466,7 +460,13 @@
       </p:sp>
       <p:sp>
         <p:nvSpPr>
-          <p:cNvPr id="5" name="Footer Placeholder 4"/>
+          <p:cNvPr id="5" name="Footer Placeholder 4">
+            <a:extLst>
+              <a:ext uri="{FF2B5EF4-FFF2-40B4-BE49-F238E27FC236}">
+                <a16:creationId xmlns:a16="http://schemas.microsoft.com/office/drawing/2014/main" id="{09B3E392-26BF-725C-1DE3-4E383CD7DA13}"/>
+              </a:ext>
+            </a:extLst>
+          </p:cNvPr>
           <p:cNvSpPr>
             <a:spLocks noGrp="1"/>
           </p:cNvSpPr>
@@ -485,7 +485,13 @@
       </p:sp>
       <p:sp>
         <p:nvSpPr>
-          <p:cNvPr id="6" name="Slide Number Placeholder 5"/>
+          <p:cNvPr id="6" name="Slide Number Placeholder 5">
+            <a:extLst>
+              <a:ext uri="{FF2B5EF4-FFF2-40B4-BE49-F238E27FC236}">
+                <a16:creationId xmlns:a16="http://schemas.microsoft.com/office/drawing/2014/main" id="{E8C91431-727B-985E-62E7-E4E21F13551F}"/>
+              </a:ext>
+            </a:extLst>
+          </p:cNvPr>
           <p:cNvSpPr>
             <a:spLocks noGrp="1"/>
           </p:cNvSpPr>
@@ -498,7 +504,7 @@
           <a:bodyPr/>
           <a:lstStyle/>
           <a:p>
-            <a:fld id="{C1FF6DA9-008F-8B48-92A6-B652298478BF}" type="slidenum">
+            <a:fld id="{76A5515E-906D-4A46-88BA-63D09FD3EC7D}" type="slidenum">
               <a:rPr lang="en-US" smtClean="0"/>
               <a:t>‹#›</a:t>
             </a:fld>
@@ -509,7 +515,7 @@
     </p:spTree>
     <p:extLst>
       <p:ext uri="{BB962C8B-B14F-4D97-AF65-F5344CB8AC3E}">
-        <p14:creationId xmlns:p14="http://schemas.microsoft.com/office/powerpoint/2010/main" val="2910927964"/>
+        <p14:creationId xmlns:p14="http://schemas.microsoft.com/office/powerpoint/2010/main" val="1545841621"/>
       </p:ext>
     </p:extLst>
   </p:cSld>
@@ -538,7 +544,13 @@
       </p:grpSpPr>
       <p:sp>
         <p:nvSpPr>
-          <p:cNvPr id="2" name="Vertical Title 1"/>
+          <p:cNvPr id="2" name="Vertical Title 1">
+            <a:extLst>
+              <a:ext uri="{FF2B5EF4-FFF2-40B4-BE49-F238E27FC236}">
+                <a16:creationId xmlns:a16="http://schemas.microsoft.com/office/drawing/2014/main" id="{42661D8F-EA79-97D2-98D9-A221F051C8FD}"/>
+              </a:ext>
+            </a:extLst>
+          </p:cNvPr>
           <p:cNvSpPr>
             <a:spLocks noGrp="1"/>
           </p:cNvSpPr>
@@ -548,8 +560,8 @@
         </p:nvSpPr>
         <p:spPr>
           <a:xfrm>
-            <a:off x="6629400" y="274638"/>
-            <a:ext cx="2057400" cy="5851525"/>
+            <a:off x="8724900" y="365125"/>
+            <a:ext cx="2628900" cy="5811838"/>
           </a:xfrm>
         </p:spPr>
         <p:txBody>
@@ -557,88 +569,98 @@
           <a:lstStyle/>
           <a:p>
             <a:r>
+              <a:rPr lang="en-US"/>
+              <a:t>Click to edit Master title style</a:t>
+            </a:r>
+          </a:p>
+        </p:txBody>
+      </p:sp>
+      <p:sp>
+        <p:nvSpPr>
+          <p:cNvPr id="3" name="Vertical Text Placeholder 2">
+            <a:extLst>
+              <a:ext uri="{FF2B5EF4-FFF2-40B4-BE49-F238E27FC236}">
+                <a16:creationId xmlns:a16="http://schemas.microsoft.com/office/drawing/2014/main" id="{BE057C05-42A3-6205-F40F-DDA63FAD7BAF}"/>
+              </a:ext>
+            </a:extLst>
+          </p:cNvPr>
+          <p:cNvSpPr>
+            <a:spLocks noGrp="1"/>
+          </p:cNvSpPr>
+          <p:nvPr>
+            <p:ph type="body" orient="vert" idx="1"/>
+          </p:nvPr>
+        </p:nvSpPr>
+        <p:spPr>
+          <a:xfrm>
+            <a:off x="838200" y="365125"/>
+            <a:ext cx="7734300" cy="5811838"/>
+          </a:xfrm>
+        </p:spPr>
+        <p:txBody>
+          <a:bodyPr vert="eaVert"/>
+          <a:lstStyle/>
+          <a:p>
+            <a:pPr lvl="0"/>
+            <a:r>
+              <a:rPr lang="en-US"/>
+              <a:t>Click to edit Master text styles</a:t>
+            </a:r>
+          </a:p>
+          <a:p>
+            <a:pPr lvl="1"/>
+            <a:r>
+              <a:rPr lang="en-US"/>
+              <a:t>Second level</a:t>
+            </a:r>
+          </a:p>
+          <a:p>
+            <a:pPr lvl="2"/>
+            <a:r>
+              <a:rPr lang="en-US"/>
+              <a:t>Third level</a:t>
+            </a:r>
+          </a:p>
+          <a:p>
+            <a:pPr lvl="3"/>
+            <a:r>
+              <a:rPr lang="en-US"/>
+              <a:t>Fourth level</a:t>
+            </a:r>
+          </a:p>
+          <a:p>
+            <a:pPr lvl="4"/>
+            <a:r>
+              <a:rPr lang="en-US"/>
+              <a:t>Fifth level</a:t>
+            </a:r>
+          </a:p>
+        </p:txBody>
+      </p:sp>
+      <p:sp>
+        <p:nvSpPr>
+          <p:cNvPr id="4" name="Date Placeholder 3">
+            <a:extLst>
+              <a:ext uri="{FF2B5EF4-FFF2-40B4-BE49-F238E27FC236}">
+                <a16:creationId xmlns:a16="http://schemas.microsoft.com/office/drawing/2014/main" id="{AE663F22-EFE2-41EA-3EFC-453658499488}"/>
+              </a:ext>
+            </a:extLst>
+          </p:cNvPr>
+          <p:cNvSpPr>
+            <a:spLocks noGrp="1"/>
+          </p:cNvSpPr>
+          <p:nvPr>
+            <p:ph type="dt" sz="half" idx="10"/>
+          </p:nvPr>
+        </p:nvSpPr>
+        <p:spPr/>
+        <p:txBody>
+          <a:bodyPr/>
+          <a:lstStyle/>
+          <a:p>
+            <a:fld id="{7994B958-401A-4A89-98CA-0A39E34EFB4D}" type="datetimeFigureOut">
               <a:rPr lang="en-US" smtClean="0"/>
-              <a:t>Click to edit Master title style</a:t>
-            </a:r>
-            <a:endParaRPr lang="en-US"/>
-          </a:p>
-        </p:txBody>
-      </p:sp>
-      <p:sp>
-        <p:nvSpPr>
-          <p:cNvPr id="3" name="Vertical Text Placeholder 2"/>
-          <p:cNvSpPr>
-            <a:spLocks noGrp="1"/>
-          </p:cNvSpPr>
-          <p:nvPr>
-            <p:ph type="body" orient="vert" idx="1"/>
-          </p:nvPr>
-        </p:nvSpPr>
-        <p:spPr>
-          <a:xfrm>
-            <a:off x="457200" y="274638"/>
-            <a:ext cx="6019800" cy="5851525"/>
-          </a:xfrm>
-        </p:spPr>
-        <p:txBody>
-          <a:bodyPr vert="eaVert"/>
-          <a:lstStyle/>
-          <a:p>
-            <a:pPr lvl="0"/>
-            <a:r>
-              <a:rPr lang="en-US" smtClean="0"/>
-              <a:t>Click to edit Master text styles</a:t>
-            </a:r>
-          </a:p>
-          <a:p>
-            <a:pPr lvl="1"/>
-            <a:r>
-              <a:rPr lang="en-US" smtClean="0"/>
-              <a:t>Second level</a:t>
-            </a:r>
-          </a:p>
-          <a:p>
-            <a:pPr lvl="2"/>
-            <a:r>
-              <a:rPr lang="en-US" smtClean="0"/>
-              <a:t>Third level</a:t>
-            </a:r>
-          </a:p>
-          <a:p>
-            <a:pPr lvl="3"/>
-            <a:r>
-              <a:rPr lang="en-US" smtClean="0"/>
-              <a:t>Fourth level</a:t>
-            </a:r>
-          </a:p>
-          <a:p>
-            <a:pPr lvl="4"/>
-            <a:r>
-              <a:rPr lang="en-US" smtClean="0"/>
-              <a:t>Fifth level</a:t>
-            </a:r>
-            <a:endParaRPr lang="en-US"/>
-          </a:p>
-        </p:txBody>
-      </p:sp>
-      <p:sp>
-        <p:nvSpPr>
-          <p:cNvPr id="4" name="Date Placeholder 3"/>
-          <p:cNvSpPr>
-            <a:spLocks noGrp="1"/>
-          </p:cNvSpPr>
-          <p:nvPr>
-            <p:ph type="dt" sz="half" idx="10"/>
-          </p:nvPr>
-        </p:nvSpPr>
-        <p:spPr/>
-        <p:txBody>
-          <a:bodyPr/>
-          <a:lstStyle/>
-          <a:p>
-            <a:fld id="{5BCAD085-E8A6-8845-BD4E-CB4CCA059FC4}" type="datetimeFigureOut">
-              <a:rPr lang="en-US" smtClean="0"/>
-              <a:t>1/27/13</a:t>
+              <a:t>7/13/2026</a:t>
             </a:fld>
             <a:endParaRPr lang="en-US"/>
           </a:p>
@@ -646,7 +668,13 @@
       </p:sp>
       <p:sp>
         <p:nvSpPr>
-          <p:cNvPr id="5" name="Footer Placeholder 4"/>
+          <p:cNvPr id="5" name="Footer Placeholder 4">
+            <a:extLst>
+              <a:ext uri="{FF2B5EF4-FFF2-40B4-BE49-F238E27FC236}">
+                <a16:creationId xmlns:a16="http://schemas.microsoft.com/office/drawing/2014/main" id="{65263B97-0F5B-D37C-3709-86A78498A4B2}"/>
+              </a:ext>
+            </a:extLst>
+          </p:cNvPr>
           <p:cNvSpPr>
             <a:spLocks noGrp="1"/>
           </p:cNvSpPr>
@@ -665,7 +693,13 @@
       </p:sp>
       <p:sp>
         <p:nvSpPr>
-          <p:cNvPr id="6" name="Slide Number Placeholder 5"/>
+          <p:cNvPr id="6" name="Slide Number Placeholder 5">
+            <a:extLst>
+              <a:ext uri="{FF2B5EF4-FFF2-40B4-BE49-F238E27FC236}">
+                <a16:creationId xmlns:a16="http://schemas.microsoft.com/office/drawing/2014/main" id="{CC20EF32-13D6-EA96-FE3E-B0A2CCF3ED43}"/>
+              </a:ext>
+            </a:extLst>
+          </p:cNvPr>
           <p:cNvSpPr>
             <a:spLocks noGrp="1"/>
           </p:cNvSpPr>
@@ -678,7 +712,7 @@
           <a:bodyPr/>
           <a:lstStyle/>
           <a:p>
-            <a:fld id="{C1FF6DA9-008F-8B48-92A6-B652298478BF}" type="slidenum">
+            <a:fld id="{76A5515E-906D-4A46-88BA-63D09FD3EC7D}" type="slidenum">
               <a:rPr lang="en-US" smtClean="0"/>
               <a:t>‹#›</a:t>
             </a:fld>
@@ -689,7 +723,7 @@
     </p:spTree>
     <p:extLst>
       <p:ext uri="{BB962C8B-B14F-4D97-AF65-F5344CB8AC3E}">
-        <p14:creationId xmlns:p14="http://schemas.microsoft.com/office/powerpoint/2010/main" val="3612223792"/>
+        <p14:creationId xmlns:p14="http://schemas.microsoft.com/office/powerpoint/2010/main" val="2498658605"/>
       </p:ext>
     </p:extLst>
   </p:cSld>
@@ -718,7 +752,13 @@
       </p:grpSpPr>
       <p:sp>
         <p:nvSpPr>
-          <p:cNvPr id="2" name="Title 1"/>
+          <p:cNvPr id="2" name="Title 1">
+            <a:extLst>
+              <a:ext uri="{FF2B5EF4-FFF2-40B4-BE49-F238E27FC236}">
+                <a16:creationId xmlns:a16="http://schemas.microsoft.com/office/drawing/2014/main" id="{E370413A-B2B4-0076-8BBF-A720FF857603}"/>
+              </a:ext>
+            </a:extLst>
+          </p:cNvPr>
           <p:cNvSpPr>
             <a:spLocks noGrp="1"/>
           </p:cNvSpPr>
@@ -732,83 +772,93 @@
           <a:lstStyle/>
           <a:p>
             <a:r>
+              <a:rPr lang="en-US"/>
+              <a:t>Click to edit Master title style</a:t>
+            </a:r>
+          </a:p>
+        </p:txBody>
+      </p:sp>
+      <p:sp>
+        <p:nvSpPr>
+          <p:cNvPr id="3" name="Content Placeholder 2">
+            <a:extLst>
+              <a:ext uri="{FF2B5EF4-FFF2-40B4-BE49-F238E27FC236}">
+                <a16:creationId xmlns:a16="http://schemas.microsoft.com/office/drawing/2014/main" id="{0DDB0F23-50A4-AF96-8BA7-FC3C2409233E}"/>
+              </a:ext>
+            </a:extLst>
+          </p:cNvPr>
+          <p:cNvSpPr>
+            <a:spLocks noGrp="1"/>
+          </p:cNvSpPr>
+          <p:nvPr>
+            <p:ph idx="1"/>
+          </p:nvPr>
+        </p:nvSpPr>
+        <p:spPr/>
+        <p:txBody>
+          <a:bodyPr/>
+          <a:lstStyle/>
+          <a:p>
+            <a:pPr lvl="0"/>
+            <a:r>
+              <a:rPr lang="en-US"/>
+              <a:t>Click to edit Master text styles</a:t>
+            </a:r>
+          </a:p>
+          <a:p>
+            <a:pPr lvl="1"/>
+            <a:r>
+              <a:rPr lang="en-US"/>
+              <a:t>Second level</a:t>
+            </a:r>
+          </a:p>
+          <a:p>
+            <a:pPr lvl="2"/>
+            <a:r>
+              <a:rPr lang="en-US"/>
+              <a:t>Third level</a:t>
+            </a:r>
+          </a:p>
+          <a:p>
+            <a:pPr lvl="3"/>
+            <a:r>
+              <a:rPr lang="en-US"/>
+              <a:t>Fourth level</a:t>
+            </a:r>
+          </a:p>
+          <a:p>
+            <a:pPr lvl="4"/>
+            <a:r>
+              <a:rPr lang="en-US"/>
+              <a:t>Fifth level</a:t>
+            </a:r>
+          </a:p>
+        </p:txBody>
+      </p:sp>
+      <p:sp>
+        <p:nvSpPr>
+          <p:cNvPr id="4" name="Date Placeholder 3">
+            <a:extLst>
+              <a:ext uri="{FF2B5EF4-FFF2-40B4-BE49-F238E27FC236}">
+                <a16:creationId xmlns:a16="http://schemas.microsoft.com/office/drawing/2014/main" id="{6B446B15-BE4F-5E17-5B93-7AE5C3F0CF76}"/>
+              </a:ext>
+            </a:extLst>
+          </p:cNvPr>
+          <p:cNvSpPr>
+            <a:spLocks noGrp="1"/>
+          </p:cNvSpPr>
+          <p:nvPr>
+            <p:ph type="dt" sz="half" idx="10"/>
+          </p:nvPr>
+        </p:nvSpPr>
+        <p:spPr/>
+        <p:txBody>
+          <a:bodyPr/>
+          <a:lstStyle/>
+          <a:p>
+            <a:fld id="{7994B958-401A-4A89-98CA-0A39E34EFB4D}" type="datetimeFigureOut">
               <a:rPr lang="en-US" smtClean="0"/>
-              <a:t>Click to edit Master title style</a:t>
-            </a:r>
-            <a:endParaRPr lang="en-US"/>
-          </a:p>
-        </p:txBody>
-      </p:sp>
-      <p:sp>
-        <p:nvSpPr>
-          <p:cNvPr id="3" name="Content Placeholder 2"/>
-          <p:cNvSpPr>
-            <a:spLocks noGrp="1"/>
-          </p:cNvSpPr>
-          <p:nvPr>
-            <p:ph idx="1"/>
-          </p:nvPr>
-        </p:nvSpPr>
-        <p:spPr/>
-        <p:txBody>
-          <a:bodyPr/>
-          <a:lstStyle/>
-          <a:p>
-            <a:pPr lvl="0"/>
-            <a:r>
-              <a:rPr lang="en-US" smtClean="0"/>
-              <a:t>Click to edit Master text styles</a:t>
-            </a:r>
-          </a:p>
-          <a:p>
-            <a:pPr lvl="1"/>
-            <a:r>
-              <a:rPr lang="en-US" smtClean="0"/>
-              <a:t>Second level</a:t>
-            </a:r>
-          </a:p>
-          <a:p>
-            <a:pPr lvl="2"/>
-            <a:r>
-              <a:rPr lang="en-US" smtClean="0"/>
-              <a:t>Third level</a:t>
-            </a:r>
-          </a:p>
-          <a:p>
-            <a:pPr lvl="3"/>
-            <a:r>
-              <a:rPr lang="en-US" smtClean="0"/>
-              <a:t>Fourth level</a:t>
-            </a:r>
-          </a:p>
-          <a:p>
-            <a:pPr lvl="4"/>
-            <a:r>
-              <a:rPr lang="en-US" smtClean="0"/>
-              <a:t>Fifth level</a:t>
-            </a:r>
-            <a:endParaRPr lang="en-US"/>
-          </a:p>
-        </p:txBody>
-      </p:sp>
-      <p:sp>
-        <p:nvSpPr>
-          <p:cNvPr id="4" name="Date Placeholder 3"/>
-          <p:cNvSpPr>
-            <a:spLocks noGrp="1"/>
-          </p:cNvSpPr>
-          <p:nvPr>
-            <p:ph type="dt" sz="half" idx="10"/>
-          </p:nvPr>
-        </p:nvSpPr>
-        <p:spPr/>
-        <p:txBody>
-          <a:bodyPr/>
-          <a:lstStyle/>
-          <a:p>
-            <a:fld id="{5BCAD085-E8A6-8845-BD4E-CB4CCA059FC4}" type="datetimeFigureOut">
-              <a:rPr lang="en-US" smtClean="0"/>
-              <a:t>1/27/13</a:t>
+              <a:t>7/13/2026</a:t>
             </a:fld>
             <a:endParaRPr lang="en-US"/>
           </a:p>
@@ -816,7 +866,13 @@
       </p:sp>
       <p:sp>
         <p:nvSpPr>
-          <p:cNvPr id="5" name="Footer Placeholder 4"/>
+          <p:cNvPr id="5" name="Footer Placeholder 4">
+            <a:extLst>
+              <a:ext uri="{FF2B5EF4-FFF2-40B4-BE49-F238E27FC236}">
+                <a16:creationId xmlns:a16="http://schemas.microsoft.com/office/drawing/2014/main" id="{DFD90197-427E-C8E2-B194-AFD72763F993}"/>
+              </a:ext>
+            </a:extLst>
+          </p:cNvPr>
           <p:cNvSpPr>
             <a:spLocks noGrp="1"/>
           </p:cNvSpPr>
@@ -835,7 +891,13 @@
       </p:sp>
       <p:sp>
         <p:nvSpPr>
-          <p:cNvPr id="6" name="Slide Number Placeholder 5"/>
+          <p:cNvPr id="6" name="Slide Number Placeholder 5">
+            <a:extLst>
+              <a:ext uri="{FF2B5EF4-FFF2-40B4-BE49-F238E27FC236}">
+                <a16:creationId xmlns:a16="http://schemas.microsoft.com/office/drawing/2014/main" id="{FC9C3114-65B4-28B2-A9DA-52CE95E0BE26}"/>
+              </a:ext>
+            </a:extLst>
+          </p:cNvPr>
           <p:cNvSpPr>
             <a:spLocks noGrp="1"/>
           </p:cNvSpPr>
@@ -848,7 +910,7 @@
           <a:bodyPr/>
           <a:lstStyle/>
           <a:p>
-            <a:fld id="{C1FF6DA9-008F-8B48-92A6-B652298478BF}" type="slidenum">
+            <a:fld id="{76A5515E-906D-4A46-88BA-63D09FD3EC7D}" type="slidenum">
               <a:rPr lang="en-US" smtClean="0"/>
               <a:t>‹#›</a:t>
             </a:fld>
@@ -859,7 +921,7 @@
     </p:spTree>
     <p:extLst>
       <p:ext uri="{BB962C8B-B14F-4D97-AF65-F5344CB8AC3E}">
-        <p14:creationId xmlns:p14="http://schemas.microsoft.com/office/powerpoint/2010/main" val="2614314258"/>
+        <p14:creationId xmlns:p14="http://schemas.microsoft.com/office/powerpoint/2010/main" val="4242879104"/>
       </p:ext>
     </p:extLst>
   </p:cSld>
@@ -888,7 +950,13 @@
       </p:grpSpPr>
       <p:sp>
         <p:nvSpPr>
-          <p:cNvPr id="2" name="Title 1"/>
+          <p:cNvPr id="2" name="Title 1">
+            <a:extLst>
+              <a:ext uri="{FF2B5EF4-FFF2-40B4-BE49-F238E27FC236}">
+                <a16:creationId xmlns:a16="http://schemas.microsoft.com/office/drawing/2014/main" id="{19597475-17D1-A28D-F8CD-10BA91EBA3B5}"/>
+              </a:ext>
+            </a:extLst>
+          </p:cNvPr>
           <p:cNvSpPr>
             <a:spLocks noGrp="1"/>
           </p:cNvSpPr>
@@ -898,29 +966,34 @@
         </p:nvSpPr>
         <p:spPr>
           <a:xfrm>
-            <a:off x="722313" y="4406900"/>
-            <a:ext cx="7772400" cy="1362075"/>
-          </a:xfrm>
-        </p:spPr>
-        <p:txBody>
-          <a:bodyPr anchor="t"/>
+            <a:off x="831850" y="1709738"/>
+            <a:ext cx="10515600" cy="2852737"/>
+          </a:xfrm>
+        </p:spPr>
+        <p:txBody>
+          <a:bodyPr anchor="b"/>
           <a:lstStyle>
-            <a:lvl1pPr algn="l">
-              <a:defRPr sz="4000" b="1" cap="all"/>
+            <a:lvl1pPr>
+              <a:defRPr sz="6000"/>
             </a:lvl1pPr>
           </a:lstStyle>
           <a:p>
             <a:r>
-              <a:rPr lang="en-US" smtClean="0"/>
+              <a:rPr lang="en-US"/>
               <a:t>Click to edit Master title style</a:t>
             </a:r>
-            <a:endParaRPr lang="en-US"/>
-          </a:p>
-        </p:txBody>
-      </p:sp>
-      <p:sp>
-        <p:nvSpPr>
-          <p:cNvPr id="3" name="Text Placeholder 2"/>
+          </a:p>
+        </p:txBody>
+      </p:sp>
+      <p:sp>
+        <p:nvSpPr>
+          <p:cNvPr id="3" name="Text Placeholder 2">
+            <a:extLst>
+              <a:ext uri="{FF2B5EF4-FFF2-40B4-BE49-F238E27FC236}">
+                <a16:creationId xmlns:a16="http://schemas.microsoft.com/office/drawing/2014/main" id="{3946AD13-7D52-0BF0-DCC7-814B2696DEEE}"/>
+              </a:ext>
+            </a:extLst>
+          </p:cNvPr>
           <p:cNvSpPr>
             <a:spLocks noGrp="1"/>
           </p:cNvSpPr>
@@ -930,16 +1003,16 @@
         </p:nvSpPr>
         <p:spPr>
           <a:xfrm>
-            <a:off x="722313" y="2906713"/>
-            <a:ext cx="7772400" cy="1500187"/>
-          </a:xfrm>
-        </p:spPr>
-        <p:txBody>
-          <a:bodyPr anchor="b"/>
+            <a:off x="831850" y="4589463"/>
+            <a:ext cx="10515600" cy="1500187"/>
+          </a:xfrm>
+        </p:spPr>
+        <p:txBody>
+          <a:bodyPr/>
           <a:lstStyle>
             <a:lvl1pPr marL="0" indent="0">
               <a:buNone/>
-              <a:defRPr sz="2000">
+              <a:defRPr sz="2400">
                 <a:solidFill>
                   <a:schemeClr val="tx1">
                     <a:tint val="75000"/>
@@ -949,7 +1022,7 @@
             </a:lvl1pPr>
             <a:lvl2pPr marL="457200" indent="0">
               <a:buNone/>
-              <a:defRPr sz="1800">
+              <a:defRPr sz="2000">
                 <a:solidFill>
                   <a:schemeClr val="tx1">
                     <a:tint val="75000"/>
@@ -959,7 +1032,7 @@
             </a:lvl2pPr>
             <a:lvl3pPr marL="914400" indent="0">
               <a:buNone/>
-              <a:defRPr sz="1600">
+              <a:defRPr sz="1800">
                 <a:solidFill>
                   <a:schemeClr val="tx1">
                     <a:tint val="75000"/>
@@ -969,7 +1042,7 @@
             </a:lvl3pPr>
             <a:lvl4pPr marL="1371600" indent="0">
               <a:buNone/>
-              <a:defRPr sz="1400">
+              <a:defRPr sz="1600">
                 <a:solidFill>
                   <a:schemeClr val="tx1">
                     <a:tint val="75000"/>
@@ -979,7 +1052,7 @@
             </a:lvl4pPr>
             <a:lvl5pPr marL="1828800" indent="0">
               <a:buNone/>
-              <a:defRPr sz="1400">
+              <a:defRPr sz="1600">
                 <a:solidFill>
                   <a:schemeClr val="tx1">
                     <a:tint val="75000"/>
@@ -989,7 +1062,7 @@
             </a:lvl5pPr>
             <a:lvl6pPr marL="2286000" indent="0">
               <a:buNone/>
-              <a:defRPr sz="1400">
+              <a:defRPr sz="1600">
                 <a:solidFill>
                   <a:schemeClr val="tx1">
                     <a:tint val="75000"/>
@@ -999,7 +1072,7 @@
             </a:lvl6pPr>
             <a:lvl7pPr marL="2743200" indent="0">
               <a:buNone/>
-              <a:defRPr sz="1400">
+              <a:defRPr sz="1600">
                 <a:solidFill>
                   <a:schemeClr val="tx1">
                     <a:tint val="75000"/>
@@ -1009,7 +1082,7 @@
             </a:lvl7pPr>
             <a:lvl8pPr marL="3200400" indent="0">
               <a:buNone/>
-              <a:defRPr sz="1400">
+              <a:defRPr sz="1600">
                 <a:solidFill>
                   <a:schemeClr val="tx1">
                     <a:tint val="75000"/>
@@ -1019,7 +1092,7 @@
             </a:lvl8pPr>
             <a:lvl9pPr marL="3657600" indent="0">
               <a:buNone/>
-              <a:defRPr sz="1400">
+              <a:defRPr sz="1600">
                 <a:solidFill>
                   <a:schemeClr val="tx1">
                     <a:tint val="75000"/>
@@ -1031,30 +1104,36 @@
           <a:p>
             <a:pPr lvl="0"/>
             <a:r>
+              <a:rPr lang="en-US"/>
+              <a:t>Click to edit Master text styles</a:t>
+            </a:r>
+          </a:p>
+        </p:txBody>
+      </p:sp>
+      <p:sp>
+        <p:nvSpPr>
+          <p:cNvPr id="4" name="Date Placeholder 3">
+            <a:extLst>
+              <a:ext uri="{FF2B5EF4-FFF2-40B4-BE49-F238E27FC236}">
+                <a16:creationId xmlns:a16="http://schemas.microsoft.com/office/drawing/2014/main" id="{AB2A673A-D86F-BA5A-0B3E-F514DBA98772}"/>
+              </a:ext>
+            </a:extLst>
+          </p:cNvPr>
+          <p:cNvSpPr>
+            <a:spLocks noGrp="1"/>
+          </p:cNvSpPr>
+          <p:nvPr>
+            <p:ph type="dt" sz="half" idx="10"/>
+          </p:nvPr>
+        </p:nvSpPr>
+        <p:spPr/>
+        <p:txBody>
+          <a:bodyPr/>
+          <a:lstStyle/>
+          <a:p>
+            <a:fld id="{7994B958-401A-4A89-98CA-0A39E34EFB4D}" type="datetimeFigureOut">
               <a:rPr lang="en-US" smtClean="0"/>
-              <a:t>Click to edit Master text styles</a:t>
-            </a:r>
-          </a:p>
-        </p:txBody>
-      </p:sp>
-      <p:sp>
-        <p:nvSpPr>
-          <p:cNvPr id="4" name="Date Placeholder 3"/>
-          <p:cNvSpPr>
-            <a:spLocks noGrp="1"/>
-          </p:cNvSpPr>
-          <p:nvPr>
-            <p:ph type="dt" sz="half" idx="10"/>
-          </p:nvPr>
-        </p:nvSpPr>
-        <p:spPr/>
-        <p:txBody>
-          <a:bodyPr/>
-          <a:lstStyle/>
-          <a:p>
-            <a:fld id="{5BCAD085-E8A6-8845-BD4E-CB4CCA059FC4}" type="datetimeFigureOut">
-              <a:rPr lang="en-US" smtClean="0"/>
-              <a:t>1/27/13</a:t>
+              <a:t>7/13/2026</a:t>
             </a:fld>
             <a:endParaRPr lang="en-US"/>
           </a:p>
@@ -1062,7 +1141,13 @@
       </p:sp>
       <p:sp>
         <p:nvSpPr>
-          <p:cNvPr id="5" name="Footer Placeholder 4"/>
+          <p:cNvPr id="5" name="Footer Placeholder 4">
+            <a:extLst>
+              <a:ext uri="{FF2B5EF4-FFF2-40B4-BE49-F238E27FC236}">
+                <a16:creationId xmlns:a16="http://schemas.microsoft.com/office/drawing/2014/main" id="{D3446126-2EBD-83A4-000E-C1E6106D3017}"/>
+              </a:ext>
+            </a:extLst>
+          </p:cNvPr>
           <p:cNvSpPr>
             <a:spLocks noGrp="1"/>
           </p:cNvSpPr>
@@ -1081,7 +1166,13 @@
       </p:sp>
       <p:sp>
         <p:nvSpPr>
-          <p:cNvPr id="6" name="Slide Number Placeholder 5"/>
+          <p:cNvPr id="6" name="Slide Number Placeholder 5">
+            <a:extLst>
+              <a:ext uri="{FF2B5EF4-FFF2-40B4-BE49-F238E27FC236}">
+                <a16:creationId xmlns:a16="http://schemas.microsoft.com/office/drawing/2014/main" id="{FBC9E6E5-9E70-0AB6-09A8-25B33F6DDFF7}"/>
+              </a:ext>
+            </a:extLst>
+          </p:cNvPr>
           <p:cNvSpPr>
             <a:spLocks noGrp="1"/>
           </p:cNvSpPr>
@@ -1094,7 +1185,7 @@
           <a:bodyPr/>
           <a:lstStyle/>
           <a:p>
-            <a:fld id="{C1FF6DA9-008F-8B48-92A6-B652298478BF}" type="slidenum">
+            <a:fld id="{76A5515E-906D-4A46-88BA-63D09FD3EC7D}" type="slidenum">
               <a:rPr lang="en-US" smtClean="0"/>
               <a:t>‹#›</a:t>
             </a:fld>
@@ -1105,7 +1196,7 @@
     </p:spTree>
     <p:extLst>
       <p:ext uri="{BB962C8B-B14F-4D97-AF65-F5344CB8AC3E}">
-        <p14:creationId xmlns:p14="http://schemas.microsoft.com/office/powerpoint/2010/main" val="960648375"/>
+        <p14:creationId xmlns:p14="http://schemas.microsoft.com/office/powerpoint/2010/main" val="1550755985"/>
       </p:ext>
     </p:extLst>
   </p:cSld>
@@ -1134,7 +1225,13 @@
       </p:grpSpPr>
       <p:sp>
         <p:nvSpPr>
-          <p:cNvPr id="2" name="Title 1"/>
+          <p:cNvPr id="2" name="Title 1">
+            <a:extLst>
+              <a:ext uri="{FF2B5EF4-FFF2-40B4-BE49-F238E27FC236}">
+                <a16:creationId xmlns:a16="http://schemas.microsoft.com/office/drawing/2014/main" id="{A53962DE-B4A3-AA96-AB54-21E510DC7BC1}"/>
+              </a:ext>
+            </a:extLst>
+          </p:cNvPr>
           <p:cNvSpPr>
             <a:spLocks noGrp="1"/>
           </p:cNvSpPr>
@@ -1148,201 +1245,160 @@
           <a:lstStyle/>
           <a:p>
             <a:r>
+              <a:rPr lang="en-US"/>
+              <a:t>Click to edit Master title style</a:t>
+            </a:r>
+          </a:p>
+        </p:txBody>
+      </p:sp>
+      <p:sp>
+        <p:nvSpPr>
+          <p:cNvPr id="3" name="Content Placeholder 2">
+            <a:extLst>
+              <a:ext uri="{FF2B5EF4-FFF2-40B4-BE49-F238E27FC236}">
+                <a16:creationId xmlns:a16="http://schemas.microsoft.com/office/drawing/2014/main" id="{16119044-0432-FB33-5E4B-E81EE4CE7E8F}"/>
+              </a:ext>
+            </a:extLst>
+          </p:cNvPr>
+          <p:cNvSpPr>
+            <a:spLocks noGrp="1"/>
+          </p:cNvSpPr>
+          <p:nvPr>
+            <p:ph sz="half" idx="1"/>
+          </p:nvPr>
+        </p:nvSpPr>
+        <p:spPr>
+          <a:xfrm>
+            <a:off x="838200" y="1825625"/>
+            <a:ext cx="5181600" cy="4351338"/>
+          </a:xfrm>
+        </p:spPr>
+        <p:txBody>
+          <a:bodyPr/>
+          <a:lstStyle/>
+          <a:p>
+            <a:pPr lvl="0"/>
+            <a:r>
+              <a:rPr lang="en-US"/>
+              <a:t>Click to edit Master text styles</a:t>
+            </a:r>
+          </a:p>
+          <a:p>
+            <a:pPr lvl="1"/>
+            <a:r>
+              <a:rPr lang="en-US"/>
+              <a:t>Second level</a:t>
+            </a:r>
+          </a:p>
+          <a:p>
+            <a:pPr lvl="2"/>
+            <a:r>
+              <a:rPr lang="en-US"/>
+              <a:t>Third level</a:t>
+            </a:r>
+          </a:p>
+          <a:p>
+            <a:pPr lvl="3"/>
+            <a:r>
+              <a:rPr lang="en-US"/>
+              <a:t>Fourth level</a:t>
+            </a:r>
+          </a:p>
+          <a:p>
+            <a:pPr lvl="4"/>
+            <a:r>
+              <a:rPr lang="en-US"/>
+              <a:t>Fifth level</a:t>
+            </a:r>
+          </a:p>
+        </p:txBody>
+      </p:sp>
+      <p:sp>
+        <p:nvSpPr>
+          <p:cNvPr id="4" name="Content Placeholder 3">
+            <a:extLst>
+              <a:ext uri="{FF2B5EF4-FFF2-40B4-BE49-F238E27FC236}">
+                <a16:creationId xmlns:a16="http://schemas.microsoft.com/office/drawing/2014/main" id="{FFB9860E-D56C-83FA-5D3E-372AD216B87A}"/>
+              </a:ext>
+            </a:extLst>
+          </p:cNvPr>
+          <p:cNvSpPr>
+            <a:spLocks noGrp="1"/>
+          </p:cNvSpPr>
+          <p:nvPr>
+            <p:ph sz="half" idx="2"/>
+          </p:nvPr>
+        </p:nvSpPr>
+        <p:spPr>
+          <a:xfrm>
+            <a:off x="6172200" y="1825625"/>
+            <a:ext cx="5181600" cy="4351338"/>
+          </a:xfrm>
+        </p:spPr>
+        <p:txBody>
+          <a:bodyPr/>
+          <a:lstStyle/>
+          <a:p>
+            <a:pPr lvl="0"/>
+            <a:r>
+              <a:rPr lang="en-US"/>
+              <a:t>Click to edit Master text styles</a:t>
+            </a:r>
+          </a:p>
+          <a:p>
+            <a:pPr lvl="1"/>
+            <a:r>
+              <a:rPr lang="en-US"/>
+              <a:t>Second level</a:t>
+            </a:r>
+          </a:p>
+          <a:p>
+            <a:pPr lvl="2"/>
+            <a:r>
+              <a:rPr lang="en-US"/>
+              <a:t>Third level</a:t>
+            </a:r>
+          </a:p>
+          <a:p>
+            <a:pPr lvl="3"/>
+            <a:r>
+              <a:rPr lang="en-US"/>
+              <a:t>Fourth level</a:t>
+            </a:r>
+          </a:p>
+          <a:p>
+            <a:pPr lvl="4"/>
+            <a:r>
+              <a:rPr lang="en-US"/>
+              <a:t>Fifth level</a:t>
+            </a:r>
+          </a:p>
+        </p:txBody>
+      </p:sp>
+      <p:sp>
+        <p:nvSpPr>
+          <p:cNvPr id="5" name="Date Placeholder 4">
+            <a:extLst>
+              <a:ext uri="{FF2B5EF4-FFF2-40B4-BE49-F238E27FC236}">
+                <a16:creationId xmlns:a16="http://schemas.microsoft.com/office/drawing/2014/main" id="{372C890D-1B98-705A-5BFC-91C70B03251E}"/>
+              </a:ext>
+            </a:extLst>
+          </p:cNvPr>
+          <p:cNvSpPr>
+            <a:spLocks noGrp="1"/>
+          </p:cNvSpPr>
+          <p:nvPr>
+            <p:ph type="dt" sz="half" idx="10"/>
+          </p:nvPr>
+        </p:nvSpPr>
+        <p:spPr/>
+        <p:txBody>
+          <a:bodyPr/>
+          <a:lstStyle/>
+          <a:p>
+            <a:fld id="{7994B958-401A-4A89-98CA-0A39E34EFB4D}" type="datetimeFigureOut">
               <a:rPr lang="en-US" smtClean="0"/>
-              <a:t>Click to edit Master title style</a:t>
-            </a:r>
-            <a:endParaRPr lang="en-US"/>
-          </a:p>
-        </p:txBody>
-      </p:sp>
-      <p:sp>
-        <p:nvSpPr>
-          <p:cNvPr id="3" name="Content Placeholder 2"/>
-          <p:cNvSpPr>
-            <a:spLocks noGrp="1"/>
-          </p:cNvSpPr>
-          <p:nvPr>
-            <p:ph sz="half" idx="1"/>
-          </p:nvPr>
-        </p:nvSpPr>
-        <p:spPr>
-          <a:xfrm>
-            <a:off x="457200" y="1600200"/>
-            <a:ext cx="4038600" cy="4525963"/>
-          </a:xfrm>
-        </p:spPr>
-        <p:txBody>
-          <a:bodyPr/>
-          <a:lstStyle>
-            <a:lvl1pPr>
-              <a:defRPr sz="2800"/>
-            </a:lvl1pPr>
-            <a:lvl2pPr>
-              <a:defRPr sz="2400"/>
-            </a:lvl2pPr>
-            <a:lvl3pPr>
-              <a:defRPr sz="2000"/>
-            </a:lvl3pPr>
-            <a:lvl4pPr>
-              <a:defRPr sz="1800"/>
-            </a:lvl4pPr>
-            <a:lvl5pPr>
-              <a:defRPr sz="1800"/>
-            </a:lvl5pPr>
-            <a:lvl6pPr>
-              <a:defRPr sz="1800"/>
-            </a:lvl6pPr>
-            <a:lvl7pPr>
-              <a:defRPr sz="1800"/>
-            </a:lvl7pPr>
-            <a:lvl8pPr>
-              <a:defRPr sz="1800"/>
-            </a:lvl8pPr>
-            <a:lvl9pPr>
-              <a:defRPr sz="1800"/>
-            </a:lvl9pPr>
-          </a:lstStyle>
-          <a:p>
-            <a:pPr lvl="0"/>
-            <a:r>
-              <a:rPr lang="en-US" smtClean="0"/>
-              <a:t>Click to edit Master text styles</a:t>
-            </a:r>
-          </a:p>
-          <a:p>
-            <a:pPr lvl="1"/>
-            <a:r>
-              <a:rPr lang="en-US" smtClean="0"/>
-              <a:t>Second level</a:t>
-            </a:r>
-          </a:p>
-          <a:p>
-            <a:pPr lvl="2"/>
-            <a:r>
-              <a:rPr lang="en-US" smtClean="0"/>
-              <a:t>Third level</a:t>
-            </a:r>
-          </a:p>
-          <a:p>
-            <a:pPr lvl="3"/>
-            <a:r>
-              <a:rPr lang="en-US" smtClean="0"/>
-              <a:t>Fourth level</a:t>
-            </a:r>
-          </a:p>
-          <a:p>
-            <a:pPr lvl="4"/>
-            <a:r>
-              <a:rPr lang="en-US" smtClean="0"/>
-              <a:t>Fifth level</a:t>
-            </a:r>
-            <a:endParaRPr lang="en-US"/>
-          </a:p>
-        </p:txBody>
-      </p:sp>
-      <p:sp>
-        <p:nvSpPr>
-          <p:cNvPr id="4" name="Content Placeholder 3"/>
-          <p:cNvSpPr>
-            <a:spLocks noGrp="1"/>
-          </p:cNvSpPr>
-          <p:nvPr>
-            <p:ph sz="half" idx="2"/>
-          </p:nvPr>
-        </p:nvSpPr>
-        <p:spPr>
-          <a:xfrm>
-            <a:off x="4648200" y="1600200"/>
-            <a:ext cx="4038600" cy="4525963"/>
-          </a:xfrm>
-        </p:spPr>
-        <p:txBody>
-          <a:bodyPr/>
-          <a:lstStyle>
-            <a:lvl1pPr>
-              <a:defRPr sz="2800"/>
-            </a:lvl1pPr>
-            <a:lvl2pPr>
-              <a:defRPr sz="2400"/>
-            </a:lvl2pPr>
-            <a:lvl3pPr>
-              <a:defRPr sz="2000"/>
-            </a:lvl3pPr>
-            <a:lvl4pPr>
-              <a:defRPr sz="1800"/>
-            </a:lvl4pPr>
-            <a:lvl5pPr>
-              <a:defRPr sz="1800"/>
-            </a:lvl5pPr>
-            <a:lvl6pPr>
-              <a:defRPr sz="1800"/>
-            </a:lvl6pPr>
-            <a:lvl7pPr>
-              <a:defRPr sz="1800"/>
-            </a:lvl7pPr>
-            <a:lvl8pPr>
-              <a:defRPr sz="1800"/>
-            </a:lvl8pPr>
-            <a:lvl9pPr>
-              <a:defRPr sz="1800"/>
-            </a:lvl9pPr>
-          </a:lstStyle>
-          <a:p>
-            <a:pPr lvl="0"/>
-            <a:r>
-              <a:rPr lang="en-US" smtClean="0"/>
-              <a:t>Click to edit Master text styles</a:t>
-            </a:r>
-          </a:p>
-          <a:p>
-            <a:pPr lvl="1"/>
-            <a:r>
-              <a:rPr lang="en-US" smtClean="0"/>
-              <a:t>Second level</a:t>
-            </a:r>
-          </a:p>
-          <a:p>
-            <a:pPr lvl="2"/>
-            <a:r>
-              <a:rPr lang="en-US" smtClean="0"/>
-              <a:t>Third level</a:t>
-            </a:r>
-          </a:p>
-          <a:p>
-            <a:pPr lvl="3"/>
-            <a:r>
-              <a:rPr lang="en-US" smtClean="0"/>
-              <a:t>Fourth level</a:t>
-            </a:r>
-          </a:p>
-          <a:p>
-            <a:pPr lvl="4"/>
-            <a:r>
-              <a:rPr lang="en-US" smtClean="0"/>
-              <a:t>Fifth level</a:t>
-            </a:r>
-            <a:endParaRPr lang="en-US"/>
-          </a:p>
-        </p:txBody>
-      </p:sp>
-      <p:sp>
-        <p:nvSpPr>
-          <p:cNvPr id="5" name="Date Placeholder 4"/>
-          <p:cNvSpPr>
-            <a:spLocks noGrp="1"/>
-          </p:cNvSpPr>
-          <p:nvPr>
-            <p:ph type="dt" sz="half" idx="10"/>
-          </p:nvPr>
-        </p:nvSpPr>
-        <p:spPr/>
-        <p:txBody>
-          <a:bodyPr/>
-          <a:lstStyle/>
-          <a:p>
-            <a:fld id="{5BCAD085-E8A6-8845-BD4E-CB4CCA059FC4}" type="datetimeFigureOut">
-              <a:rPr lang="en-US" smtClean="0"/>
-              <a:t>1/27/13</a:t>
+              <a:t>7/13/2026</a:t>
             </a:fld>
             <a:endParaRPr lang="en-US"/>
           </a:p>
@@ -1350,7 +1406,13 @@
       </p:sp>
       <p:sp>
         <p:nvSpPr>
-          <p:cNvPr id="6" name="Footer Placeholder 5"/>
+          <p:cNvPr id="6" name="Footer Placeholder 5">
+            <a:extLst>
+              <a:ext uri="{FF2B5EF4-FFF2-40B4-BE49-F238E27FC236}">
+                <a16:creationId xmlns:a16="http://schemas.microsoft.com/office/drawing/2014/main" id="{3C628943-069E-0E4F-A4DC-ACE13C7F6E0F}"/>
+              </a:ext>
+            </a:extLst>
+          </p:cNvPr>
           <p:cNvSpPr>
             <a:spLocks noGrp="1"/>
           </p:cNvSpPr>
@@ -1369,7 +1431,13 @@
       </p:sp>
       <p:sp>
         <p:nvSpPr>
-          <p:cNvPr id="7" name="Slide Number Placeholder 6"/>
+          <p:cNvPr id="7" name="Slide Number Placeholder 6">
+            <a:extLst>
+              <a:ext uri="{FF2B5EF4-FFF2-40B4-BE49-F238E27FC236}">
+                <a16:creationId xmlns:a16="http://schemas.microsoft.com/office/drawing/2014/main" id="{2FC67865-1BF8-4D36-18D3-08E9AEC51BB1}"/>
+              </a:ext>
+            </a:extLst>
+          </p:cNvPr>
           <p:cNvSpPr>
             <a:spLocks noGrp="1"/>
           </p:cNvSpPr>
@@ -1382,7 +1450,7 @@
           <a:bodyPr/>
           <a:lstStyle/>
           <a:p>
-            <a:fld id="{C1FF6DA9-008F-8B48-92A6-B652298478BF}" type="slidenum">
+            <a:fld id="{76A5515E-906D-4A46-88BA-63D09FD3EC7D}" type="slidenum">
               <a:rPr lang="en-US" smtClean="0"/>
               <a:t>‹#›</a:t>
             </a:fld>
@@ -1393,7 +1461,7 @@
     </p:spTree>
     <p:extLst>
       <p:ext uri="{BB962C8B-B14F-4D97-AF65-F5344CB8AC3E}">
-        <p14:creationId xmlns:p14="http://schemas.microsoft.com/office/powerpoint/2010/main" val="2782244947"/>
+        <p14:creationId xmlns:p14="http://schemas.microsoft.com/office/powerpoint/2010/main" val="797722497"/>
       </p:ext>
     </p:extLst>
   </p:cSld>
@@ -1422,7 +1490,13 @@
       </p:grpSpPr>
       <p:sp>
         <p:nvSpPr>
-          <p:cNvPr id="2" name="Title 1"/>
+          <p:cNvPr id="2" name="Title 1">
+            <a:extLst>
+              <a:ext uri="{FF2B5EF4-FFF2-40B4-BE49-F238E27FC236}">
+                <a16:creationId xmlns:a16="http://schemas.microsoft.com/office/drawing/2014/main" id="{FB2BC745-2D34-DA43-ADA5-EE6FF17EEE76}"/>
+              </a:ext>
+            </a:extLst>
+          </p:cNvPr>
           <p:cNvSpPr>
             <a:spLocks noGrp="1"/>
           </p:cNvSpPr>
@@ -1430,26 +1504,32 @@
             <p:ph type="title"/>
           </p:nvPr>
         </p:nvSpPr>
-        <p:spPr/>
+        <p:spPr>
+          <a:xfrm>
+            <a:off x="839788" y="365125"/>
+            <a:ext cx="10515600" cy="1325563"/>
+          </a:xfrm>
+        </p:spPr>
         <p:txBody>
           <a:bodyPr/>
-          <a:lstStyle>
-            <a:lvl1pPr>
-              <a:defRPr/>
-            </a:lvl1pPr>
-          </a:lstStyle>
-          <a:p>
-            <a:r>
-              <a:rPr lang="en-US" smtClean="0"/>
+          <a:lstStyle/>
+          <a:p>
+            <a:r>
+              <a:rPr lang="en-US"/>
               <a:t>Click to edit Master title style</a:t>
             </a:r>
-            <a:endParaRPr lang="en-US"/>
-          </a:p>
-        </p:txBody>
-      </p:sp>
-      <p:sp>
-        <p:nvSpPr>
-          <p:cNvPr id="3" name="Text Placeholder 2"/>
+          </a:p>
+        </p:txBody>
+      </p:sp>
+      <p:sp>
+        <p:nvSpPr>
+          <p:cNvPr id="3" name="Text Placeholder 2">
+            <a:extLst>
+              <a:ext uri="{FF2B5EF4-FFF2-40B4-BE49-F238E27FC236}">
+                <a16:creationId xmlns:a16="http://schemas.microsoft.com/office/drawing/2014/main" id="{68291416-9DD0-70C0-BC01-2D8BD72650A1}"/>
+              </a:ext>
+            </a:extLst>
+          </p:cNvPr>
           <p:cNvSpPr>
             <a:spLocks noGrp="1"/>
           </p:cNvSpPr>
@@ -1459,8 +1539,8 @@
         </p:nvSpPr>
         <p:spPr>
           <a:xfrm>
-            <a:off x="457200" y="1535113"/>
-            <a:ext cx="4040188" cy="639762"/>
+            <a:off x="839788" y="1681163"/>
+            <a:ext cx="5157787" cy="823912"/>
           </a:xfrm>
         </p:spPr>
         <p:txBody>
@@ -1506,7 +1586,7 @@
           <a:p>
             <a:pPr lvl="0"/>
             <a:r>
-              <a:rPr lang="en-US" smtClean="0"/>
+              <a:rPr lang="en-US"/>
               <a:t>Click to edit Master text styles</a:t>
             </a:r>
           </a:p>
@@ -1514,7 +1594,13 @@
       </p:sp>
       <p:sp>
         <p:nvSpPr>
-          <p:cNvPr id="4" name="Content Placeholder 3"/>
+          <p:cNvPr id="4" name="Content Placeholder 3">
+            <a:extLst>
+              <a:ext uri="{FF2B5EF4-FFF2-40B4-BE49-F238E27FC236}">
+                <a16:creationId xmlns:a16="http://schemas.microsoft.com/office/drawing/2014/main" id="{502EE670-E49F-76B1-712E-D30F43F69D7E}"/>
+              </a:ext>
+            </a:extLst>
+          </p:cNvPr>
           <p:cNvSpPr>
             <a:spLocks noGrp="1"/>
           </p:cNvSpPr>
@@ -1524,82 +1610,59 @@
         </p:nvSpPr>
         <p:spPr>
           <a:xfrm>
-            <a:off x="457200" y="2174875"/>
-            <a:ext cx="4040188" cy="3951288"/>
+            <a:off x="839788" y="2505075"/>
+            <a:ext cx="5157787" cy="3684588"/>
           </a:xfrm>
         </p:spPr>
         <p:txBody>
           <a:bodyPr/>
-          <a:lstStyle>
-            <a:lvl1pPr>
-              <a:defRPr sz="2400"/>
-            </a:lvl1pPr>
-            <a:lvl2pPr>
-              <a:defRPr sz="2000"/>
-            </a:lvl2pPr>
-            <a:lvl3pPr>
-              <a:defRPr sz="1800"/>
-            </a:lvl3pPr>
-            <a:lvl4pPr>
-              <a:defRPr sz="1600"/>
-            </a:lvl4pPr>
-            <a:lvl5pPr>
-              <a:defRPr sz="1600"/>
-            </a:lvl5pPr>
-            <a:lvl6pPr>
-              <a:defRPr sz="1600"/>
-            </a:lvl6pPr>
-            <a:lvl7pPr>
-              <a:defRPr sz="1600"/>
-            </a:lvl7pPr>
-            <a:lvl8pPr>
-              <a:defRPr sz="1600"/>
-            </a:lvl8pPr>
-            <a:lvl9pPr>
-              <a:defRPr sz="1600"/>
-            </a:lvl9pPr>
-          </a:lstStyle>
+          <a:lstStyle/>
           <a:p>
             <a:pPr lvl="0"/>
             <a:r>
-              <a:rPr lang="en-US" smtClean="0"/>
+              <a:rPr lang="en-US"/>
               <a:t>Click to edit Master text styles</a:t>
             </a:r>
           </a:p>
           <a:p>
             <a:pPr lvl="1"/>
             <a:r>
-              <a:rPr lang="en-US" smtClean="0"/>
+              <a:rPr lang="en-US"/>
               <a:t>Second level</a:t>
             </a:r>
           </a:p>
           <a:p>
             <a:pPr lvl="2"/>
             <a:r>
-              <a:rPr lang="en-US" smtClean="0"/>
+              <a:rPr lang="en-US"/>
               <a:t>Third level</a:t>
             </a:r>
           </a:p>
           <a:p>
             <a:pPr lvl="3"/>
             <a:r>
-              <a:rPr lang="en-US" smtClean="0"/>
+              <a:rPr lang="en-US"/>
               <a:t>Fourth level</a:t>
             </a:r>
           </a:p>
           <a:p>
             <a:pPr lvl="4"/>
             <a:r>
-              <a:rPr lang="en-US" smtClean="0"/>
+              <a:rPr lang="en-US"/>
               <a:t>Fifth level</a:t>
             </a:r>
-            <a:endParaRPr lang="en-US"/>
-          </a:p>
-        </p:txBody>
-      </p:sp>
-      <p:sp>
-        <p:nvSpPr>
-          <p:cNvPr id="5" name="Text Placeholder 4"/>
+          </a:p>
+        </p:txBody>
+      </p:sp>
+      <p:sp>
+        <p:nvSpPr>
+          <p:cNvPr id="5" name="Text Placeholder 4">
+            <a:extLst>
+              <a:ext uri="{FF2B5EF4-FFF2-40B4-BE49-F238E27FC236}">
+                <a16:creationId xmlns:a16="http://schemas.microsoft.com/office/drawing/2014/main" id="{735D63E5-CAB6-57CA-F6D4-785F442EE527}"/>
+              </a:ext>
+            </a:extLst>
+          </p:cNvPr>
           <p:cNvSpPr>
             <a:spLocks noGrp="1"/>
           </p:cNvSpPr>
@@ -1609,8 +1672,8 @@
         </p:nvSpPr>
         <p:spPr>
           <a:xfrm>
-            <a:off x="4645025" y="1535113"/>
-            <a:ext cx="4041775" cy="639762"/>
+            <a:off x="6172200" y="1681163"/>
+            <a:ext cx="5183188" cy="823912"/>
           </a:xfrm>
         </p:spPr>
         <p:txBody>
@@ -1656,115 +1719,98 @@
           <a:p>
             <a:pPr lvl="0"/>
             <a:r>
+              <a:rPr lang="en-US"/>
+              <a:t>Click to edit Master text styles</a:t>
+            </a:r>
+          </a:p>
+        </p:txBody>
+      </p:sp>
+      <p:sp>
+        <p:nvSpPr>
+          <p:cNvPr id="6" name="Content Placeholder 5">
+            <a:extLst>
+              <a:ext uri="{FF2B5EF4-FFF2-40B4-BE49-F238E27FC236}">
+                <a16:creationId xmlns:a16="http://schemas.microsoft.com/office/drawing/2014/main" id="{A9984486-6D51-4367-BA3F-0342A867353B}"/>
+              </a:ext>
+            </a:extLst>
+          </p:cNvPr>
+          <p:cNvSpPr>
+            <a:spLocks noGrp="1"/>
+          </p:cNvSpPr>
+          <p:nvPr>
+            <p:ph sz="quarter" idx="4"/>
+          </p:nvPr>
+        </p:nvSpPr>
+        <p:spPr>
+          <a:xfrm>
+            <a:off x="6172200" y="2505075"/>
+            <a:ext cx="5183188" cy="3684588"/>
+          </a:xfrm>
+        </p:spPr>
+        <p:txBody>
+          <a:bodyPr/>
+          <a:lstStyle/>
+          <a:p>
+            <a:pPr lvl="0"/>
+            <a:r>
+              <a:rPr lang="en-US"/>
+              <a:t>Click to edit Master text styles</a:t>
+            </a:r>
+          </a:p>
+          <a:p>
+            <a:pPr lvl="1"/>
+            <a:r>
+              <a:rPr lang="en-US"/>
+              <a:t>Second level</a:t>
+            </a:r>
+          </a:p>
+          <a:p>
+            <a:pPr lvl="2"/>
+            <a:r>
+              <a:rPr lang="en-US"/>
+              <a:t>Third level</a:t>
+            </a:r>
+          </a:p>
+          <a:p>
+            <a:pPr lvl="3"/>
+            <a:r>
+              <a:rPr lang="en-US"/>
+              <a:t>Fourth level</a:t>
+            </a:r>
+          </a:p>
+          <a:p>
+            <a:pPr lvl="4"/>
+            <a:r>
+              <a:rPr lang="en-US"/>
+              <a:t>Fifth level</a:t>
+            </a:r>
+          </a:p>
+        </p:txBody>
+      </p:sp>
+      <p:sp>
+        <p:nvSpPr>
+          <p:cNvPr id="7" name="Date Placeholder 6">
+            <a:extLst>
+              <a:ext uri="{FF2B5EF4-FFF2-40B4-BE49-F238E27FC236}">
+                <a16:creationId xmlns:a16="http://schemas.microsoft.com/office/drawing/2014/main" id="{3FFBEBDE-E75E-260C-4FBB-ACF66A8F9AC0}"/>
+              </a:ext>
+            </a:extLst>
+          </p:cNvPr>
+          <p:cNvSpPr>
+            <a:spLocks noGrp="1"/>
+          </p:cNvSpPr>
+          <p:nvPr>
+            <p:ph type="dt" sz="half" idx="10"/>
+          </p:nvPr>
+        </p:nvSpPr>
+        <p:spPr/>
+        <p:txBody>
+          <a:bodyPr/>
+          <a:lstStyle/>
+          <a:p>
+            <a:fld id="{7994B958-401A-4A89-98CA-0A39E34EFB4D}" type="datetimeFigureOut">
               <a:rPr lang="en-US" smtClean="0"/>
-              <a:t>Click to edit Master text styles</a:t>
-            </a:r>
-          </a:p>
-        </p:txBody>
-      </p:sp>
-      <p:sp>
-        <p:nvSpPr>
-          <p:cNvPr id="6" name="Content Placeholder 5"/>
-          <p:cNvSpPr>
-            <a:spLocks noGrp="1"/>
-          </p:cNvSpPr>
-          <p:nvPr>
-            <p:ph sz="quarter" idx="4"/>
-          </p:nvPr>
-        </p:nvSpPr>
-        <p:spPr>
-          <a:xfrm>
-            <a:off x="4645025" y="2174875"/>
-            <a:ext cx="4041775" cy="3951288"/>
-          </a:xfrm>
-        </p:spPr>
-        <p:txBody>
-          <a:bodyPr/>
-          <a:lstStyle>
-            <a:lvl1pPr>
-              <a:defRPr sz="2400"/>
-            </a:lvl1pPr>
-            <a:lvl2pPr>
-              <a:defRPr sz="2000"/>
-            </a:lvl2pPr>
-            <a:lvl3pPr>
-              <a:defRPr sz="1800"/>
-            </a:lvl3pPr>
-            <a:lvl4pPr>
-              <a:defRPr sz="1600"/>
-            </a:lvl4pPr>
-            <a:lvl5pPr>
-              <a:defRPr sz="1600"/>
-            </a:lvl5pPr>
-            <a:lvl6pPr>
-              <a:defRPr sz="1600"/>
-            </a:lvl6pPr>
-            <a:lvl7pPr>
-              <a:defRPr sz="1600"/>
-            </a:lvl7pPr>
-            <a:lvl8pPr>
-              <a:defRPr sz="1600"/>
-            </a:lvl8pPr>
-            <a:lvl9pPr>
-              <a:defRPr sz="1600"/>
-            </a:lvl9pPr>
-          </a:lstStyle>
-          <a:p>
-            <a:pPr lvl="0"/>
-            <a:r>
-              <a:rPr lang="en-US" smtClean="0"/>
-              <a:t>Click to edit Master text styles</a:t>
-            </a:r>
-          </a:p>
-          <a:p>
-            <a:pPr lvl="1"/>
-            <a:r>
-              <a:rPr lang="en-US" smtClean="0"/>
-              <a:t>Second level</a:t>
-            </a:r>
-          </a:p>
-          <a:p>
-            <a:pPr lvl="2"/>
-            <a:r>
-              <a:rPr lang="en-US" smtClean="0"/>
-              <a:t>Third level</a:t>
-            </a:r>
-          </a:p>
-          <a:p>
-            <a:pPr lvl="3"/>
-            <a:r>
-              <a:rPr lang="en-US" smtClean="0"/>
-              <a:t>Fourth level</a:t>
-            </a:r>
-          </a:p>
-          <a:p>
-            <a:pPr lvl="4"/>
-            <a:r>
-              <a:rPr lang="en-US" smtClean="0"/>
-              <a:t>Fifth level</a:t>
-            </a:r>
-            <a:endParaRPr lang="en-US"/>
-          </a:p>
-        </p:txBody>
-      </p:sp>
-      <p:sp>
-        <p:nvSpPr>
-          <p:cNvPr id="7" name="Date Placeholder 6"/>
-          <p:cNvSpPr>
-            <a:spLocks noGrp="1"/>
-          </p:cNvSpPr>
-          <p:nvPr>
-            <p:ph type="dt" sz="half" idx="10"/>
-          </p:nvPr>
-        </p:nvSpPr>
-        <p:spPr/>
-        <p:txBody>
-          <a:bodyPr/>
-          <a:lstStyle/>
-          <a:p>
-            <a:fld id="{5BCAD085-E8A6-8845-BD4E-CB4CCA059FC4}" type="datetimeFigureOut">
-              <a:rPr lang="en-US" smtClean="0"/>
-              <a:t>1/27/13</a:t>
+              <a:t>7/13/2026</a:t>
             </a:fld>
             <a:endParaRPr lang="en-US"/>
           </a:p>
@@ -1772,7 +1818,13 @@
       </p:sp>
       <p:sp>
         <p:nvSpPr>
-          <p:cNvPr id="8" name="Footer Placeholder 7"/>
+          <p:cNvPr id="8" name="Footer Placeholder 7">
+            <a:extLst>
+              <a:ext uri="{FF2B5EF4-FFF2-40B4-BE49-F238E27FC236}">
+                <a16:creationId xmlns:a16="http://schemas.microsoft.com/office/drawing/2014/main" id="{D892221D-CFF4-DB7F-ED33-ECFE7B054302}"/>
+              </a:ext>
+            </a:extLst>
+          </p:cNvPr>
           <p:cNvSpPr>
             <a:spLocks noGrp="1"/>
           </p:cNvSpPr>
@@ -1791,7 +1843,13 @@
       </p:sp>
       <p:sp>
         <p:nvSpPr>
-          <p:cNvPr id="9" name="Slide Number Placeholder 8"/>
+          <p:cNvPr id="9" name="Slide Number Placeholder 8">
+            <a:extLst>
+              <a:ext uri="{FF2B5EF4-FFF2-40B4-BE49-F238E27FC236}">
+                <a16:creationId xmlns:a16="http://schemas.microsoft.com/office/drawing/2014/main" id="{1551F121-A936-7E20-DD21-525B5F6738D1}"/>
+              </a:ext>
+            </a:extLst>
+          </p:cNvPr>
           <p:cNvSpPr>
             <a:spLocks noGrp="1"/>
           </p:cNvSpPr>
@@ -1804,7 +1862,7 @@
           <a:bodyPr/>
           <a:lstStyle/>
           <a:p>
-            <a:fld id="{C1FF6DA9-008F-8B48-92A6-B652298478BF}" type="slidenum">
+            <a:fld id="{76A5515E-906D-4A46-88BA-63D09FD3EC7D}" type="slidenum">
               <a:rPr lang="en-US" smtClean="0"/>
               <a:t>‹#›</a:t>
             </a:fld>
@@ -1815,7 +1873,7 @@
     </p:spTree>
     <p:extLst>
       <p:ext uri="{BB962C8B-B14F-4D97-AF65-F5344CB8AC3E}">
-        <p14:creationId xmlns:p14="http://schemas.microsoft.com/office/powerpoint/2010/main" val="990158736"/>
+        <p14:creationId xmlns:p14="http://schemas.microsoft.com/office/powerpoint/2010/main" val="3678472687"/>
       </p:ext>
     </p:extLst>
   </p:cSld>
@@ -1844,7 +1902,13 @@
       </p:grpSpPr>
       <p:sp>
         <p:nvSpPr>
-          <p:cNvPr id="2" name="Title 1"/>
+          <p:cNvPr id="2" name="Title 1">
+            <a:extLst>
+              <a:ext uri="{FF2B5EF4-FFF2-40B4-BE49-F238E27FC236}">
+                <a16:creationId xmlns:a16="http://schemas.microsoft.com/office/drawing/2014/main" id="{3D874B2F-6434-CDAD-A080-6BC10D758E8D}"/>
+              </a:ext>
+            </a:extLst>
+          </p:cNvPr>
           <p:cNvSpPr>
             <a:spLocks noGrp="1"/>
           </p:cNvSpPr>
@@ -1858,31 +1922,36 @@
           <a:lstStyle/>
           <a:p>
             <a:r>
+              <a:rPr lang="en-US"/>
+              <a:t>Click to edit Master title style</a:t>
+            </a:r>
+          </a:p>
+        </p:txBody>
+      </p:sp>
+      <p:sp>
+        <p:nvSpPr>
+          <p:cNvPr id="3" name="Date Placeholder 2">
+            <a:extLst>
+              <a:ext uri="{FF2B5EF4-FFF2-40B4-BE49-F238E27FC236}">
+                <a16:creationId xmlns:a16="http://schemas.microsoft.com/office/drawing/2014/main" id="{0D04289D-C84B-1A64-94A9-89685877B1BA}"/>
+              </a:ext>
+            </a:extLst>
+          </p:cNvPr>
+          <p:cNvSpPr>
+            <a:spLocks noGrp="1"/>
+          </p:cNvSpPr>
+          <p:nvPr>
+            <p:ph type="dt" sz="half" idx="10"/>
+          </p:nvPr>
+        </p:nvSpPr>
+        <p:spPr/>
+        <p:txBody>
+          <a:bodyPr/>
+          <a:lstStyle/>
+          <a:p>
+            <a:fld id="{7994B958-401A-4A89-98CA-0A39E34EFB4D}" type="datetimeFigureOut">
               <a:rPr lang="en-US" smtClean="0"/>
-              <a:t>Click to edit Master title style</a:t>
-            </a:r>
-            <a:endParaRPr lang="en-US"/>
-          </a:p>
-        </p:txBody>
-      </p:sp>
-      <p:sp>
-        <p:nvSpPr>
-          <p:cNvPr id="3" name="Date Placeholder 2"/>
-          <p:cNvSpPr>
-            <a:spLocks noGrp="1"/>
-          </p:cNvSpPr>
-          <p:nvPr>
-            <p:ph type="dt" sz="half" idx="10"/>
-          </p:nvPr>
-        </p:nvSpPr>
-        <p:spPr/>
-        <p:txBody>
-          <a:bodyPr/>
-          <a:lstStyle/>
-          <a:p>
-            <a:fld id="{5BCAD085-E8A6-8845-BD4E-CB4CCA059FC4}" type="datetimeFigureOut">
-              <a:rPr lang="en-US" smtClean="0"/>
-              <a:t>1/27/13</a:t>
+              <a:t>7/13/2026</a:t>
             </a:fld>
             <a:endParaRPr lang="en-US"/>
           </a:p>
@@ -1890,7 +1959,13 @@
       </p:sp>
       <p:sp>
         <p:nvSpPr>
-          <p:cNvPr id="4" name="Footer Placeholder 3"/>
+          <p:cNvPr id="4" name="Footer Placeholder 3">
+            <a:extLst>
+              <a:ext uri="{FF2B5EF4-FFF2-40B4-BE49-F238E27FC236}">
+                <a16:creationId xmlns:a16="http://schemas.microsoft.com/office/drawing/2014/main" id="{A6548A3E-ECAA-D622-6CF5-93E7AAFC8E68}"/>
+              </a:ext>
+            </a:extLst>
+          </p:cNvPr>
           <p:cNvSpPr>
             <a:spLocks noGrp="1"/>
           </p:cNvSpPr>
@@ -1909,7 +1984,13 @@
       </p:sp>
       <p:sp>
         <p:nvSpPr>
-          <p:cNvPr id="5" name="Slide Number Placeholder 4"/>
+          <p:cNvPr id="5" name="Slide Number Placeholder 4">
+            <a:extLst>
+              <a:ext uri="{FF2B5EF4-FFF2-40B4-BE49-F238E27FC236}">
+                <a16:creationId xmlns:a16="http://schemas.microsoft.com/office/drawing/2014/main" id="{2446A9A5-D02C-A440-935F-59FB588B95D8}"/>
+              </a:ext>
+            </a:extLst>
+          </p:cNvPr>
           <p:cNvSpPr>
             <a:spLocks noGrp="1"/>
           </p:cNvSpPr>
@@ -1922,7 +2003,7 @@
           <a:bodyPr/>
           <a:lstStyle/>
           <a:p>
-            <a:fld id="{C1FF6DA9-008F-8B48-92A6-B652298478BF}" type="slidenum">
+            <a:fld id="{76A5515E-906D-4A46-88BA-63D09FD3EC7D}" type="slidenum">
               <a:rPr lang="en-US" smtClean="0"/>
               <a:t>‹#›</a:t>
             </a:fld>
@@ -1933,7 +2014,7 @@
     </p:spTree>
     <p:extLst>
       <p:ext uri="{BB962C8B-B14F-4D97-AF65-F5344CB8AC3E}">
-        <p14:creationId xmlns:p14="http://schemas.microsoft.com/office/powerpoint/2010/main" val="727027711"/>
+        <p14:creationId xmlns:p14="http://schemas.microsoft.com/office/powerpoint/2010/main" val="3586602113"/>
       </p:ext>
     </p:extLst>
   </p:cSld>
@@ -1962,7 +2043,13 @@
       </p:grpSpPr>
       <p:sp>
         <p:nvSpPr>
-          <p:cNvPr id="2" name="Date Placeholder 1"/>
+          <p:cNvPr id="2" name="Date Placeholder 1">
+            <a:extLst>
+              <a:ext uri="{FF2B5EF4-FFF2-40B4-BE49-F238E27FC236}">
+                <a16:creationId xmlns:a16="http://schemas.microsoft.com/office/drawing/2014/main" id="{1421E402-ECF9-BC38-DA52-7A076B6BA6C0}"/>
+              </a:ext>
+            </a:extLst>
+          </p:cNvPr>
           <p:cNvSpPr>
             <a:spLocks noGrp="1"/>
           </p:cNvSpPr>
@@ -1975,9 +2062,9 @@
           <a:bodyPr/>
           <a:lstStyle/>
           <a:p>
-            <a:fld id="{5BCAD085-E8A6-8845-BD4E-CB4CCA059FC4}" type="datetimeFigureOut">
+            <a:fld id="{7994B958-401A-4A89-98CA-0A39E34EFB4D}" type="datetimeFigureOut">
               <a:rPr lang="en-US" smtClean="0"/>
-              <a:t>1/27/13</a:t>
+              <a:t>7/13/2026</a:t>
             </a:fld>
             <a:endParaRPr lang="en-US"/>
           </a:p>
@@ -1985,7 +2072,13 @@
       </p:sp>
       <p:sp>
         <p:nvSpPr>
-          <p:cNvPr id="3" name="Footer Placeholder 2"/>
+          <p:cNvPr id="3" name="Footer Placeholder 2">
+            <a:extLst>
+              <a:ext uri="{FF2B5EF4-FFF2-40B4-BE49-F238E27FC236}">
+                <a16:creationId xmlns:a16="http://schemas.microsoft.com/office/drawing/2014/main" id="{5C0FEDBB-558E-78BE-2BCD-361CB4EF142C}"/>
+              </a:ext>
+            </a:extLst>
+          </p:cNvPr>
           <p:cNvSpPr>
             <a:spLocks noGrp="1"/>
           </p:cNvSpPr>
@@ -2004,7 +2097,13 @@
       </p:sp>
       <p:sp>
         <p:nvSpPr>
-          <p:cNvPr id="4" name="Slide Number Placeholder 3"/>
+          <p:cNvPr id="4" name="Slide Number Placeholder 3">
+            <a:extLst>
+              <a:ext uri="{FF2B5EF4-FFF2-40B4-BE49-F238E27FC236}">
+                <a16:creationId xmlns:a16="http://schemas.microsoft.com/office/drawing/2014/main" id="{BE414CF3-94F9-E251-60D7-6253FACDEC9E}"/>
+              </a:ext>
+            </a:extLst>
+          </p:cNvPr>
           <p:cNvSpPr>
             <a:spLocks noGrp="1"/>
           </p:cNvSpPr>
@@ -2017,7 +2116,7 @@
           <a:bodyPr/>
           <a:lstStyle/>
           <a:p>
-            <a:fld id="{C1FF6DA9-008F-8B48-92A6-B652298478BF}" type="slidenum">
+            <a:fld id="{76A5515E-906D-4A46-88BA-63D09FD3EC7D}" type="slidenum">
               <a:rPr lang="en-US" smtClean="0"/>
               <a:t>‹#›</a:t>
             </a:fld>
@@ -2028,7 +2127,7 @@
     </p:spTree>
     <p:extLst>
       <p:ext uri="{BB962C8B-B14F-4D97-AF65-F5344CB8AC3E}">
-        <p14:creationId xmlns:p14="http://schemas.microsoft.com/office/powerpoint/2010/main" val="1212999818"/>
+        <p14:creationId xmlns:p14="http://schemas.microsoft.com/office/powerpoint/2010/main" val="3256288377"/>
       </p:ext>
     </p:extLst>
   </p:cSld>
@@ -2057,7 +2156,13 @@
       </p:grpSpPr>
       <p:sp>
         <p:nvSpPr>
-          <p:cNvPr id="2" name="Title 1"/>
+          <p:cNvPr id="2" name="Title 1">
+            <a:extLst>
+              <a:ext uri="{FF2B5EF4-FFF2-40B4-BE49-F238E27FC236}">
+                <a16:creationId xmlns:a16="http://schemas.microsoft.com/office/drawing/2014/main" id="{4D26F39E-553B-8E3C-AC91-6B33E36024B1}"/>
+              </a:ext>
+            </a:extLst>
+          </p:cNvPr>
           <p:cNvSpPr>
             <a:spLocks noGrp="1"/>
           </p:cNvSpPr>
@@ -2067,29 +2172,34 @@
         </p:nvSpPr>
         <p:spPr>
           <a:xfrm>
-            <a:off x="457200" y="273050"/>
-            <a:ext cx="3008313" cy="1162050"/>
+            <a:off x="839788" y="457200"/>
+            <a:ext cx="3932237" cy="1600200"/>
           </a:xfrm>
         </p:spPr>
         <p:txBody>
           <a:bodyPr anchor="b"/>
           <a:lstStyle>
-            <a:lvl1pPr algn="l">
-              <a:defRPr sz="2000" b="1"/>
+            <a:lvl1pPr>
+              <a:defRPr sz="3200"/>
             </a:lvl1pPr>
           </a:lstStyle>
           <a:p>
             <a:r>
-              <a:rPr lang="en-US" smtClean="0"/>
+              <a:rPr lang="en-US"/>
               <a:t>Click to edit Master title style</a:t>
             </a:r>
-            <a:endParaRPr lang="en-US"/>
-          </a:p>
-        </p:txBody>
-      </p:sp>
-      <p:sp>
-        <p:nvSpPr>
-          <p:cNvPr id="3" name="Content Placeholder 2"/>
+          </a:p>
+        </p:txBody>
+      </p:sp>
+      <p:sp>
+        <p:nvSpPr>
+          <p:cNvPr id="3" name="Content Placeholder 2">
+            <a:extLst>
+              <a:ext uri="{FF2B5EF4-FFF2-40B4-BE49-F238E27FC236}">
+                <a16:creationId xmlns:a16="http://schemas.microsoft.com/office/drawing/2014/main" id="{7C72BE83-457E-E8C3-81DB-CB01EBF46707}"/>
+              </a:ext>
+            </a:extLst>
+          </p:cNvPr>
           <p:cNvSpPr>
             <a:spLocks noGrp="1"/>
           </p:cNvSpPr>
@@ -2099,8 +2209,8 @@
         </p:nvSpPr>
         <p:spPr>
           <a:xfrm>
-            <a:off x="3575050" y="273050"/>
-            <a:ext cx="5111750" cy="5853113"/>
+            <a:off x="5183188" y="987425"/>
+            <a:ext cx="6172200" cy="4873625"/>
           </a:xfrm>
         </p:spPr>
         <p:txBody>
@@ -2137,44 +2247,49 @@
           <a:p>
             <a:pPr lvl="0"/>
             <a:r>
-              <a:rPr lang="en-US" smtClean="0"/>
+              <a:rPr lang="en-US"/>
               <a:t>Click to edit Master text styles</a:t>
             </a:r>
           </a:p>
           <a:p>
             <a:pPr lvl="1"/>
             <a:r>
-              <a:rPr lang="en-US" smtClean="0"/>
+              <a:rPr lang="en-US"/>
               <a:t>Second level</a:t>
             </a:r>
           </a:p>
           <a:p>
             <a:pPr lvl="2"/>
             <a:r>
-              <a:rPr lang="en-US" smtClean="0"/>
+              <a:rPr lang="en-US"/>
               <a:t>Third level</a:t>
             </a:r>
           </a:p>
           <a:p>
             <a:pPr lvl="3"/>
             <a:r>
-              <a:rPr lang="en-US" smtClean="0"/>
+              <a:rPr lang="en-US"/>
               <a:t>Fourth level</a:t>
             </a:r>
           </a:p>
           <a:p>
             <a:pPr lvl="4"/>
             <a:r>
-              <a:rPr lang="en-US" smtClean="0"/>
+              <a:rPr lang="en-US"/>
               <a:t>Fifth level</a:t>
             </a:r>
-            <a:endParaRPr lang="en-US"/>
-          </a:p>
-        </p:txBody>
-      </p:sp>
-      <p:sp>
-        <p:nvSpPr>
-          <p:cNvPr id="4" name="Text Placeholder 3"/>
+          </a:p>
+        </p:txBody>
+      </p:sp>
+      <p:sp>
+        <p:nvSpPr>
+          <p:cNvPr id="4" name="Text Placeholder 3">
+            <a:extLst>
+              <a:ext uri="{FF2B5EF4-FFF2-40B4-BE49-F238E27FC236}">
+                <a16:creationId xmlns:a16="http://schemas.microsoft.com/office/drawing/2014/main" id="{B080F063-E0AC-4C6E-FFD0-A5723755FE6A}"/>
+              </a:ext>
+            </a:extLst>
+          </p:cNvPr>
           <p:cNvSpPr>
             <a:spLocks noGrp="1"/>
           </p:cNvSpPr>
@@ -2184,8 +2299,8 @@
         </p:nvSpPr>
         <p:spPr>
           <a:xfrm>
-            <a:off x="457200" y="1435100"/>
-            <a:ext cx="3008313" cy="4691063"/>
+            <a:off x="839788" y="2057400"/>
+            <a:ext cx="3932237" cy="3811588"/>
           </a:xfrm>
         </p:spPr>
         <p:txBody>
@@ -2193,68 +2308,74 @@
           <a:lstStyle>
             <a:lvl1pPr marL="0" indent="0">
               <a:buNone/>
-              <a:defRPr sz="1400"/>
+              <a:defRPr sz="1600"/>
             </a:lvl1pPr>
             <a:lvl2pPr marL="457200" indent="0">
               <a:buNone/>
-              <a:defRPr sz="1200"/>
+              <a:defRPr sz="1400"/>
             </a:lvl2pPr>
             <a:lvl3pPr marL="914400" indent="0">
               <a:buNone/>
-              <a:defRPr sz="1000"/>
+              <a:defRPr sz="1200"/>
             </a:lvl3pPr>
             <a:lvl4pPr marL="1371600" indent="0">
               <a:buNone/>
-              <a:defRPr sz="900"/>
+              <a:defRPr sz="1000"/>
             </a:lvl4pPr>
             <a:lvl5pPr marL="1828800" indent="0">
               <a:buNone/>
-              <a:defRPr sz="900"/>
+              <a:defRPr sz="1000"/>
             </a:lvl5pPr>
             <a:lvl6pPr marL="2286000" indent="0">
               <a:buNone/>
-              <a:defRPr sz="900"/>
+              <a:defRPr sz="1000"/>
             </a:lvl6pPr>
             <a:lvl7pPr marL="2743200" indent="0">
               <a:buNone/>
-              <a:defRPr sz="900"/>
+              <a:defRPr sz="1000"/>
             </a:lvl7pPr>
             <a:lvl8pPr marL="3200400" indent="0">
               <a:buNone/>
-              <a:defRPr sz="900"/>
+              <a:defRPr sz="1000"/>
             </a:lvl8pPr>
             <a:lvl9pPr marL="3657600" indent="0">
               <a:buNone/>
-              <a:defRPr sz="900"/>
+              <a:defRPr sz="1000"/>
             </a:lvl9pPr>
           </a:lstStyle>
           <a:p>
             <a:pPr lvl="0"/>
             <a:r>
+              <a:rPr lang="en-US"/>
+              <a:t>Click to edit Master text styles</a:t>
+            </a:r>
+          </a:p>
+        </p:txBody>
+      </p:sp>
+      <p:sp>
+        <p:nvSpPr>
+          <p:cNvPr id="5" name="Date Placeholder 4">
+            <a:extLst>
+              <a:ext uri="{FF2B5EF4-FFF2-40B4-BE49-F238E27FC236}">
+                <a16:creationId xmlns:a16="http://schemas.microsoft.com/office/drawing/2014/main" id="{9DCA2D72-10F2-8F0C-3721-A568C57152A4}"/>
+              </a:ext>
+            </a:extLst>
+          </p:cNvPr>
+          <p:cNvSpPr>
+            <a:spLocks noGrp="1"/>
+          </p:cNvSpPr>
+          <p:nvPr>
+            <p:ph type="dt" sz="half" idx="10"/>
+          </p:nvPr>
+        </p:nvSpPr>
+        <p:spPr/>
+        <p:txBody>
+          <a:bodyPr/>
+          <a:lstStyle/>
+          <a:p>
+            <a:fld id="{7994B958-401A-4A89-98CA-0A39E34EFB4D}" type="datetimeFigureOut">
               <a:rPr lang="en-US" smtClean="0"/>
-              <a:t>Click to edit Master text styles</a:t>
-            </a:r>
-          </a:p>
-        </p:txBody>
-      </p:sp>
-      <p:sp>
-        <p:nvSpPr>
-          <p:cNvPr id="5" name="Date Placeholder 4"/>
-          <p:cNvSpPr>
-            <a:spLocks noGrp="1"/>
-          </p:cNvSpPr>
-          <p:nvPr>
-            <p:ph type="dt" sz="half" idx="10"/>
-          </p:nvPr>
-        </p:nvSpPr>
-        <p:spPr/>
-        <p:txBody>
-          <a:bodyPr/>
-          <a:lstStyle/>
-          <a:p>
-            <a:fld id="{5BCAD085-E8A6-8845-BD4E-CB4CCA059FC4}" type="datetimeFigureOut">
-              <a:rPr lang="en-US" smtClean="0"/>
-              <a:t>1/27/13</a:t>
+              <a:t>7/13/2026</a:t>
             </a:fld>
             <a:endParaRPr lang="en-US"/>
           </a:p>
@@ -2262,7 +2383,13 @@
       </p:sp>
       <p:sp>
         <p:nvSpPr>
-          <p:cNvPr id="6" name="Footer Placeholder 5"/>
+          <p:cNvPr id="6" name="Footer Placeholder 5">
+            <a:extLst>
+              <a:ext uri="{FF2B5EF4-FFF2-40B4-BE49-F238E27FC236}">
+                <a16:creationId xmlns:a16="http://schemas.microsoft.com/office/drawing/2014/main" id="{7422AC17-C584-99B2-3B4C-A8EDC95CF8F6}"/>
+              </a:ext>
+            </a:extLst>
+          </p:cNvPr>
           <p:cNvSpPr>
             <a:spLocks noGrp="1"/>
           </p:cNvSpPr>
@@ -2281,7 +2408,13 @@
       </p:sp>
       <p:sp>
         <p:nvSpPr>
-          <p:cNvPr id="7" name="Slide Number Placeholder 6"/>
+          <p:cNvPr id="7" name="Slide Number Placeholder 6">
+            <a:extLst>
+              <a:ext uri="{FF2B5EF4-FFF2-40B4-BE49-F238E27FC236}">
+                <a16:creationId xmlns:a16="http://schemas.microsoft.com/office/drawing/2014/main" id="{1BE4BA3C-116D-2D07-982B-BCE0856B2550}"/>
+              </a:ext>
+            </a:extLst>
+          </p:cNvPr>
           <p:cNvSpPr>
             <a:spLocks noGrp="1"/>
           </p:cNvSpPr>
@@ -2294,7 +2427,7 @@
           <a:bodyPr/>
           <a:lstStyle/>
           <a:p>
-            <a:fld id="{C1FF6DA9-008F-8B48-92A6-B652298478BF}" type="slidenum">
+            <a:fld id="{76A5515E-906D-4A46-88BA-63D09FD3EC7D}" type="slidenum">
               <a:rPr lang="en-US" smtClean="0"/>
               <a:t>‹#›</a:t>
             </a:fld>
@@ -2305,7 +2438,7 @@
     </p:spTree>
     <p:extLst>
       <p:ext uri="{BB962C8B-B14F-4D97-AF65-F5344CB8AC3E}">
-        <p14:creationId xmlns:p14="http://schemas.microsoft.com/office/powerpoint/2010/main" val="1840726560"/>
+        <p14:creationId xmlns:p14="http://schemas.microsoft.com/office/powerpoint/2010/main" val="1227104582"/>
       </p:ext>
     </p:extLst>
   </p:cSld>
@@ -2334,7 +2467,13 @@
       </p:grpSpPr>
       <p:sp>
         <p:nvSpPr>
-          <p:cNvPr id="2" name="Title 1"/>
+          <p:cNvPr id="2" name="Title 1">
+            <a:extLst>
+              <a:ext uri="{FF2B5EF4-FFF2-40B4-BE49-F238E27FC236}">
+                <a16:creationId xmlns:a16="http://schemas.microsoft.com/office/drawing/2014/main" id="{0D7F3B56-58EA-9A25-90B7-5F6019647CDC}"/>
+              </a:ext>
+            </a:extLst>
+          </p:cNvPr>
           <p:cNvSpPr>
             <a:spLocks noGrp="1"/>
           </p:cNvSpPr>
@@ -2344,29 +2483,34 @@
         </p:nvSpPr>
         <p:spPr>
           <a:xfrm>
-            <a:off x="1792288" y="4800600"/>
-            <a:ext cx="5486400" cy="566738"/>
+            <a:off x="839788" y="457200"/>
+            <a:ext cx="3932237" cy="1600200"/>
           </a:xfrm>
         </p:spPr>
         <p:txBody>
           <a:bodyPr anchor="b"/>
           <a:lstStyle>
-            <a:lvl1pPr algn="l">
-              <a:defRPr sz="2000" b="1"/>
+            <a:lvl1pPr>
+              <a:defRPr sz="3200"/>
             </a:lvl1pPr>
           </a:lstStyle>
           <a:p>
             <a:r>
-              <a:rPr lang="en-US" smtClean="0"/>
+              <a:rPr lang="en-US"/>
               <a:t>Click to edit Master title style</a:t>
             </a:r>
-            <a:endParaRPr lang="en-US"/>
-          </a:p>
-        </p:txBody>
-      </p:sp>
-      <p:sp>
-        <p:nvSpPr>
-          <p:cNvPr id="3" name="Picture Placeholder 2"/>
+          </a:p>
+        </p:txBody>
+      </p:sp>
+      <p:sp>
+        <p:nvSpPr>
+          <p:cNvPr id="3" name="Picture Placeholder 2">
+            <a:extLst>
+              <a:ext uri="{FF2B5EF4-FFF2-40B4-BE49-F238E27FC236}">
+                <a16:creationId xmlns:a16="http://schemas.microsoft.com/office/drawing/2014/main" id="{5FB9C7CD-0B57-FAEE-75DF-A0AE1FC09D67}"/>
+              </a:ext>
+            </a:extLst>
+          </p:cNvPr>
           <p:cNvSpPr>
             <a:spLocks noGrp="1"/>
           </p:cNvSpPr>
@@ -2376,8 +2520,8 @@
         </p:nvSpPr>
         <p:spPr>
           <a:xfrm>
-            <a:off x="1792288" y="612775"/>
-            <a:ext cx="5486400" cy="4114800"/>
+            <a:off x="5183188" y="987425"/>
+            <a:ext cx="6172200" cy="4873625"/>
           </a:xfrm>
         </p:spPr>
         <p:txBody>
@@ -2427,7 +2571,13 @@
       </p:sp>
       <p:sp>
         <p:nvSpPr>
-          <p:cNvPr id="4" name="Text Placeholder 3"/>
+          <p:cNvPr id="4" name="Text Placeholder 3">
+            <a:extLst>
+              <a:ext uri="{FF2B5EF4-FFF2-40B4-BE49-F238E27FC236}">
+                <a16:creationId xmlns:a16="http://schemas.microsoft.com/office/drawing/2014/main" id="{B97603FA-5B98-AA02-FCFE-AD2383052AFC}"/>
+              </a:ext>
+            </a:extLst>
+          </p:cNvPr>
           <p:cNvSpPr>
             <a:spLocks noGrp="1"/>
           </p:cNvSpPr>
@@ -2437,8 +2587,8 @@
         </p:nvSpPr>
         <p:spPr>
           <a:xfrm>
-            <a:off x="1792288" y="5367338"/>
-            <a:ext cx="5486400" cy="804862"/>
+            <a:off x="839788" y="2057400"/>
+            <a:ext cx="3932237" cy="3811588"/>
           </a:xfrm>
         </p:spPr>
         <p:txBody>
@@ -2446,68 +2596,74 @@
           <a:lstStyle>
             <a:lvl1pPr marL="0" indent="0">
               <a:buNone/>
-              <a:defRPr sz="1400"/>
+              <a:defRPr sz="1600"/>
             </a:lvl1pPr>
             <a:lvl2pPr marL="457200" indent="0">
               <a:buNone/>
-              <a:defRPr sz="1200"/>
+              <a:defRPr sz="1400"/>
             </a:lvl2pPr>
             <a:lvl3pPr marL="914400" indent="0">
               <a:buNone/>
-              <a:defRPr sz="1000"/>
+              <a:defRPr sz="1200"/>
             </a:lvl3pPr>
             <a:lvl4pPr marL="1371600" indent="0">
               <a:buNone/>
-              <a:defRPr sz="900"/>
+              <a:defRPr sz="1000"/>
             </a:lvl4pPr>
             <a:lvl5pPr marL="1828800" indent="0">
               <a:buNone/>
-              <a:defRPr sz="900"/>
+              <a:defRPr sz="1000"/>
             </a:lvl5pPr>
             <a:lvl6pPr marL="2286000" indent="0">
               <a:buNone/>
-              <a:defRPr sz="900"/>
+              <a:defRPr sz="1000"/>
             </a:lvl6pPr>
             <a:lvl7pPr marL="2743200" indent="0">
               <a:buNone/>
-              <a:defRPr sz="900"/>
+              <a:defRPr sz="1000"/>
             </a:lvl7pPr>
             <a:lvl8pPr marL="3200400" indent="0">
               <a:buNone/>
-              <a:defRPr sz="900"/>
+              <a:defRPr sz="1000"/>
             </a:lvl8pPr>
             <a:lvl9pPr marL="3657600" indent="0">
               <a:buNone/>
-              <a:defRPr sz="900"/>
+              <a:defRPr sz="1000"/>
             </a:lvl9pPr>
           </a:lstStyle>
           <a:p>
             <a:pPr lvl="0"/>
             <a:r>
+              <a:rPr lang="en-US"/>
+              <a:t>Click to edit Master text styles</a:t>
+            </a:r>
+          </a:p>
+        </p:txBody>
+      </p:sp>
+      <p:sp>
+        <p:nvSpPr>
+          <p:cNvPr id="5" name="Date Placeholder 4">
+            <a:extLst>
+              <a:ext uri="{FF2B5EF4-FFF2-40B4-BE49-F238E27FC236}">
+                <a16:creationId xmlns:a16="http://schemas.microsoft.com/office/drawing/2014/main" id="{79D9AAD2-5E67-0CE2-D933-D7E0428085C3}"/>
+              </a:ext>
+            </a:extLst>
+          </p:cNvPr>
+          <p:cNvSpPr>
+            <a:spLocks noGrp="1"/>
+          </p:cNvSpPr>
+          <p:nvPr>
+            <p:ph type="dt" sz="half" idx="10"/>
+          </p:nvPr>
+        </p:nvSpPr>
+        <p:spPr/>
+        <p:txBody>
+          <a:bodyPr/>
+          <a:lstStyle/>
+          <a:p>
+            <a:fld id="{7994B958-401A-4A89-98CA-0A39E34EFB4D}" type="datetimeFigureOut">
               <a:rPr lang="en-US" smtClean="0"/>
-              <a:t>Click to edit Master text styles</a:t>
-            </a:r>
-          </a:p>
-        </p:txBody>
-      </p:sp>
-      <p:sp>
-        <p:nvSpPr>
-          <p:cNvPr id="5" name="Date Placeholder 4"/>
-          <p:cNvSpPr>
-            <a:spLocks noGrp="1"/>
-          </p:cNvSpPr>
-          <p:nvPr>
-            <p:ph type="dt" sz="half" idx="10"/>
-          </p:nvPr>
-        </p:nvSpPr>
-        <p:spPr/>
-        <p:txBody>
-          <a:bodyPr/>
-          <a:lstStyle/>
-          <a:p>
-            <a:fld id="{5BCAD085-E8A6-8845-BD4E-CB4CCA059FC4}" type="datetimeFigureOut">
-              <a:rPr lang="en-US" smtClean="0"/>
-              <a:t>1/27/13</a:t>
+              <a:t>7/13/2026</a:t>
             </a:fld>
             <a:endParaRPr lang="en-US"/>
           </a:p>
@@ -2515,7 +2671,13 @@
       </p:sp>
       <p:sp>
         <p:nvSpPr>
-          <p:cNvPr id="6" name="Footer Placeholder 5"/>
+          <p:cNvPr id="6" name="Footer Placeholder 5">
+            <a:extLst>
+              <a:ext uri="{FF2B5EF4-FFF2-40B4-BE49-F238E27FC236}">
+                <a16:creationId xmlns:a16="http://schemas.microsoft.com/office/drawing/2014/main" id="{36A4302B-F581-0AA9-0DE0-5A358D26F5D6}"/>
+              </a:ext>
+            </a:extLst>
+          </p:cNvPr>
           <p:cNvSpPr>
             <a:spLocks noGrp="1"/>
           </p:cNvSpPr>
@@ -2534,7 +2696,13 @@
       </p:sp>
       <p:sp>
         <p:nvSpPr>
-          <p:cNvPr id="7" name="Slide Number Placeholder 6"/>
+          <p:cNvPr id="7" name="Slide Number Placeholder 6">
+            <a:extLst>
+              <a:ext uri="{FF2B5EF4-FFF2-40B4-BE49-F238E27FC236}">
+                <a16:creationId xmlns:a16="http://schemas.microsoft.com/office/drawing/2014/main" id="{07979550-0861-4268-61DC-15CBBA86C98B}"/>
+              </a:ext>
+            </a:extLst>
+          </p:cNvPr>
           <p:cNvSpPr>
             <a:spLocks noGrp="1"/>
           </p:cNvSpPr>
@@ -2547,7 +2715,7 @@
           <a:bodyPr/>
           <a:lstStyle/>
           <a:p>
-            <a:fld id="{C1FF6DA9-008F-8B48-92A6-B652298478BF}" type="slidenum">
+            <a:fld id="{76A5515E-906D-4A46-88BA-63D09FD3EC7D}" type="slidenum">
               <a:rPr lang="en-US" smtClean="0"/>
               <a:t>‹#›</a:t>
             </a:fld>
@@ -2558,7 +2726,7 @@
     </p:spTree>
     <p:extLst>
       <p:ext uri="{BB962C8B-B14F-4D97-AF65-F5344CB8AC3E}">
-        <p14:creationId xmlns:p14="http://schemas.microsoft.com/office/powerpoint/2010/main" val="3889236939"/>
+        <p14:creationId xmlns:p14="http://schemas.microsoft.com/office/powerpoint/2010/main" val="1184605873"/>
       </p:ext>
     </p:extLst>
   </p:cSld>
@@ -2592,7 +2760,13 @@
       </p:grpSpPr>
       <p:sp>
         <p:nvSpPr>
-          <p:cNvPr id="2" name="Title Placeholder 1"/>
+          <p:cNvPr id="2" name="Title Placeholder 1">
+            <a:extLst>
+              <a:ext uri="{FF2B5EF4-FFF2-40B4-BE49-F238E27FC236}">
+                <a16:creationId xmlns:a16="http://schemas.microsoft.com/office/drawing/2014/main" id="{0D8D84AE-EAAC-3838-260A-C717506C3D23}"/>
+              </a:ext>
+            </a:extLst>
+          </p:cNvPr>
           <p:cNvSpPr>
             <a:spLocks noGrp="1"/>
           </p:cNvSpPr>
@@ -2602,8 +2776,8 @@
         </p:nvSpPr>
         <p:spPr>
           <a:xfrm>
-            <a:off x="457200" y="274638"/>
-            <a:ext cx="8229600" cy="1143000"/>
+            <a:off x="838200" y="365125"/>
+            <a:ext cx="10515600" cy="1325563"/>
           </a:xfrm>
           <a:prstGeom prst="rect">
             <a:avLst/>
@@ -2616,16 +2790,21 @@
           <a:lstStyle/>
           <a:p>
             <a:r>
-              <a:rPr lang="en-US" smtClean="0"/>
+              <a:rPr lang="en-US"/>
               <a:t>Click to edit Master title style</a:t>
             </a:r>
-            <a:endParaRPr lang="en-US"/>
-          </a:p>
-        </p:txBody>
-      </p:sp>
-      <p:sp>
-        <p:nvSpPr>
-          <p:cNvPr id="3" name="Text Placeholder 2"/>
+          </a:p>
+        </p:txBody>
+      </p:sp>
+      <p:sp>
+        <p:nvSpPr>
+          <p:cNvPr id="3" name="Text Placeholder 2">
+            <a:extLst>
+              <a:ext uri="{FF2B5EF4-FFF2-40B4-BE49-F238E27FC236}">
+                <a16:creationId xmlns:a16="http://schemas.microsoft.com/office/drawing/2014/main" id="{32C57462-15EC-867A-8C11-26EBC56B955D}"/>
+              </a:ext>
+            </a:extLst>
+          </p:cNvPr>
           <p:cNvSpPr>
             <a:spLocks noGrp="1"/>
           </p:cNvSpPr>
@@ -2635,8 +2814,8 @@
         </p:nvSpPr>
         <p:spPr>
           <a:xfrm>
-            <a:off x="457200" y="1600200"/>
-            <a:ext cx="8229600" cy="4525963"/>
+            <a:off x="838200" y="1825625"/>
+            <a:ext cx="10515600" cy="4351338"/>
           </a:xfrm>
           <a:prstGeom prst="rect">
             <a:avLst/>
@@ -2650,44 +2829,49 @@
           <a:p>
             <a:pPr lvl="0"/>
             <a:r>
-              <a:rPr lang="en-US" smtClean="0"/>
+              <a:rPr lang="en-US"/>
               <a:t>Click to edit Master text styles</a:t>
             </a:r>
           </a:p>
           <a:p>
             <a:pPr lvl="1"/>
             <a:r>
-              <a:rPr lang="en-US" smtClean="0"/>
+              <a:rPr lang="en-US"/>
               <a:t>Second level</a:t>
             </a:r>
           </a:p>
           <a:p>
             <a:pPr lvl="2"/>
             <a:r>
-              <a:rPr lang="en-US" smtClean="0"/>
+              <a:rPr lang="en-US"/>
               <a:t>Third level</a:t>
             </a:r>
           </a:p>
           <a:p>
             <a:pPr lvl="3"/>
             <a:r>
-              <a:rPr lang="en-US" smtClean="0"/>
+              <a:rPr lang="en-US"/>
               <a:t>Fourth level</a:t>
             </a:r>
           </a:p>
           <a:p>
             <a:pPr lvl="4"/>
             <a:r>
-              <a:rPr lang="en-US" smtClean="0"/>
+              <a:rPr lang="en-US"/>
               <a:t>Fifth level</a:t>
             </a:r>
-            <a:endParaRPr lang="en-US"/>
-          </a:p>
-        </p:txBody>
-      </p:sp>
-      <p:sp>
-        <p:nvSpPr>
-          <p:cNvPr id="4" name="Date Placeholder 3"/>
+          </a:p>
+        </p:txBody>
+      </p:sp>
+      <p:sp>
+        <p:nvSpPr>
+          <p:cNvPr id="4" name="Date Placeholder 3">
+            <a:extLst>
+              <a:ext uri="{FF2B5EF4-FFF2-40B4-BE49-F238E27FC236}">
+                <a16:creationId xmlns:a16="http://schemas.microsoft.com/office/drawing/2014/main" id="{014ED7C1-730D-33A8-C8FE-3DFEBB386433}"/>
+              </a:ext>
+            </a:extLst>
+          </p:cNvPr>
           <p:cNvSpPr>
             <a:spLocks noGrp="1"/>
           </p:cNvSpPr>
@@ -2697,8 +2881,8 @@
         </p:nvSpPr>
         <p:spPr>
           <a:xfrm>
-            <a:off x="457200" y="6356350"/>
-            <a:ext cx="2133600" cy="365125"/>
+            <a:off x="838200" y="6356350"/>
+            <a:ext cx="2743200" cy="365125"/>
           </a:xfrm>
           <a:prstGeom prst="rect">
             <a:avLst/>
@@ -2718,9 +2902,9 @@
             </a:lvl1pPr>
           </a:lstStyle>
           <a:p>
-            <a:fld id="{5BCAD085-E8A6-8845-BD4E-CB4CCA059FC4}" type="datetimeFigureOut">
+            <a:fld id="{7994B958-401A-4A89-98CA-0A39E34EFB4D}" type="datetimeFigureOut">
               <a:rPr lang="en-US" smtClean="0"/>
-              <a:t>1/27/13</a:t>
+              <a:t>7/13/2026</a:t>
             </a:fld>
             <a:endParaRPr lang="en-US"/>
           </a:p>
@@ -2728,7 +2912,13 @@
       </p:sp>
       <p:sp>
         <p:nvSpPr>
-          <p:cNvPr id="5" name="Footer Placeholder 4"/>
+          <p:cNvPr id="5" name="Footer Placeholder 4">
+            <a:extLst>
+              <a:ext uri="{FF2B5EF4-FFF2-40B4-BE49-F238E27FC236}">
+                <a16:creationId xmlns:a16="http://schemas.microsoft.com/office/drawing/2014/main" id="{4B68B4B5-3B18-24F2-A405-69AB339CAB08}"/>
+              </a:ext>
+            </a:extLst>
+          </p:cNvPr>
           <p:cNvSpPr>
             <a:spLocks noGrp="1"/>
           </p:cNvSpPr>
@@ -2738,8 +2928,8 @@
         </p:nvSpPr>
         <p:spPr>
           <a:xfrm>
-            <a:off x="3124200" y="6356350"/>
-            <a:ext cx="2895600" cy="365125"/>
+            <a:off x="4038600" y="6356350"/>
+            <a:ext cx="4114800" cy="365125"/>
           </a:xfrm>
           <a:prstGeom prst="rect">
             <a:avLst/>
@@ -2765,7 +2955,13 @@
       </p:sp>
       <p:sp>
         <p:nvSpPr>
-          <p:cNvPr id="6" name="Slide Number Placeholder 5"/>
+          <p:cNvPr id="6" name="Slide Number Placeholder 5">
+            <a:extLst>
+              <a:ext uri="{FF2B5EF4-FFF2-40B4-BE49-F238E27FC236}">
+                <a16:creationId xmlns:a16="http://schemas.microsoft.com/office/drawing/2014/main" id="{591D66DE-DB67-49A2-547F-3603FB205A96}"/>
+              </a:ext>
+            </a:extLst>
+          </p:cNvPr>
           <p:cNvSpPr>
             <a:spLocks noGrp="1"/>
           </p:cNvSpPr>
@@ -2775,8 +2971,8 @@
         </p:nvSpPr>
         <p:spPr>
           <a:xfrm>
-            <a:off x="6553200" y="6356350"/>
-            <a:ext cx="2133600" cy="365125"/>
+            <a:off x="8610600" y="6356350"/>
+            <a:ext cx="2743200" cy="365125"/>
           </a:xfrm>
           <a:prstGeom prst="rect">
             <a:avLst/>
@@ -2796,7 +2992,7 @@
             </a:lvl1pPr>
           </a:lstStyle>
           <a:p>
-            <a:fld id="{C1FF6DA9-008F-8B48-92A6-B652298478BF}" type="slidenum">
+            <a:fld id="{76A5515E-906D-4A46-88BA-63D09FD3EC7D}" type="slidenum">
               <a:rPr lang="en-US" smtClean="0"/>
               <a:t>‹#›</a:t>
             </a:fld>
@@ -2807,7 +3003,7 @@
     </p:spTree>
     <p:extLst>
       <p:ext uri="{BB962C8B-B14F-4D97-AF65-F5344CB8AC3E}">
-        <p14:creationId xmlns:p14="http://schemas.microsoft.com/office/powerpoint/2010/main" val="2209977519"/>
+        <p14:creationId xmlns:p14="http://schemas.microsoft.com/office/powerpoint/2010/main" val="2674003009"/>
       </p:ext>
     </p:extLst>
   </p:cSld>
@@ -2827,7 +3023,10 @@
   </p:sldLayoutIdLst>
   <p:txStyles>
     <p:titleStyle>
-      <a:lvl1pPr algn="ctr" defTabSz="457200" rtl="0" eaLnBrk="1" latinLnBrk="0" hangingPunct="1">
+      <a:lvl1pPr algn="l" defTabSz="914400" rtl="0" eaLnBrk="1" latinLnBrk="0" hangingPunct="1">
+        <a:lnSpc>
+          <a:spcPct val="90000"/>
+        </a:lnSpc>
         <a:spcBef>
           <a:spcPct val="0"/>
         </a:spcBef>
@@ -2843,13 +3042,16 @@
       </a:lvl1pPr>
     </p:titleStyle>
     <p:bodyStyle>
-      <a:lvl1pPr marL="342900" indent="-342900" algn="l" defTabSz="457200" rtl="0" eaLnBrk="1" latinLnBrk="0" hangingPunct="1">
+      <a:lvl1pPr marL="228600" indent="-228600" algn="l" defTabSz="914400" rtl="0" eaLnBrk="1" latinLnBrk="0" hangingPunct="1">
+        <a:lnSpc>
+          <a:spcPct val="90000"/>
+        </a:lnSpc>
         <a:spcBef>
-          <a:spcPct val="20000"/>
+          <a:spcPts val="1000"/>
         </a:spcBef>
-        <a:buFont typeface="Arial"/>
+        <a:buFont typeface="Arial" panose="020B0604020202020204" pitchFamily="34" charset="0"/>
         <a:buChar char="•"/>
-        <a:defRPr sz="3200" kern="1200">
+        <a:defRPr sz="2800" kern="1200">
           <a:solidFill>
             <a:schemeClr val="tx1"/>
           </a:solidFill>
@@ -2858,26 +3060,14 @@
           <a:cs typeface="+mn-cs"/>
         </a:defRPr>
       </a:lvl1pPr>
-      <a:lvl2pPr marL="742950" indent="-285750" algn="l" defTabSz="457200" rtl="0" eaLnBrk="1" latinLnBrk="0" hangingPunct="1">
+      <a:lvl2pPr marL="685800" indent="-228600" algn="l" defTabSz="914400" rtl="0" eaLnBrk="1" latinLnBrk="0" hangingPunct="1">
+        <a:lnSpc>
+          <a:spcPct val="90000"/>
+        </a:lnSpc>
         <a:spcBef>
-          <a:spcPct val="20000"/>
+          <a:spcPts val="500"/>
         </a:spcBef>
-        <a:buFont typeface="Arial"/>
-        <a:buChar char="–"/>
-        <a:defRPr sz="2800" kern="1200">
-          <a:solidFill>
-            <a:schemeClr val="tx1"/>
-          </a:solidFill>
-          <a:latin typeface="+mn-lt"/>
-          <a:ea typeface="+mn-ea"/>
-          <a:cs typeface="+mn-cs"/>
-        </a:defRPr>
-      </a:lvl2pPr>
-      <a:lvl3pPr marL="1143000" indent="-228600" algn="l" defTabSz="457200" rtl="0" eaLnBrk="1" latinLnBrk="0" hangingPunct="1">
-        <a:spcBef>
-          <a:spcPct val="20000"/>
-        </a:spcBef>
-        <a:buFont typeface="Arial"/>
+        <a:buFont typeface="Arial" panose="020B0604020202020204" pitchFamily="34" charset="0"/>
         <a:buChar char="•"/>
         <a:defRPr sz="2400" kern="1200">
           <a:solidFill>
@@ -2887,42 +3077,15 @@
           <a:ea typeface="+mn-ea"/>
           <a:cs typeface="+mn-cs"/>
         </a:defRPr>
-      </a:lvl3pPr>
-      <a:lvl4pPr marL="1600200" indent="-228600" algn="l" defTabSz="457200" rtl="0" eaLnBrk="1" latinLnBrk="0" hangingPunct="1">
+      </a:lvl2pPr>
+      <a:lvl3pPr marL="1143000" indent="-228600" algn="l" defTabSz="914400" rtl="0" eaLnBrk="1" latinLnBrk="0" hangingPunct="1">
+        <a:lnSpc>
+          <a:spcPct val="90000"/>
+        </a:lnSpc>
         <a:spcBef>
-          <a:spcPct val="20000"/>
+          <a:spcPts val="500"/>
         </a:spcBef>
-        <a:buFont typeface="Arial"/>
-        <a:buChar char="–"/>
-        <a:defRPr sz="2000" kern="1200">
-          <a:solidFill>
-            <a:schemeClr val="tx1"/>
-          </a:solidFill>
-          <a:latin typeface="+mn-lt"/>
-          <a:ea typeface="+mn-ea"/>
-          <a:cs typeface="+mn-cs"/>
-        </a:defRPr>
-      </a:lvl4pPr>
-      <a:lvl5pPr marL="2057400" indent="-228600" algn="l" defTabSz="457200" rtl="0" eaLnBrk="1" latinLnBrk="0" hangingPunct="1">
-        <a:spcBef>
-          <a:spcPct val="20000"/>
-        </a:spcBef>
-        <a:buFont typeface="Arial"/>
-        <a:buChar char="»"/>
-        <a:defRPr sz="2000" kern="1200">
-          <a:solidFill>
-            <a:schemeClr val="tx1"/>
-          </a:solidFill>
-          <a:latin typeface="+mn-lt"/>
-          <a:ea typeface="+mn-ea"/>
-          <a:cs typeface="+mn-cs"/>
-        </a:defRPr>
-      </a:lvl5pPr>
-      <a:lvl6pPr marL="2514600" indent="-228600" algn="l" defTabSz="457200" rtl="0" eaLnBrk="1" latinLnBrk="0" hangingPunct="1">
-        <a:spcBef>
-          <a:spcPct val="20000"/>
-        </a:spcBef>
-        <a:buFont typeface="Arial"/>
+        <a:buFont typeface="Arial" panose="020B0604020202020204" pitchFamily="34" charset="0"/>
         <a:buChar char="•"/>
         <a:defRPr sz="2000" kern="1200">
           <a:solidFill>
@@ -2932,14 +3095,71 @@
           <a:ea typeface="+mn-ea"/>
           <a:cs typeface="+mn-cs"/>
         </a:defRPr>
+      </a:lvl3pPr>
+      <a:lvl4pPr marL="1600200" indent="-228600" algn="l" defTabSz="914400" rtl="0" eaLnBrk="1" latinLnBrk="0" hangingPunct="1">
+        <a:lnSpc>
+          <a:spcPct val="90000"/>
+        </a:lnSpc>
+        <a:spcBef>
+          <a:spcPts val="500"/>
+        </a:spcBef>
+        <a:buFont typeface="Arial" panose="020B0604020202020204" pitchFamily="34" charset="0"/>
+        <a:buChar char="•"/>
+        <a:defRPr sz="1800" kern="1200">
+          <a:solidFill>
+            <a:schemeClr val="tx1"/>
+          </a:solidFill>
+          <a:latin typeface="+mn-lt"/>
+          <a:ea typeface="+mn-ea"/>
+          <a:cs typeface="+mn-cs"/>
+        </a:defRPr>
+      </a:lvl4pPr>
+      <a:lvl5pPr marL="2057400" indent="-228600" algn="l" defTabSz="914400" rtl="0" eaLnBrk="1" latinLnBrk="0" hangingPunct="1">
+        <a:lnSpc>
+          <a:spcPct val="90000"/>
+        </a:lnSpc>
+        <a:spcBef>
+          <a:spcPts val="500"/>
+        </a:spcBef>
+        <a:buFont typeface="Arial" panose="020B0604020202020204" pitchFamily="34" charset="0"/>
+        <a:buChar char="•"/>
+        <a:defRPr sz="1800" kern="1200">
+          <a:solidFill>
+            <a:schemeClr val="tx1"/>
+          </a:solidFill>
+          <a:latin typeface="+mn-lt"/>
+          <a:ea typeface="+mn-ea"/>
+          <a:cs typeface="+mn-cs"/>
+        </a:defRPr>
+      </a:lvl5pPr>
+      <a:lvl6pPr marL="2514600" indent="-228600" algn="l" defTabSz="914400" rtl="0" eaLnBrk="1" latinLnBrk="0" hangingPunct="1">
+        <a:lnSpc>
+          <a:spcPct val="90000"/>
+        </a:lnSpc>
+        <a:spcBef>
+          <a:spcPts val="500"/>
+        </a:spcBef>
+        <a:buFont typeface="Arial" panose="020B0604020202020204" pitchFamily="34" charset="0"/>
+        <a:buChar char="•"/>
+        <a:defRPr sz="1800" kern="1200">
+          <a:solidFill>
+            <a:schemeClr val="tx1"/>
+          </a:solidFill>
+          <a:latin typeface="+mn-lt"/>
+          <a:ea typeface="+mn-ea"/>
+          <a:cs typeface="+mn-cs"/>
+        </a:defRPr>
       </a:lvl6pPr>
-      <a:lvl7pPr marL="2971800" indent="-228600" algn="l" defTabSz="457200" rtl="0" eaLnBrk="1" latinLnBrk="0" hangingPunct="1">
+      <a:lvl7pPr marL="2971800" indent="-228600" algn="l" defTabSz="914400" rtl="0" eaLnBrk="1" latinLnBrk="0" hangingPunct="1">
+        <a:lnSpc>
+          <a:spcPct val="90000"/>
+        </a:lnSpc>
         <a:spcBef>
-          <a:spcPct val="20000"/>
+          <a:spcPts val="500"/>
         </a:spcBef>
-        <a:buFont typeface="Arial"/>
+        <a:buFont typeface="Arial" panose="020B0604020202020204" pitchFamily="34" charset="0"/>
         <a:buChar char="•"/>
-        <a:defRPr sz="2000" kern="1200">
+        <a:defRPr sz="1800" kern="1200">
           <a:solidFill>
             <a:schemeClr val="tx1"/>
           </a:solidFill>
@@ -2948,13 +3168,16 @@
           <a:cs typeface="+mn-cs"/>
         </a:defRPr>
       </a:lvl7pPr>
-      <a:lvl8pPr marL="3429000" indent="-228600" algn="l" defTabSz="457200" rtl="0" eaLnBrk="1" latinLnBrk="0" hangingPunct="1">
+      <a:lvl8pPr marL="3429000" indent="-228600" algn="l" defTabSz="914400" rtl="0" eaLnBrk="1" latinLnBrk="0" hangingPunct="1">
+        <a:lnSpc>
+          <a:spcPct val="90000"/>
+        </a:lnSpc>
         <a:spcBef>
-          <a:spcPct val="20000"/>
+          <a:spcPts val="500"/>
         </a:spcBef>
-        <a:buFont typeface="Arial"/>
+        <a:buFont typeface="Arial" panose="020B0604020202020204" pitchFamily="34" charset="0"/>
         <a:buChar char="•"/>
-        <a:defRPr sz="2000" kern="1200">
+        <a:defRPr sz="1800" kern="1200">
           <a:solidFill>
             <a:schemeClr val="tx1"/>
           </a:solidFill>
@@ -2963,13 +3186,16 @@
           <a:cs typeface="+mn-cs"/>
         </a:defRPr>
       </a:lvl8pPr>
-      <a:lvl9pPr marL="3886200" indent="-228600" algn="l" defTabSz="457200" rtl="0" eaLnBrk="1" latinLnBrk="0" hangingPunct="1">
+      <a:lvl9pPr marL="3886200" indent="-228600" algn="l" defTabSz="914400" rtl="0" eaLnBrk="1" latinLnBrk="0" hangingPunct="1">
+        <a:lnSpc>
+          <a:spcPct val="90000"/>
+        </a:lnSpc>
         <a:spcBef>
-          <a:spcPct val="20000"/>
+          <a:spcPts val="500"/>
         </a:spcBef>
-        <a:buFont typeface="Arial"/>
+        <a:buFont typeface="Arial" panose="020B0604020202020204" pitchFamily="34" charset="0"/>
         <a:buChar char="•"/>
-        <a:defRPr sz="2000" kern="1200">
+        <a:defRPr sz="1800" kern="1200">
           <a:solidFill>
             <a:schemeClr val="tx1"/>
           </a:solidFill>
@@ -2983,7 +3209,7 @@
       <a:defPPr>
         <a:defRPr lang="en-US"/>
       </a:defPPr>
-      <a:lvl1pPr marL="0" algn="l" defTabSz="457200" rtl="0" eaLnBrk="1" latinLnBrk="0" hangingPunct="1">
+      <a:lvl1pPr marL="0" algn="l" defTabSz="914400" rtl="0" eaLnBrk="1" latinLnBrk="0" hangingPunct="1">
         <a:defRPr sz="1800" kern="1200">
           <a:solidFill>
             <a:schemeClr val="tx1"/>
@@ -2993,7 +3219,7 @@
           <a:cs typeface="+mn-cs"/>
         </a:defRPr>
       </a:lvl1pPr>
-      <a:lvl2pPr marL="457200" algn="l" defTabSz="457200" rtl="0" eaLnBrk="1" latinLnBrk="0" hangingPunct="1">
+      <a:lvl2pPr marL="457200" algn="l" defTabSz="914400" rtl="0" eaLnBrk="1" latinLnBrk="0" hangingPunct="1">
         <a:defRPr sz="1800" kern="1200">
           <a:solidFill>
             <a:schemeClr val="tx1"/>
@@ -3003,7 +3229,7 @@
           <a:cs typeface="+mn-cs"/>
         </a:defRPr>
       </a:lvl2pPr>
-      <a:lvl3pPr marL="914400" algn="l" defTabSz="457200" rtl="0" eaLnBrk="1" latinLnBrk="0" hangingPunct="1">
+      <a:lvl3pPr marL="914400" algn="l" defTabSz="914400" rtl="0" eaLnBrk="1" latinLnBrk="0" hangingPunct="1">
         <a:defRPr sz="1800" kern="1200">
           <a:solidFill>
             <a:schemeClr val="tx1"/>
@@ -3013,7 +3239,7 @@
           <a:cs typeface="+mn-cs"/>
         </a:defRPr>
       </a:lvl3pPr>
-      <a:lvl4pPr marL="1371600" algn="l" defTabSz="457200" rtl="0" eaLnBrk="1" latinLnBrk="0" hangingPunct="1">
+      <a:lvl4pPr marL="1371600" algn="l" defTabSz="914400" rtl="0" eaLnBrk="1" latinLnBrk="0" hangingPunct="1">
         <a:defRPr sz="1800" kern="1200">
           <a:solidFill>
             <a:schemeClr val="tx1"/>
@@ -3023,7 +3249,7 @@
           <a:cs typeface="+mn-cs"/>
         </a:defRPr>
       </a:lvl4pPr>
-      <a:lvl5pPr marL="1828800" algn="l" defTabSz="457200" rtl="0" eaLnBrk="1" latinLnBrk="0" hangingPunct="1">
+      <a:lvl5pPr marL="1828800" algn="l" defTabSz="914400" rtl="0" eaLnBrk="1" latinLnBrk="0" hangingPunct="1">
         <a:defRPr sz="1800" kern="1200">
           <a:solidFill>
             <a:schemeClr val="tx1"/>
@@ -3033,7 +3259,7 @@
           <a:cs typeface="+mn-cs"/>
         </a:defRPr>
       </a:lvl5pPr>
-      <a:lvl6pPr marL="2286000" algn="l" defTabSz="457200" rtl="0" eaLnBrk="1" latinLnBrk="0" hangingPunct="1">
+      <a:lvl6pPr marL="2286000" algn="l" defTabSz="914400" rtl="0" eaLnBrk="1" latinLnBrk="0" hangingPunct="1">
         <a:defRPr sz="1800" kern="1200">
           <a:solidFill>
             <a:schemeClr val="tx1"/>
@@ -3043,7 +3269,7 @@
           <a:cs typeface="+mn-cs"/>
         </a:defRPr>
       </a:lvl6pPr>
-      <a:lvl7pPr marL="2743200" algn="l" defTabSz="457200" rtl="0" eaLnBrk="1" latinLnBrk="0" hangingPunct="1">
+      <a:lvl7pPr marL="2743200" algn="l" defTabSz="914400" rtl="0" eaLnBrk="1" latinLnBrk="0" hangingPunct="1">
         <a:defRPr sz="1800" kern="1200">
           <a:solidFill>
             <a:schemeClr val="tx1"/>
@@ -3053,7 +3279,7 @@
           <a:cs typeface="+mn-cs"/>
         </a:defRPr>
       </a:lvl7pPr>
-      <a:lvl8pPr marL="3200400" algn="l" defTabSz="457200" rtl="0" eaLnBrk="1" latinLnBrk="0" hangingPunct="1">
+      <a:lvl8pPr marL="3200400" algn="l" defTabSz="914400" rtl="0" eaLnBrk="1" latinLnBrk="0" hangingPunct="1">
         <a:defRPr sz="1800" kern="1200">
           <a:solidFill>
             <a:schemeClr val="tx1"/>
@@ -3063,7 +3289,7 @@
           <a:cs typeface="+mn-cs"/>
         </a:defRPr>
       </a:lvl8pPr>
-      <a:lvl9pPr marL="3657600" algn="l" defTabSz="457200" rtl="0" eaLnBrk="1" latinLnBrk="0" hangingPunct="1">
+      <a:lvl9pPr marL="3657600" algn="l" defTabSz="914400" rtl="0" eaLnBrk="1" latinLnBrk="0" hangingPunct="1">
         <a:defRPr sz="1800" kern="1200">
           <a:solidFill>
             <a:schemeClr val="tx1"/>
@@ -3079,7 +3305,7 @@
 </file>
 
 <file path=ppt/slides/slide1.xml><?xml version="1.0" encoding="utf-8"?>
-<p:sld xmlns:a="http://schemas.openxmlformats.org/drawingml/2006/main" xmlns:p="http://schemas.openxmlformats.org/presentationml/2006/main" xmlns:r="http://schemas.openxmlformats.org/officeDocument/2006/relationships">
+<p:sld xmlns:a="http://schemas.openxmlformats.org/drawingml/2006/main" xmlns:r="http://schemas.openxmlformats.org/officeDocument/2006/relationships" xmlns:p="http://schemas.openxmlformats.org/presentationml/2006/main">
   <p:cSld>
     <p:spTree>
       <p:nvGrpSpPr>
@@ -3087,31 +3313,2495 @@
         <p:cNvGrpSpPr/>
         <p:nvPr/>
       </p:nvGrpSpPr>
-      <p:grpSpPr/>
-      <p:pic>
-        <p:nvPicPr>
-          <p:cNvPr id="2" name="Picture 1" descr="fig5_synthesis.png"/>
-          <p:cNvPicPr>
-            <a:picLocks noChangeAspect="1"/>
-          </p:cNvPicPr>
+      <p:grpSpPr>
+        <a:xfrm>
+          <a:off x="0" y="0"/>
+          <a:ext cx="0" cy="0"/>
+          <a:chOff x="0" y="0"/>
+          <a:chExt cx="0" cy="0"/>
+        </a:xfrm>
+      </p:grpSpPr>
+      <p:sp>
+        <p:nvSpPr>
+          <p:cNvPr id="2" name="Rounded Rectangle 1"/>
+          <p:cNvSpPr/>
           <p:nvPr/>
-        </p:nvPicPr>
-        <p:blipFill>
-          <a:blip r:embed="rId2"/>
-          <a:stretch>
-            <a:fillRect/>
-          </a:stretch>
-        </p:blipFill>
-        <p:spPr>
-          <a:xfrm>
-            <a:off x="0" y="0"/>
-            <a:ext cx="12191695" cy="8381790"/>
+        </p:nvSpPr>
+        <p:spPr>
+          <a:xfrm>
+            <a:off x="118712" y="182880"/>
+            <a:ext cx="2926080" cy="2011680"/>
+          </a:xfrm>
+          <a:prstGeom prst="roundRect">
+            <a:avLst/>
+          </a:prstGeom>
+          <a:solidFill>
+            <a:srgbClr val="FFFFFF"/>
+          </a:solidFill>
+          <a:ln w="19050">
+            <a:solidFill>
+              <a:srgbClr val="00695C"/>
+            </a:solidFill>
+          </a:ln>
+        </p:spPr>
+        <p:style>
+          <a:lnRef idx="1">
+            <a:schemeClr val="accent1"/>
+          </a:lnRef>
+          <a:fillRef idx="3">
+            <a:schemeClr val="accent1"/>
+          </a:fillRef>
+          <a:effectRef idx="2">
+            <a:schemeClr val="accent1"/>
+          </a:effectRef>
+          <a:fontRef idx="minor">
+            <a:schemeClr val="lt1"/>
+          </a:fontRef>
+        </p:style>
+        <p:txBody>
+          <a:bodyPr rtlCol="0" anchor="ctr"/>
+          <a:lstStyle/>
+          <a:p>
+            <a:pPr algn="ctr"/>
+            <a:endParaRPr sz="1400">
+              <a:latin typeface="Times New Roman" panose="02020603050405020304" pitchFamily="18" charset="0"/>
+              <a:cs typeface="Times New Roman" panose="02020603050405020304" pitchFamily="18" charset="0"/>
+            </a:endParaRPr>
+          </a:p>
+        </p:txBody>
+      </p:sp>
+      <p:sp>
+        <p:nvSpPr>
+          <p:cNvPr id="3" name="Rectangle 2"/>
+          <p:cNvSpPr/>
+          <p:nvPr/>
+        </p:nvSpPr>
+        <p:spPr>
+          <a:xfrm>
+            <a:off x="118712" y="182880"/>
+            <a:ext cx="2926080" cy="365760"/>
           </a:xfrm>
           <a:prstGeom prst="rect">
             <a:avLst/>
           </a:prstGeom>
-        </p:spPr>
-      </p:pic>
+          <a:solidFill>
+            <a:srgbClr val="00695C"/>
+          </a:solidFill>
+          <a:ln>
+            <a:noFill/>
+          </a:ln>
+        </p:spPr>
+        <p:style>
+          <a:lnRef idx="1">
+            <a:schemeClr val="accent1"/>
+          </a:lnRef>
+          <a:fillRef idx="3">
+            <a:schemeClr val="accent1"/>
+          </a:fillRef>
+          <a:effectRef idx="2">
+            <a:schemeClr val="accent1"/>
+          </a:effectRef>
+          <a:fontRef idx="minor">
+            <a:schemeClr val="lt1"/>
+          </a:fontRef>
+        </p:style>
+        <p:txBody>
+          <a:bodyPr rtlCol="0" anchor="ctr"/>
+          <a:lstStyle/>
+          <a:p>
+            <a:pPr algn="ctr"/>
+            <a:endParaRPr sz="1400">
+              <a:latin typeface="Times New Roman" panose="02020603050405020304" pitchFamily="18" charset="0"/>
+              <a:cs typeface="Times New Roman" panose="02020603050405020304" pitchFamily="18" charset="0"/>
+            </a:endParaRPr>
+          </a:p>
+        </p:txBody>
+      </p:sp>
+      <p:sp>
+        <p:nvSpPr>
+          <p:cNvPr id="4" name="TextBox 3"/>
+          <p:cNvSpPr txBox="1"/>
+          <p:nvPr/>
+        </p:nvSpPr>
+        <p:spPr>
+          <a:xfrm>
+            <a:off x="118712" y="228600"/>
+            <a:ext cx="2926080" cy="307777"/>
+          </a:xfrm>
+          <a:prstGeom prst="rect">
+            <a:avLst/>
+          </a:prstGeom>
+          <a:noFill/>
+        </p:spPr>
+        <p:txBody>
+          <a:bodyPr wrap="square" lIns="45720" rIns="45720">
+            <a:spAutoFit/>
+          </a:bodyPr>
+          <a:lstStyle/>
+          <a:p>
+            <a:pPr algn="ctr"/>
+            <a:r>
+              <a:rPr sz="1400" b="1" i="0">
+                <a:solidFill>
+                  <a:srgbClr val="FFFFFF"/>
+                </a:solidFill>
+                <a:latin typeface="Times New Roman" panose="02020603050405020304" pitchFamily="18" charset="0"/>
+                <a:cs typeface="Times New Roman" panose="02020603050405020304" pitchFamily="18" charset="0"/>
+              </a:rPr>
+              <a:t>P1  HEALTHCARE</a:t>
+            </a:r>
+          </a:p>
+        </p:txBody>
+      </p:sp>
+      <p:sp>
+        <p:nvSpPr>
+          <p:cNvPr id="6" name="Rounded Rectangle 5"/>
+          <p:cNvSpPr/>
+          <p:nvPr/>
+        </p:nvSpPr>
+        <p:spPr>
+          <a:xfrm>
+            <a:off x="8967537" y="182880"/>
+            <a:ext cx="3091313" cy="2011680"/>
+          </a:xfrm>
+          <a:prstGeom prst="roundRect">
+            <a:avLst/>
+          </a:prstGeom>
+          <a:solidFill>
+            <a:srgbClr val="FFFFFF"/>
+          </a:solidFill>
+          <a:ln w="19050">
+            <a:solidFill>
+              <a:srgbClr val="5E1F8C"/>
+            </a:solidFill>
+          </a:ln>
+        </p:spPr>
+        <p:style>
+          <a:lnRef idx="1">
+            <a:schemeClr val="accent1"/>
+          </a:lnRef>
+          <a:fillRef idx="3">
+            <a:schemeClr val="accent1"/>
+          </a:fillRef>
+          <a:effectRef idx="2">
+            <a:schemeClr val="accent1"/>
+          </a:effectRef>
+          <a:fontRef idx="minor">
+            <a:schemeClr val="lt1"/>
+          </a:fontRef>
+        </p:style>
+        <p:txBody>
+          <a:bodyPr rtlCol="0" anchor="ctr"/>
+          <a:lstStyle/>
+          <a:p>
+            <a:pPr algn="ctr"/>
+            <a:endParaRPr sz="1400">
+              <a:latin typeface="Times New Roman" panose="02020603050405020304" pitchFamily="18" charset="0"/>
+              <a:cs typeface="Times New Roman" panose="02020603050405020304" pitchFamily="18" charset="0"/>
+            </a:endParaRPr>
+          </a:p>
+        </p:txBody>
+      </p:sp>
+      <p:sp>
+        <p:nvSpPr>
+          <p:cNvPr id="7" name="Rectangle 6"/>
+          <p:cNvSpPr/>
+          <p:nvPr/>
+        </p:nvSpPr>
+        <p:spPr>
+          <a:xfrm>
+            <a:off x="8967538" y="182880"/>
+            <a:ext cx="3104376" cy="365760"/>
+          </a:xfrm>
+          <a:prstGeom prst="rect">
+            <a:avLst/>
+          </a:prstGeom>
+          <a:solidFill>
+            <a:srgbClr val="5E1F8C"/>
+          </a:solidFill>
+          <a:ln>
+            <a:noFill/>
+          </a:ln>
+        </p:spPr>
+        <p:style>
+          <a:lnRef idx="1">
+            <a:schemeClr val="accent1"/>
+          </a:lnRef>
+          <a:fillRef idx="3">
+            <a:schemeClr val="accent1"/>
+          </a:fillRef>
+          <a:effectRef idx="2">
+            <a:schemeClr val="accent1"/>
+          </a:effectRef>
+          <a:fontRef idx="minor">
+            <a:schemeClr val="lt1"/>
+          </a:fontRef>
+        </p:style>
+        <p:txBody>
+          <a:bodyPr rtlCol="0" anchor="ctr"/>
+          <a:lstStyle/>
+          <a:p>
+            <a:pPr algn="ctr"/>
+            <a:endParaRPr sz="1400">
+              <a:latin typeface="Times New Roman" panose="02020603050405020304" pitchFamily="18" charset="0"/>
+              <a:cs typeface="Times New Roman" panose="02020603050405020304" pitchFamily="18" charset="0"/>
+            </a:endParaRPr>
+          </a:p>
+        </p:txBody>
+      </p:sp>
+      <p:sp>
+        <p:nvSpPr>
+          <p:cNvPr id="8" name="TextBox 7"/>
+          <p:cNvSpPr txBox="1"/>
+          <p:nvPr/>
+        </p:nvSpPr>
+        <p:spPr>
+          <a:xfrm>
+            <a:off x="9132770" y="228600"/>
+            <a:ext cx="2926080" cy="307777"/>
+          </a:xfrm>
+          <a:prstGeom prst="rect">
+            <a:avLst/>
+          </a:prstGeom>
+          <a:noFill/>
+        </p:spPr>
+        <p:txBody>
+          <a:bodyPr wrap="square" lIns="45720" rIns="45720">
+            <a:spAutoFit/>
+          </a:bodyPr>
+          <a:lstStyle/>
+          <a:p>
+            <a:pPr algn="ctr"/>
+            <a:r>
+              <a:rPr sz="1400" b="1" i="0">
+                <a:solidFill>
+                  <a:srgbClr val="FFFFFF"/>
+                </a:solidFill>
+                <a:latin typeface="Times New Roman" panose="02020603050405020304" pitchFamily="18" charset="0"/>
+                <a:cs typeface="Times New Roman" panose="02020603050405020304" pitchFamily="18" charset="0"/>
+              </a:rPr>
+              <a:t>P2  BLOCKCHAIN</a:t>
+            </a:r>
+          </a:p>
+        </p:txBody>
+      </p:sp>
+      <p:sp>
+        <p:nvSpPr>
+          <p:cNvPr id="9" name="TextBox 8"/>
+          <p:cNvSpPr txBox="1"/>
+          <p:nvPr/>
+        </p:nvSpPr>
+        <p:spPr>
+          <a:xfrm>
+            <a:off x="9073414" y="594360"/>
+            <a:ext cx="2926080" cy="1600438"/>
+          </a:xfrm>
+          <a:prstGeom prst="rect">
+            <a:avLst/>
+          </a:prstGeom>
+          <a:noFill/>
+        </p:spPr>
+        <p:txBody>
+          <a:bodyPr wrap="square" lIns="45720" rIns="45720">
+            <a:spAutoFit/>
+          </a:bodyPr>
+          <a:lstStyle/>
+          <a:p>
+            <a:pPr marL="182880"/>
+            <a:r>
+              <a:rPr sz="1400" dirty="0">
+                <a:solidFill>
+                  <a:srgbClr val="1E1E1E"/>
+                </a:solidFill>
+                <a:latin typeface="Times New Roman" panose="02020603050405020304" pitchFamily="18" charset="0"/>
+                <a:cs typeface="Times New Roman" panose="02020603050405020304" pitchFamily="18" charset="0"/>
+              </a:rPr>
+              <a:t>Decentralized trust, transparency
+and tamper resistance</a:t>
+            </a:r>
+          </a:p>
+          <a:p>
+            <a:r>
+              <a:rPr lang="en-US" sz="1400" dirty="0">
+                <a:solidFill>
+                  <a:srgbClr val="000000"/>
+                </a:solidFill>
+                <a:latin typeface="Times New Roman" panose="02020603050405020304" pitchFamily="18" charset="0"/>
+                <a:ea typeface="Times New Roman"/>
+                <a:cs typeface="Times New Roman" panose="02020603050405020304" pitchFamily="18" charset="0"/>
+                <a:sym typeface="Times New Roman"/>
+              </a:rPr>
+              <a:t>• PBFT consensus (production target)</a:t>
+            </a:r>
+          </a:p>
+          <a:p>
+            <a:r>
+              <a:rPr lang="en-US" sz="1400" dirty="0">
+                <a:solidFill>
+                  <a:srgbClr val="000000"/>
+                </a:solidFill>
+                <a:latin typeface="Times New Roman" panose="02020603050405020304" pitchFamily="18" charset="0"/>
+                <a:ea typeface="Times New Roman"/>
+                <a:cs typeface="Times New Roman" panose="02020603050405020304" pitchFamily="18" charset="0"/>
+                <a:sym typeface="Times New Roman"/>
+              </a:rPr>
+              <a:t>• Smart contract consent automation</a:t>
+            </a:r>
+          </a:p>
+          <a:p>
+            <a:r>
+              <a:rPr lang="en-US" sz="1400" dirty="0">
+                <a:solidFill>
+                  <a:srgbClr val="000000"/>
+                </a:solidFill>
+                <a:latin typeface="Times New Roman" panose="02020603050405020304" pitchFamily="18" charset="0"/>
+                <a:ea typeface="Times New Roman"/>
+                <a:cs typeface="Times New Roman" panose="02020603050405020304" pitchFamily="18" charset="0"/>
+                <a:sym typeface="Times New Roman"/>
+              </a:rPr>
+              <a:t>• On-chain hash, off-chain data (GDPR)</a:t>
+            </a:r>
+          </a:p>
+          <a:p>
+            <a:r>
+              <a:rPr lang="en-US" sz="1400" dirty="0">
+                <a:solidFill>
+                  <a:srgbClr val="000000"/>
+                </a:solidFill>
+                <a:latin typeface="Times New Roman" panose="02020603050405020304" pitchFamily="18" charset="0"/>
+                <a:ea typeface="Times New Roman"/>
+                <a:cs typeface="Times New Roman" panose="02020603050405020304" pitchFamily="18" charset="0"/>
+                <a:sym typeface="Times New Roman"/>
+              </a:rPr>
+              <a:t>• Layer-2 solutions for throughput</a:t>
+            </a:r>
+          </a:p>
+        </p:txBody>
+      </p:sp>
+      <p:sp>
+        <p:nvSpPr>
+          <p:cNvPr id="10" name="Rounded Rectangle 9"/>
+          <p:cNvSpPr/>
+          <p:nvPr/>
+        </p:nvSpPr>
+        <p:spPr>
+          <a:xfrm>
+            <a:off x="8967537" y="4076298"/>
+            <a:ext cx="3091313" cy="2011680"/>
+          </a:xfrm>
+          <a:prstGeom prst="roundRect">
+            <a:avLst/>
+          </a:prstGeom>
+          <a:solidFill>
+            <a:srgbClr val="FFFFFF"/>
+          </a:solidFill>
+          <a:ln w="19050">
+            <a:solidFill>
+              <a:srgbClr val="263238"/>
+            </a:solidFill>
+          </a:ln>
+        </p:spPr>
+        <p:style>
+          <a:lnRef idx="1">
+            <a:schemeClr val="accent1"/>
+          </a:lnRef>
+          <a:fillRef idx="3">
+            <a:schemeClr val="accent1"/>
+          </a:fillRef>
+          <a:effectRef idx="2">
+            <a:schemeClr val="accent1"/>
+          </a:effectRef>
+          <a:fontRef idx="minor">
+            <a:schemeClr val="lt1"/>
+          </a:fontRef>
+        </p:style>
+        <p:txBody>
+          <a:bodyPr rtlCol="0" anchor="ctr"/>
+          <a:lstStyle/>
+          <a:p>
+            <a:pPr algn="ctr"/>
+            <a:endParaRPr sz="1400">
+              <a:latin typeface="Times New Roman" panose="02020603050405020304" pitchFamily="18" charset="0"/>
+              <a:cs typeface="Times New Roman" panose="02020603050405020304" pitchFamily="18" charset="0"/>
+            </a:endParaRPr>
+          </a:p>
+        </p:txBody>
+      </p:sp>
+      <p:sp>
+        <p:nvSpPr>
+          <p:cNvPr id="11" name="Rectangle 10"/>
+          <p:cNvSpPr/>
+          <p:nvPr/>
+        </p:nvSpPr>
+        <p:spPr>
+          <a:xfrm>
+            <a:off x="8967536" y="4076298"/>
+            <a:ext cx="3091314" cy="365760"/>
+          </a:xfrm>
+          <a:prstGeom prst="rect">
+            <a:avLst/>
+          </a:prstGeom>
+          <a:solidFill>
+            <a:srgbClr val="263238"/>
+          </a:solidFill>
+          <a:ln>
+            <a:noFill/>
+          </a:ln>
+        </p:spPr>
+        <p:style>
+          <a:lnRef idx="1">
+            <a:schemeClr val="accent1"/>
+          </a:lnRef>
+          <a:fillRef idx="3">
+            <a:schemeClr val="accent1"/>
+          </a:fillRef>
+          <a:effectRef idx="2">
+            <a:schemeClr val="accent1"/>
+          </a:effectRef>
+          <a:fontRef idx="minor">
+            <a:schemeClr val="lt1"/>
+          </a:fontRef>
+        </p:style>
+        <p:txBody>
+          <a:bodyPr rtlCol="0" anchor="ctr"/>
+          <a:lstStyle/>
+          <a:p>
+            <a:pPr algn="ctr"/>
+            <a:endParaRPr sz="1400">
+              <a:latin typeface="Times New Roman" panose="02020603050405020304" pitchFamily="18" charset="0"/>
+              <a:cs typeface="Times New Roman" panose="02020603050405020304" pitchFamily="18" charset="0"/>
+            </a:endParaRPr>
+          </a:p>
+        </p:txBody>
+      </p:sp>
+      <p:sp>
+        <p:nvSpPr>
+          <p:cNvPr id="12" name="TextBox 11"/>
+          <p:cNvSpPr txBox="1"/>
+          <p:nvPr/>
+        </p:nvSpPr>
+        <p:spPr>
+          <a:xfrm>
+            <a:off x="9132770" y="4122018"/>
+            <a:ext cx="2926080" cy="307777"/>
+          </a:xfrm>
+          <a:prstGeom prst="rect">
+            <a:avLst/>
+          </a:prstGeom>
+          <a:noFill/>
+        </p:spPr>
+        <p:txBody>
+          <a:bodyPr wrap="square" lIns="45720" rIns="45720">
+            <a:spAutoFit/>
+          </a:bodyPr>
+          <a:lstStyle/>
+          <a:p>
+            <a:pPr algn="ctr"/>
+            <a:r>
+              <a:rPr sz="1400" b="1" i="0" dirty="0">
+                <a:solidFill>
+                  <a:srgbClr val="FFFFFF"/>
+                </a:solidFill>
+                <a:latin typeface="Times New Roman" panose="02020603050405020304" pitchFamily="18" charset="0"/>
+                <a:cs typeface="Times New Roman" panose="02020603050405020304" pitchFamily="18" charset="0"/>
+              </a:rPr>
+              <a:t>P3  GOVERNANCE</a:t>
+            </a:r>
+          </a:p>
+        </p:txBody>
+      </p:sp>
+      <p:sp>
+        <p:nvSpPr>
+          <p:cNvPr id="13" name="TextBox 12"/>
+          <p:cNvSpPr txBox="1"/>
+          <p:nvPr/>
+        </p:nvSpPr>
+        <p:spPr>
+          <a:xfrm>
+            <a:off x="9224210" y="4487778"/>
+            <a:ext cx="2743200" cy="1384995"/>
+          </a:xfrm>
+          <a:prstGeom prst="rect">
+            <a:avLst/>
+          </a:prstGeom>
+          <a:noFill/>
+        </p:spPr>
+        <p:txBody>
+          <a:bodyPr wrap="square" lIns="45720" rIns="45720">
+            <a:spAutoFit/>
+          </a:bodyPr>
+          <a:lstStyle/>
+          <a:p>
+            <a:pPr marL="182880" algn="l"/>
+            <a:r>
+              <a:rPr sz="1400" dirty="0">
+                <a:solidFill>
+                  <a:srgbClr val="1E1E1E"/>
+                </a:solidFill>
+                <a:latin typeface="Times New Roman" panose="02020603050405020304" pitchFamily="18" charset="0"/>
+                <a:cs typeface="Times New Roman" panose="02020603050405020304" pitchFamily="18" charset="0"/>
+              </a:rPr>
+              <a:t>Policy compliance, risk
+management and ethical oversight</a:t>
+            </a:r>
+          </a:p>
+          <a:p>
+            <a:r>
+              <a:rPr lang="en-US" sz="1400" dirty="0">
+                <a:solidFill>
+                  <a:srgbClr val="000000"/>
+                </a:solidFill>
+                <a:latin typeface="Times New Roman" panose="02020603050405020304" pitchFamily="18" charset="0"/>
+                <a:ea typeface="Times New Roman"/>
+                <a:cs typeface="Times New Roman" panose="02020603050405020304" pitchFamily="18" charset="0"/>
+                <a:sym typeface="Times New Roman"/>
+              </a:rPr>
+              <a:t>• GDPR Articles 6, 13 and 17</a:t>
+            </a:r>
+          </a:p>
+          <a:p>
+            <a:r>
+              <a:rPr lang="en-US" sz="1400" dirty="0">
+                <a:solidFill>
+                  <a:srgbClr val="000000"/>
+                </a:solidFill>
+                <a:latin typeface="Times New Roman" panose="02020603050405020304" pitchFamily="18" charset="0"/>
+                <a:ea typeface="Times New Roman"/>
+                <a:cs typeface="Times New Roman" panose="02020603050405020304" pitchFamily="18" charset="0"/>
+                <a:sym typeface="Times New Roman"/>
+              </a:rPr>
+              <a:t>• HIPAA data handling standards</a:t>
+            </a:r>
+          </a:p>
+          <a:p>
+            <a:r>
+              <a:rPr lang="en-US" sz="1400" dirty="0">
+                <a:solidFill>
+                  <a:srgbClr val="000000"/>
+                </a:solidFill>
+                <a:latin typeface="Times New Roman" panose="02020603050405020304" pitchFamily="18" charset="0"/>
+                <a:ea typeface="Times New Roman"/>
+                <a:cs typeface="Times New Roman" panose="02020603050405020304" pitchFamily="18" charset="0"/>
+                <a:sym typeface="Times New Roman"/>
+              </a:rPr>
+              <a:t>• EN 301 549 (Europe)</a:t>
+            </a:r>
+          </a:p>
+          <a:p>
+            <a:r>
+              <a:rPr lang="en-US" sz="1400" dirty="0">
+                <a:solidFill>
+                  <a:srgbClr val="000000"/>
+                </a:solidFill>
+                <a:latin typeface="Times New Roman" panose="02020603050405020304" pitchFamily="18" charset="0"/>
+                <a:ea typeface="Times New Roman"/>
+                <a:cs typeface="Times New Roman" panose="02020603050405020304" pitchFamily="18" charset="0"/>
+                <a:sym typeface="Times New Roman"/>
+              </a:rPr>
+              <a:t>• Section 508 (United States)</a:t>
+            </a:r>
+          </a:p>
+        </p:txBody>
+      </p:sp>
+      <p:sp>
+        <p:nvSpPr>
+          <p:cNvPr id="14" name="Rounded Rectangle 13"/>
+          <p:cNvSpPr/>
+          <p:nvPr/>
+        </p:nvSpPr>
+        <p:spPr>
+          <a:xfrm>
+            <a:off x="118712" y="4076298"/>
+            <a:ext cx="2926080" cy="2011680"/>
+          </a:xfrm>
+          <a:prstGeom prst="roundRect">
+            <a:avLst/>
+          </a:prstGeom>
+          <a:solidFill>
+            <a:srgbClr val="FFFFFF"/>
+          </a:solidFill>
+          <a:ln w="19050">
+            <a:solidFill>
+              <a:srgbClr val="880E4F"/>
+            </a:solidFill>
+          </a:ln>
+        </p:spPr>
+        <p:style>
+          <a:lnRef idx="1">
+            <a:schemeClr val="accent1"/>
+          </a:lnRef>
+          <a:fillRef idx="3">
+            <a:schemeClr val="accent1"/>
+          </a:fillRef>
+          <a:effectRef idx="2">
+            <a:schemeClr val="accent1"/>
+          </a:effectRef>
+          <a:fontRef idx="minor">
+            <a:schemeClr val="lt1"/>
+          </a:fontRef>
+        </p:style>
+        <p:txBody>
+          <a:bodyPr rtlCol="0" anchor="ctr"/>
+          <a:lstStyle/>
+          <a:p>
+            <a:pPr algn="ctr"/>
+            <a:endParaRPr sz="1400">
+              <a:latin typeface="Times New Roman" panose="02020603050405020304" pitchFamily="18" charset="0"/>
+              <a:cs typeface="Times New Roman" panose="02020603050405020304" pitchFamily="18" charset="0"/>
+            </a:endParaRPr>
+          </a:p>
+        </p:txBody>
+      </p:sp>
+      <p:sp>
+        <p:nvSpPr>
+          <p:cNvPr id="15" name="Rectangle 14"/>
+          <p:cNvSpPr/>
+          <p:nvPr/>
+        </p:nvSpPr>
+        <p:spPr>
+          <a:xfrm>
+            <a:off x="118712" y="4076298"/>
+            <a:ext cx="2926080" cy="365760"/>
+          </a:xfrm>
+          <a:prstGeom prst="rect">
+            <a:avLst/>
+          </a:prstGeom>
+          <a:solidFill>
+            <a:srgbClr val="880E4F"/>
+          </a:solidFill>
+          <a:ln>
+            <a:noFill/>
+          </a:ln>
+        </p:spPr>
+        <p:style>
+          <a:lnRef idx="1">
+            <a:schemeClr val="accent1"/>
+          </a:lnRef>
+          <a:fillRef idx="3">
+            <a:schemeClr val="accent1"/>
+          </a:fillRef>
+          <a:effectRef idx="2">
+            <a:schemeClr val="accent1"/>
+          </a:effectRef>
+          <a:fontRef idx="minor">
+            <a:schemeClr val="lt1"/>
+          </a:fontRef>
+        </p:style>
+        <p:txBody>
+          <a:bodyPr rtlCol="0" anchor="ctr"/>
+          <a:lstStyle/>
+          <a:p>
+            <a:pPr algn="ctr"/>
+            <a:endParaRPr sz="1400">
+              <a:latin typeface="Times New Roman" panose="02020603050405020304" pitchFamily="18" charset="0"/>
+              <a:cs typeface="Times New Roman" panose="02020603050405020304" pitchFamily="18" charset="0"/>
+            </a:endParaRPr>
+          </a:p>
+        </p:txBody>
+      </p:sp>
+      <p:sp>
+        <p:nvSpPr>
+          <p:cNvPr id="16" name="TextBox 15"/>
+          <p:cNvSpPr txBox="1"/>
+          <p:nvPr/>
+        </p:nvSpPr>
+        <p:spPr>
+          <a:xfrm>
+            <a:off x="118712" y="4122018"/>
+            <a:ext cx="2926080" cy="307777"/>
+          </a:xfrm>
+          <a:prstGeom prst="rect">
+            <a:avLst/>
+          </a:prstGeom>
+          <a:noFill/>
+        </p:spPr>
+        <p:txBody>
+          <a:bodyPr wrap="square" lIns="45720" rIns="45720">
+            <a:spAutoFit/>
+          </a:bodyPr>
+          <a:lstStyle/>
+          <a:p>
+            <a:pPr algn="ctr"/>
+            <a:r>
+              <a:rPr sz="1400" b="1" i="0">
+                <a:solidFill>
+                  <a:srgbClr val="FFFFFF"/>
+                </a:solidFill>
+                <a:latin typeface="Times New Roman" panose="02020603050405020304" pitchFamily="18" charset="0"/>
+                <a:cs typeface="Times New Roman" panose="02020603050405020304" pitchFamily="18" charset="0"/>
+              </a:rPr>
+              <a:t>P4  ACCESSIBILITY</a:t>
+            </a:r>
+          </a:p>
+        </p:txBody>
+      </p:sp>
+      <p:sp>
+        <p:nvSpPr>
+          <p:cNvPr id="17" name="TextBox 16"/>
+          <p:cNvSpPr txBox="1"/>
+          <p:nvPr/>
+        </p:nvSpPr>
+        <p:spPr>
+          <a:xfrm>
+            <a:off x="210152" y="4487778"/>
+            <a:ext cx="2743200" cy="1384995"/>
+          </a:xfrm>
+          <a:prstGeom prst="rect">
+            <a:avLst/>
+          </a:prstGeom>
+          <a:noFill/>
+        </p:spPr>
+        <p:txBody>
+          <a:bodyPr wrap="square" lIns="45720" rIns="45720">
+            <a:spAutoFit/>
+          </a:bodyPr>
+          <a:lstStyle/>
+          <a:p>
+            <a:pPr marL="182880" algn="l"/>
+            <a:r>
+              <a:rPr sz="1400" dirty="0">
+                <a:solidFill>
+                  <a:srgbClr val="1E1E1E"/>
+                </a:solidFill>
+                <a:latin typeface="Times New Roman" panose="02020603050405020304" pitchFamily="18" charset="0"/>
+                <a:cs typeface="Times New Roman" panose="02020603050405020304" pitchFamily="18" charset="0"/>
+              </a:rPr>
+              <a:t>HCI principles, inclusive design,
+and barrier removal</a:t>
+            </a:r>
+          </a:p>
+          <a:p>
+            <a:pPr algn="l"/>
+            <a:r>
+              <a:rPr sz="1400" b="0" dirty="0">
+                <a:solidFill>
+                  <a:srgbClr val="1E1E1E"/>
+                </a:solidFill>
+                <a:latin typeface="Times New Roman" panose="02020603050405020304" pitchFamily="18" charset="0"/>
+                <a:cs typeface="Times New Roman" panose="02020603050405020304" pitchFamily="18" charset="0"/>
+              </a:rPr>
+              <a:t>• WCAG 2.1 Level AA compliance</a:t>
+            </a:r>
+          </a:p>
+          <a:p>
+            <a:pPr algn="l"/>
+            <a:r>
+              <a:rPr sz="1400" b="0" dirty="0">
+                <a:solidFill>
+                  <a:srgbClr val="1E1E1E"/>
+                </a:solidFill>
+                <a:latin typeface="Times New Roman" panose="02020603050405020304" pitchFamily="18" charset="0"/>
+                <a:cs typeface="Times New Roman" panose="02020603050405020304" pitchFamily="18" charset="0"/>
+              </a:rPr>
+              <a:t>• AAD, PTD, CID, UAC principles</a:t>
+            </a:r>
+          </a:p>
+          <a:p>
+            <a:pPr algn="l"/>
+            <a:r>
+              <a:rPr sz="1400" b="0" dirty="0">
+                <a:solidFill>
+                  <a:srgbClr val="1E1E1E"/>
+                </a:solidFill>
+                <a:latin typeface="Times New Roman" panose="02020603050405020304" pitchFamily="18" charset="0"/>
+                <a:cs typeface="Times New Roman" panose="02020603050405020304" pitchFamily="18" charset="0"/>
+              </a:rPr>
+              <a:t>• Guardian-delegated authentication</a:t>
+            </a:r>
+          </a:p>
+          <a:p>
+            <a:pPr algn="l"/>
+            <a:r>
+              <a:rPr sz="1400" b="0" dirty="0">
+                <a:solidFill>
+                  <a:srgbClr val="1E1E1E"/>
+                </a:solidFill>
+                <a:latin typeface="Times New Roman" panose="02020603050405020304" pitchFamily="18" charset="0"/>
+                <a:cs typeface="Times New Roman" panose="02020603050405020304" pitchFamily="18" charset="0"/>
+              </a:rPr>
+              <a:t>• Adjustable session management</a:t>
+            </a:r>
+          </a:p>
+        </p:txBody>
+      </p:sp>
+      <p:sp>
+        <p:nvSpPr>
+          <p:cNvPr id="18" name="Rounded Rectangle 17"/>
+          <p:cNvSpPr/>
+          <p:nvPr/>
+        </p:nvSpPr>
+        <p:spPr>
+          <a:xfrm>
+            <a:off x="3626448" y="182880"/>
+            <a:ext cx="5029200" cy="914400"/>
+          </a:xfrm>
+          <a:prstGeom prst="roundRect">
+            <a:avLst/>
+          </a:prstGeom>
+          <a:solidFill>
+            <a:srgbClr val="FFFFFF"/>
+          </a:solidFill>
+          <a:ln w="19050">
+            <a:solidFill>
+              <a:srgbClr val="D86B00"/>
+            </a:solidFill>
+          </a:ln>
+        </p:spPr>
+        <p:style>
+          <a:lnRef idx="1">
+            <a:schemeClr val="accent1"/>
+          </a:lnRef>
+          <a:fillRef idx="3">
+            <a:schemeClr val="accent1"/>
+          </a:fillRef>
+          <a:effectRef idx="2">
+            <a:schemeClr val="accent1"/>
+          </a:effectRef>
+          <a:fontRef idx="minor">
+            <a:schemeClr val="lt1"/>
+          </a:fontRef>
+        </p:style>
+        <p:txBody>
+          <a:bodyPr rtlCol="0" anchor="ctr"/>
+          <a:lstStyle/>
+          <a:p>
+            <a:pPr algn="ctr"/>
+            <a:endParaRPr sz="1400">
+              <a:latin typeface="Times New Roman" panose="02020603050405020304" pitchFamily="18" charset="0"/>
+              <a:cs typeface="Times New Roman" panose="02020603050405020304" pitchFamily="18" charset="0"/>
+            </a:endParaRPr>
+          </a:p>
+        </p:txBody>
+      </p:sp>
+      <p:sp>
+        <p:nvSpPr>
+          <p:cNvPr id="19" name="TextBox 18"/>
+          <p:cNvSpPr txBox="1"/>
+          <p:nvPr/>
+        </p:nvSpPr>
+        <p:spPr>
+          <a:xfrm>
+            <a:off x="3657600" y="274320"/>
+            <a:ext cx="4846320" cy="523220"/>
+          </a:xfrm>
+          <a:prstGeom prst="rect">
+            <a:avLst/>
+          </a:prstGeom>
+          <a:noFill/>
+        </p:spPr>
+        <p:txBody>
+          <a:bodyPr wrap="square" lIns="45720" rIns="45720">
+            <a:spAutoFit/>
+          </a:bodyPr>
+          <a:lstStyle/>
+          <a:p>
+            <a:pPr algn="ctr"/>
+            <a:r>
+              <a:rPr sz="1400" b="1" i="0" dirty="0">
+                <a:solidFill>
+                  <a:srgbClr val="D86B00"/>
+                </a:solidFill>
+                <a:latin typeface="Times New Roman" panose="02020603050405020304" pitchFamily="18" charset="0"/>
+                <a:cs typeface="Times New Roman" panose="02020603050405020304" pitchFamily="18" charset="0"/>
+              </a:rPr>
+              <a:t>Healthcare  ×  Blockchain</a:t>
+            </a:r>
+          </a:p>
+          <a:p>
+            <a:pPr algn="ctr"/>
+            <a:r>
+              <a:rPr sz="1400" b="0" i="0" dirty="0">
+                <a:solidFill>
+                  <a:srgbClr val="1E1E1E"/>
+                </a:solidFill>
+                <a:latin typeface="Times New Roman" panose="02020603050405020304" pitchFamily="18" charset="0"/>
+                <a:cs typeface="Times New Roman" panose="02020603050405020304" pitchFamily="18" charset="0"/>
+              </a:rPr>
+              <a:t>PBFT consensus supports smart-contract consent automation</a:t>
+            </a:r>
+          </a:p>
+        </p:txBody>
+      </p:sp>
+      <p:sp>
+        <p:nvSpPr>
+          <p:cNvPr id="20" name="Rounded Rectangle 19"/>
+          <p:cNvSpPr/>
+          <p:nvPr/>
+        </p:nvSpPr>
+        <p:spPr>
+          <a:xfrm>
+            <a:off x="118712" y="2420754"/>
+            <a:ext cx="2926080" cy="1188720"/>
+          </a:xfrm>
+          <a:prstGeom prst="roundRect">
+            <a:avLst/>
+          </a:prstGeom>
+          <a:solidFill>
+            <a:srgbClr val="FFFFFF"/>
+          </a:solidFill>
+          <a:ln w="19050">
+            <a:solidFill>
+              <a:srgbClr val="D86B00"/>
+            </a:solidFill>
+          </a:ln>
+        </p:spPr>
+        <p:style>
+          <a:lnRef idx="1">
+            <a:schemeClr val="accent1"/>
+          </a:lnRef>
+          <a:fillRef idx="3">
+            <a:schemeClr val="accent1"/>
+          </a:fillRef>
+          <a:effectRef idx="2">
+            <a:schemeClr val="accent1"/>
+          </a:effectRef>
+          <a:fontRef idx="minor">
+            <a:schemeClr val="lt1"/>
+          </a:fontRef>
+        </p:style>
+        <p:txBody>
+          <a:bodyPr rtlCol="0" anchor="ctr"/>
+          <a:lstStyle/>
+          <a:p>
+            <a:pPr algn="ctr"/>
+            <a:endParaRPr sz="1400">
+              <a:latin typeface="Times New Roman" panose="02020603050405020304" pitchFamily="18" charset="0"/>
+              <a:cs typeface="Times New Roman" panose="02020603050405020304" pitchFamily="18" charset="0"/>
+            </a:endParaRPr>
+          </a:p>
+        </p:txBody>
+      </p:sp>
+      <p:sp>
+        <p:nvSpPr>
+          <p:cNvPr id="21" name="TextBox 20"/>
+          <p:cNvSpPr txBox="1"/>
+          <p:nvPr/>
+        </p:nvSpPr>
+        <p:spPr>
+          <a:xfrm>
+            <a:off x="210152" y="2640530"/>
+            <a:ext cx="2743200" cy="738664"/>
+          </a:xfrm>
+          <a:prstGeom prst="rect">
+            <a:avLst/>
+          </a:prstGeom>
+          <a:noFill/>
+        </p:spPr>
+        <p:txBody>
+          <a:bodyPr wrap="square" lIns="45720" rIns="45720">
+            <a:spAutoFit/>
+          </a:bodyPr>
+          <a:lstStyle/>
+          <a:p>
+            <a:pPr algn="ctr"/>
+            <a:r>
+              <a:rPr sz="1400" b="1" i="0" dirty="0">
+                <a:solidFill>
+                  <a:srgbClr val="D86B00"/>
+                </a:solidFill>
+                <a:latin typeface="Times New Roman" panose="02020603050405020304" pitchFamily="18" charset="0"/>
+                <a:cs typeface="Times New Roman" panose="02020603050405020304" pitchFamily="18" charset="0"/>
+              </a:rPr>
+              <a:t>Healthcare  ×  Accessibility</a:t>
+            </a:r>
+          </a:p>
+          <a:p>
+            <a:pPr algn="ctr"/>
+            <a:r>
+              <a:rPr sz="1400" b="0" i="0" dirty="0">
+                <a:solidFill>
+                  <a:srgbClr val="1E1E1E"/>
+                </a:solidFill>
+                <a:latin typeface="Times New Roman" panose="02020603050405020304" pitchFamily="18" charset="0"/>
+                <a:cs typeface="Times New Roman" panose="02020603050405020304" pitchFamily="18" charset="0"/>
+              </a:rPr>
+              <a:t>Guardian-delegated authentication
+and accessible consent flows</a:t>
+            </a:r>
+          </a:p>
+        </p:txBody>
+      </p:sp>
+      <p:sp>
+        <p:nvSpPr>
+          <p:cNvPr id="22" name="Rounded Rectangle 21"/>
+          <p:cNvSpPr/>
+          <p:nvPr/>
+        </p:nvSpPr>
+        <p:spPr>
+          <a:xfrm>
+            <a:off x="9073414" y="2613258"/>
+            <a:ext cx="2985436" cy="1188720"/>
+          </a:xfrm>
+          <a:prstGeom prst="roundRect">
+            <a:avLst/>
+          </a:prstGeom>
+          <a:solidFill>
+            <a:srgbClr val="FFFFFF"/>
+          </a:solidFill>
+          <a:ln w="19050">
+            <a:solidFill>
+              <a:srgbClr val="D86B00"/>
+            </a:solidFill>
+          </a:ln>
+        </p:spPr>
+        <p:style>
+          <a:lnRef idx="1">
+            <a:schemeClr val="accent1"/>
+          </a:lnRef>
+          <a:fillRef idx="3">
+            <a:schemeClr val="accent1"/>
+          </a:fillRef>
+          <a:effectRef idx="2">
+            <a:schemeClr val="accent1"/>
+          </a:effectRef>
+          <a:fontRef idx="minor">
+            <a:schemeClr val="lt1"/>
+          </a:fontRef>
+        </p:style>
+        <p:txBody>
+          <a:bodyPr rtlCol="0" anchor="ctr"/>
+          <a:lstStyle/>
+          <a:p>
+            <a:pPr algn="ctr"/>
+            <a:endParaRPr sz="1400">
+              <a:latin typeface="Times New Roman" panose="02020603050405020304" pitchFamily="18" charset="0"/>
+              <a:cs typeface="Times New Roman" panose="02020603050405020304" pitchFamily="18" charset="0"/>
+            </a:endParaRPr>
+          </a:p>
+        </p:txBody>
+      </p:sp>
+      <p:sp>
+        <p:nvSpPr>
+          <p:cNvPr id="23" name="TextBox 22"/>
+          <p:cNvSpPr txBox="1"/>
+          <p:nvPr/>
+        </p:nvSpPr>
+        <p:spPr>
+          <a:xfrm>
+            <a:off x="9224210" y="2704698"/>
+            <a:ext cx="2743200" cy="954107"/>
+          </a:xfrm>
+          <a:prstGeom prst="rect">
+            <a:avLst/>
+          </a:prstGeom>
+          <a:noFill/>
+        </p:spPr>
+        <p:txBody>
+          <a:bodyPr wrap="square" lIns="45720" rIns="45720">
+            <a:spAutoFit/>
+          </a:bodyPr>
+          <a:lstStyle/>
+          <a:p>
+            <a:pPr algn="ctr"/>
+            <a:r>
+              <a:rPr sz="1400" b="1" i="0" dirty="0">
+                <a:solidFill>
+                  <a:srgbClr val="D86B00"/>
+                </a:solidFill>
+                <a:latin typeface="Times New Roman" panose="02020603050405020304" pitchFamily="18" charset="0"/>
+                <a:cs typeface="Times New Roman" panose="02020603050405020304" pitchFamily="18" charset="0"/>
+              </a:rPr>
+              <a:t>Blockchain  ×  Governance</a:t>
+            </a:r>
+          </a:p>
+          <a:p>
+            <a:pPr algn="ctr"/>
+            <a:r>
+              <a:rPr lang="en-US" sz="1400" dirty="0">
+                <a:solidFill>
+                  <a:srgbClr val="111827"/>
+                </a:solidFill>
+                <a:latin typeface="Times New Roman" panose="02020603050405020304" pitchFamily="18" charset="0"/>
+                <a:ea typeface="Times New Roman Bold"/>
+                <a:cs typeface="Times New Roman" panose="02020603050405020304" pitchFamily="18" charset="0"/>
+                <a:sym typeface="Times New Roman Bold"/>
+              </a:rPr>
+              <a:t>GDPR-compliant erasure workaround using encrypted off-chain storage and pointers</a:t>
+            </a:r>
+          </a:p>
+        </p:txBody>
+      </p:sp>
+      <p:sp>
+        <p:nvSpPr>
+          <p:cNvPr id="24" name="Rounded Rectangle 23"/>
+          <p:cNvSpPr/>
+          <p:nvPr/>
+        </p:nvSpPr>
+        <p:spPr>
+          <a:xfrm>
+            <a:off x="3566160" y="4263960"/>
+            <a:ext cx="5029200" cy="776978"/>
+          </a:xfrm>
+          <a:prstGeom prst="roundRect">
+            <a:avLst/>
+          </a:prstGeom>
+          <a:solidFill>
+            <a:srgbClr val="FFFFFF"/>
+          </a:solidFill>
+          <a:ln w="19050">
+            <a:solidFill>
+              <a:srgbClr val="D86B00"/>
+            </a:solidFill>
+          </a:ln>
+        </p:spPr>
+        <p:style>
+          <a:lnRef idx="1">
+            <a:schemeClr val="accent1"/>
+          </a:lnRef>
+          <a:fillRef idx="3">
+            <a:schemeClr val="accent1"/>
+          </a:fillRef>
+          <a:effectRef idx="2">
+            <a:schemeClr val="accent1"/>
+          </a:effectRef>
+          <a:fontRef idx="minor">
+            <a:schemeClr val="lt1"/>
+          </a:fontRef>
+        </p:style>
+        <p:txBody>
+          <a:bodyPr rtlCol="0" anchor="ctr"/>
+          <a:lstStyle/>
+          <a:p>
+            <a:pPr algn="ctr"/>
+            <a:endParaRPr sz="1400">
+              <a:latin typeface="Times New Roman" panose="02020603050405020304" pitchFamily="18" charset="0"/>
+              <a:cs typeface="Times New Roman" panose="02020603050405020304" pitchFamily="18" charset="0"/>
+            </a:endParaRPr>
+          </a:p>
+        </p:txBody>
+      </p:sp>
+      <p:sp>
+        <p:nvSpPr>
+          <p:cNvPr id="25" name="TextBox 24"/>
+          <p:cNvSpPr txBox="1"/>
+          <p:nvPr/>
+        </p:nvSpPr>
+        <p:spPr>
+          <a:xfrm>
+            <a:off x="3672840" y="4371044"/>
+            <a:ext cx="4846320" cy="523220"/>
+          </a:xfrm>
+          <a:prstGeom prst="rect">
+            <a:avLst/>
+          </a:prstGeom>
+          <a:noFill/>
+        </p:spPr>
+        <p:txBody>
+          <a:bodyPr wrap="square" lIns="45720" rIns="45720">
+            <a:spAutoFit/>
+          </a:bodyPr>
+          <a:lstStyle/>
+          <a:p>
+            <a:pPr algn="ctr"/>
+            <a:r>
+              <a:rPr sz="1400" b="1" i="0" dirty="0">
+                <a:solidFill>
+                  <a:srgbClr val="D86B00"/>
+                </a:solidFill>
+                <a:latin typeface="Times New Roman" panose="02020603050405020304" pitchFamily="18" charset="0"/>
+                <a:cs typeface="Times New Roman" panose="02020603050405020304" pitchFamily="18" charset="0"/>
+              </a:rPr>
+              <a:t>Accessibility  ×  Governance</a:t>
+            </a:r>
+          </a:p>
+          <a:p>
+            <a:pPr algn="ctr"/>
+            <a:r>
+              <a:rPr sz="1400" b="0" i="0" dirty="0">
+                <a:solidFill>
+                  <a:srgbClr val="1E1E1E"/>
+                </a:solidFill>
+                <a:latin typeface="Times New Roman" panose="02020603050405020304" pitchFamily="18" charset="0"/>
+                <a:cs typeface="Times New Roman" panose="02020603050405020304" pitchFamily="18" charset="0"/>
+              </a:rPr>
+              <a:t>WCAG 2.1 as legal mandate and accessibility law alignment</a:t>
+            </a:r>
+          </a:p>
+        </p:txBody>
+      </p:sp>
+      <p:sp>
+        <p:nvSpPr>
+          <p:cNvPr id="26" name="Rounded Rectangle 25"/>
+          <p:cNvSpPr/>
+          <p:nvPr/>
+        </p:nvSpPr>
+        <p:spPr>
+          <a:xfrm>
+            <a:off x="3379271" y="1287510"/>
+            <a:ext cx="5427045" cy="2709510"/>
+          </a:xfrm>
+          <a:prstGeom prst="roundRect">
+            <a:avLst/>
+          </a:prstGeom>
+          <a:solidFill>
+            <a:srgbClr val="FFFFFF"/>
+          </a:solidFill>
+          <a:ln w="25400">
+            <a:solidFill>
+              <a:srgbClr val="004B9E"/>
+            </a:solidFill>
+          </a:ln>
+        </p:spPr>
+        <p:style>
+          <a:lnRef idx="1">
+            <a:schemeClr val="accent1"/>
+          </a:lnRef>
+          <a:fillRef idx="3">
+            <a:schemeClr val="accent1"/>
+          </a:fillRef>
+          <a:effectRef idx="2">
+            <a:schemeClr val="accent1"/>
+          </a:effectRef>
+          <a:fontRef idx="minor">
+            <a:schemeClr val="lt1"/>
+          </a:fontRef>
+        </p:style>
+        <p:txBody>
+          <a:bodyPr rtlCol="0" anchor="ctr"/>
+          <a:lstStyle/>
+          <a:p>
+            <a:pPr algn="ctr"/>
+            <a:endParaRPr sz="1400">
+              <a:latin typeface="Times New Roman" panose="02020603050405020304" pitchFamily="18" charset="0"/>
+              <a:cs typeface="Times New Roman" panose="02020603050405020304" pitchFamily="18" charset="0"/>
+            </a:endParaRPr>
+          </a:p>
+        </p:txBody>
+      </p:sp>
+      <p:sp>
+        <p:nvSpPr>
+          <p:cNvPr id="27" name="Rectangle 26"/>
+          <p:cNvSpPr/>
+          <p:nvPr/>
+        </p:nvSpPr>
+        <p:spPr>
+          <a:xfrm>
+            <a:off x="3371246" y="1288943"/>
+            <a:ext cx="5441484" cy="457200"/>
+          </a:xfrm>
+          <a:prstGeom prst="rect">
+            <a:avLst/>
+          </a:prstGeom>
+          <a:solidFill>
+            <a:srgbClr val="004B9E"/>
+          </a:solidFill>
+          <a:ln>
+            <a:noFill/>
+          </a:ln>
+        </p:spPr>
+        <p:style>
+          <a:lnRef idx="1">
+            <a:schemeClr val="accent1"/>
+          </a:lnRef>
+          <a:fillRef idx="3">
+            <a:schemeClr val="accent1"/>
+          </a:fillRef>
+          <a:effectRef idx="2">
+            <a:schemeClr val="accent1"/>
+          </a:effectRef>
+          <a:fontRef idx="minor">
+            <a:schemeClr val="lt1"/>
+          </a:fontRef>
+        </p:style>
+        <p:txBody>
+          <a:bodyPr rtlCol="0" anchor="ctr"/>
+          <a:lstStyle/>
+          <a:p>
+            <a:pPr algn="ctr"/>
+            <a:endParaRPr sz="1400">
+              <a:latin typeface="Times New Roman" panose="02020603050405020304" pitchFamily="18" charset="0"/>
+              <a:cs typeface="Times New Roman" panose="02020603050405020304" pitchFamily="18" charset="0"/>
+            </a:endParaRPr>
+          </a:p>
+        </p:txBody>
+      </p:sp>
+      <p:sp>
+        <p:nvSpPr>
+          <p:cNvPr id="28" name="TextBox 27"/>
+          <p:cNvSpPr txBox="1"/>
+          <p:nvPr/>
+        </p:nvSpPr>
+        <p:spPr>
+          <a:xfrm>
+            <a:off x="3474720" y="1281018"/>
+            <a:ext cx="5338010" cy="307777"/>
+          </a:xfrm>
+          <a:prstGeom prst="rect">
+            <a:avLst/>
+          </a:prstGeom>
+          <a:noFill/>
+        </p:spPr>
+        <p:txBody>
+          <a:bodyPr wrap="square" lIns="45720" rIns="45720">
+            <a:spAutoFit/>
+          </a:bodyPr>
+          <a:lstStyle/>
+          <a:p>
+            <a:pPr algn="ctr"/>
+            <a:r>
+              <a:rPr sz="1400" b="1" i="0" dirty="0">
+                <a:solidFill>
+                  <a:srgbClr val="FFFFFF"/>
+                </a:solidFill>
+                <a:latin typeface="Times New Roman" panose="02020603050405020304" pitchFamily="18" charset="0"/>
+                <a:cs typeface="Times New Roman" panose="02020603050405020304" pitchFamily="18" charset="0"/>
+              </a:rPr>
+              <a:t>BCHAIN-ACCESS FRAMEWORK</a:t>
+            </a:r>
+          </a:p>
+        </p:txBody>
+      </p:sp>
+      <p:sp>
+        <p:nvSpPr>
+          <p:cNvPr id="29" name="TextBox 28"/>
+          <p:cNvSpPr txBox="1"/>
+          <p:nvPr/>
+        </p:nvSpPr>
+        <p:spPr>
+          <a:xfrm>
+            <a:off x="3474720" y="1884276"/>
+            <a:ext cx="1303020" cy="1323439"/>
+          </a:xfrm>
+          <a:prstGeom prst="rect">
+            <a:avLst/>
+          </a:prstGeom>
+          <a:noFill/>
+        </p:spPr>
+        <p:txBody>
+          <a:bodyPr wrap="square" lIns="45720" rIns="45720">
+            <a:spAutoFit/>
+          </a:bodyPr>
+          <a:lstStyle/>
+          <a:p>
+            <a:pPr algn="ctr"/>
+            <a:r>
+              <a:rPr sz="1400" b="1" i="0" dirty="0">
+                <a:solidFill>
+                  <a:srgbClr val="004B9E"/>
+                </a:solidFill>
+                <a:latin typeface="Times New Roman" panose="02020603050405020304" pitchFamily="18" charset="0"/>
+                <a:cs typeface="Times New Roman" panose="02020603050405020304" pitchFamily="18" charset="0"/>
+              </a:rPr>
+              <a:t>AAD</a:t>
+            </a:r>
+          </a:p>
+          <a:p>
+            <a:pPr algn="ctr"/>
+            <a:r>
+              <a:rPr sz="1200" b="1" i="0" dirty="0">
+                <a:solidFill>
+                  <a:srgbClr val="1E1E1E"/>
+                </a:solidFill>
+                <a:latin typeface="Times New Roman" panose="02020603050405020304" pitchFamily="18" charset="0"/>
+                <a:cs typeface="Times New Roman" panose="02020603050405020304" pitchFamily="18" charset="0"/>
+              </a:rPr>
+              <a:t>Abstracted
+Authentication</a:t>
+            </a:r>
+          </a:p>
+          <a:p>
+            <a:pPr algn="ctr"/>
+            <a:r>
+              <a:rPr sz="1400" b="0" i="0" dirty="0">
+                <a:solidFill>
+                  <a:srgbClr val="1E1E1E"/>
+                </a:solidFill>
+                <a:latin typeface="Times New Roman" panose="02020603050405020304" pitchFamily="18" charset="0"/>
+                <a:cs typeface="Times New Roman" panose="02020603050405020304" pitchFamily="18" charset="0"/>
+              </a:rPr>
+              <a:t>
+Simplify
+secure login</a:t>
+            </a:r>
+          </a:p>
+        </p:txBody>
+      </p:sp>
+      <p:sp>
+        <p:nvSpPr>
+          <p:cNvPr id="31" name="TextBox 30"/>
+          <p:cNvSpPr txBox="1"/>
+          <p:nvPr/>
+        </p:nvSpPr>
+        <p:spPr>
+          <a:xfrm>
+            <a:off x="4777740" y="1884276"/>
+            <a:ext cx="1303020" cy="1323439"/>
+          </a:xfrm>
+          <a:prstGeom prst="rect">
+            <a:avLst/>
+          </a:prstGeom>
+          <a:noFill/>
+        </p:spPr>
+        <p:txBody>
+          <a:bodyPr wrap="square" lIns="45720" rIns="45720">
+            <a:spAutoFit/>
+          </a:bodyPr>
+          <a:lstStyle/>
+          <a:p>
+            <a:pPr algn="ctr"/>
+            <a:r>
+              <a:rPr sz="1400" b="1" i="0" dirty="0">
+                <a:solidFill>
+                  <a:srgbClr val="004B9E"/>
+                </a:solidFill>
+                <a:latin typeface="Times New Roman" panose="02020603050405020304" pitchFamily="18" charset="0"/>
+                <a:cs typeface="Times New Roman" panose="02020603050405020304" pitchFamily="18" charset="0"/>
+              </a:rPr>
+              <a:t>PTD</a:t>
+            </a:r>
+          </a:p>
+          <a:p>
+            <a:pPr algn="ctr"/>
+            <a:r>
+              <a:rPr sz="1200" b="1" i="0" dirty="0">
+                <a:solidFill>
+                  <a:srgbClr val="1E1E1E"/>
+                </a:solidFill>
+                <a:latin typeface="Times New Roman" panose="02020603050405020304" pitchFamily="18" charset="0"/>
+                <a:cs typeface="Times New Roman" panose="02020603050405020304" pitchFamily="18" charset="0"/>
+              </a:rPr>
+              <a:t>Progressive
+Transparency</a:t>
+            </a:r>
+          </a:p>
+          <a:p>
+            <a:pPr algn="ctr"/>
+            <a:r>
+              <a:rPr sz="1400" b="0" i="0" dirty="0">
+                <a:solidFill>
+                  <a:srgbClr val="1E1E1E"/>
+                </a:solidFill>
+                <a:latin typeface="Times New Roman" panose="02020603050405020304" pitchFamily="18" charset="0"/>
+                <a:cs typeface="Times New Roman" panose="02020603050405020304" pitchFamily="18" charset="0"/>
+              </a:rPr>
+              <a:t>
+Present info
+progressively</a:t>
+            </a:r>
+          </a:p>
+        </p:txBody>
+      </p:sp>
+      <p:sp>
+        <p:nvSpPr>
+          <p:cNvPr id="33" name="TextBox 32"/>
+          <p:cNvSpPr txBox="1"/>
+          <p:nvPr/>
+        </p:nvSpPr>
+        <p:spPr>
+          <a:xfrm>
+            <a:off x="6080760" y="1884276"/>
+            <a:ext cx="1303020" cy="1323439"/>
+          </a:xfrm>
+          <a:prstGeom prst="rect">
+            <a:avLst/>
+          </a:prstGeom>
+          <a:noFill/>
+        </p:spPr>
+        <p:txBody>
+          <a:bodyPr wrap="square" lIns="45720" rIns="45720">
+            <a:spAutoFit/>
+          </a:bodyPr>
+          <a:lstStyle/>
+          <a:p>
+            <a:pPr algn="ctr"/>
+            <a:r>
+              <a:rPr sz="1400" b="1" i="0" dirty="0">
+                <a:solidFill>
+                  <a:srgbClr val="004B9E"/>
+                </a:solidFill>
+                <a:latin typeface="Times New Roman" panose="02020603050405020304" pitchFamily="18" charset="0"/>
+                <a:cs typeface="Times New Roman" panose="02020603050405020304" pitchFamily="18" charset="0"/>
+              </a:rPr>
+              <a:t>CID</a:t>
+            </a:r>
+          </a:p>
+          <a:p>
+            <a:pPr algn="ctr"/>
+            <a:r>
+              <a:rPr sz="1200" b="1" i="0" dirty="0">
+                <a:solidFill>
+                  <a:srgbClr val="1E1E1E"/>
+                </a:solidFill>
+                <a:latin typeface="Times New Roman" panose="02020603050405020304" pitchFamily="18" charset="0"/>
+                <a:cs typeface="Times New Roman" panose="02020603050405020304" pitchFamily="18" charset="0"/>
+              </a:rPr>
+              <a:t>Confirmatory
+Interaction</a:t>
+            </a:r>
+          </a:p>
+          <a:p>
+            <a:pPr algn="ctr"/>
+            <a:r>
+              <a:rPr sz="1400" b="0" i="0" dirty="0">
+                <a:solidFill>
+                  <a:srgbClr val="1E1E1E"/>
+                </a:solidFill>
+                <a:latin typeface="Times New Roman" panose="02020603050405020304" pitchFamily="18" charset="0"/>
+                <a:cs typeface="Times New Roman" panose="02020603050405020304" pitchFamily="18" charset="0"/>
+              </a:rPr>
+              <a:t>
+Prevent errors
+via confirm.</a:t>
+            </a:r>
+          </a:p>
+        </p:txBody>
+      </p:sp>
+      <p:sp>
+        <p:nvSpPr>
+          <p:cNvPr id="35" name="TextBox 34"/>
+          <p:cNvSpPr txBox="1"/>
+          <p:nvPr/>
+        </p:nvSpPr>
+        <p:spPr>
+          <a:xfrm>
+            <a:off x="7383780" y="1884276"/>
+            <a:ext cx="1303020" cy="1323439"/>
+          </a:xfrm>
+          <a:prstGeom prst="rect">
+            <a:avLst/>
+          </a:prstGeom>
+          <a:noFill/>
+        </p:spPr>
+        <p:txBody>
+          <a:bodyPr wrap="square" lIns="45720" rIns="45720">
+            <a:spAutoFit/>
+          </a:bodyPr>
+          <a:lstStyle/>
+          <a:p>
+            <a:pPr algn="ctr"/>
+            <a:r>
+              <a:rPr sz="1400" b="1" i="0" dirty="0">
+                <a:solidFill>
+                  <a:srgbClr val="004B9E"/>
+                </a:solidFill>
+                <a:latin typeface="Times New Roman" panose="02020603050405020304" pitchFamily="18" charset="0"/>
+                <a:cs typeface="Times New Roman" panose="02020603050405020304" pitchFamily="18" charset="0"/>
+              </a:rPr>
+              <a:t>UAC</a:t>
+            </a:r>
+          </a:p>
+          <a:p>
+            <a:pPr algn="ctr"/>
+            <a:r>
+              <a:rPr sz="1200" b="1" i="0" dirty="0">
+                <a:solidFill>
+                  <a:srgbClr val="1E1E1E"/>
+                </a:solidFill>
+                <a:latin typeface="Times New Roman" panose="02020603050405020304" pitchFamily="18" charset="0"/>
+                <a:cs typeface="Times New Roman" panose="02020603050405020304" pitchFamily="18" charset="0"/>
+              </a:rPr>
+              <a:t>Universal
+Assistive</a:t>
+            </a:r>
+          </a:p>
+          <a:p>
+            <a:pPr algn="ctr"/>
+            <a:r>
+              <a:rPr sz="1400" b="0" i="0" dirty="0">
+                <a:solidFill>
+                  <a:srgbClr val="1E1E1E"/>
+                </a:solidFill>
+                <a:latin typeface="Times New Roman" panose="02020603050405020304" pitchFamily="18" charset="0"/>
+                <a:cs typeface="Times New Roman" panose="02020603050405020304" pitchFamily="18" charset="0"/>
+              </a:rPr>
+              <a:t>
+Usable for
+all (</a:t>
+            </a:r>
+            <a:r>
+              <a:rPr sz="1400" b="0" i="0" dirty="0" err="1">
+                <a:solidFill>
+                  <a:srgbClr val="1E1E1E"/>
+                </a:solidFill>
+                <a:latin typeface="Times New Roman" panose="02020603050405020304" pitchFamily="18" charset="0"/>
+                <a:cs typeface="Times New Roman" panose="02020603050405020304" pitchFamily="18" charset="0"/>
+              </a:rPr>
+              <a:t>PwDs</a:t>
+            </a:r>
+            <a:r>
+              <a:rPr sz="1400" b="0" i="0" dirty="0">
+                <a:solidFill>
+                  <a:srgbClr val="1E1E1E"/>
+                </a:solidFill>
+                <a:latin typeface="Times New Roman" panose="02020603050405020304" pitchFamily="18" charset="0"/>
+                <a:cs typeface="Times New Roman" panose="02020603050405020304" pitchFamily="18" charset="0"/>
+              </a:rPr>
+              <a:t>)</a:t>
+            </a:r>
+          </a:p>
+        </p:txBody>
+      </p:sp>
+      <p:sp>
+        <p:nvSpPr>
+          <p:cNvPr id="36" name="Rounded Rectangle 35"/>
+          <p:cNvSpPr/>
+          <p:nvPr/>
+        </p:nvSpPr>
+        <p:spPr>
+          <a:xfrm>
+            <a:off x="3468306" y="3369860"/>
+            <a:ext cx="5212080" cy="411480"/>
+          </a:xfrm>
+          <a:prstGeom prst="roundRect">
+            <a:avLst/>
+          </a:prstGeom>
+          <a:solidFill>
+            <a:srgbClr val="E3F2FD"/>
+          </a:solidFill>
+          <a:ln>
+            <a:noFill/>
+          </a:ln>
+        </p:spPr>
+        <p:style>
+          <a:lnRef idx="1">
+            <a:schemeClr val="accent1"/>
+          </a:lnRef>
+          <a:fillRef idx="3">
+            <a:schemeClr val="accent1"/>
+          </a:fillRef>
+          <a:effectRef idx="2">
+            <a:schemeClr val="accent1"/>
+          </a:effectRef>
+          <a:fontRef idx="minor">
+            <a:schemeClr val="lt1"/>
+          </a:fontRef>
+        </p:style>
+        <p:txBody>
+          <a:bodyPr rtlCol="0" anchor="ctr"/>
+          <a:lstStyle/>
+          <a:p>
+            <a:pPr algn="ctr"/>
+            <a:endParaRPr sz="1400">
+              <a:latin typeface="Times New Roman" panose="02020603050405020304" pitchFamily="18" charset="0"/>
+              <a:cs typeface="Times New Roman" panose="02020603050405020304" pitchFamily="18" charset="0"/>
+            </a:endParaRPr>
+          </a:p>
+        </p:txBody>
+      </p:sp>
+      <p:sp>
+        <p:nvSpPr>
+          <p:cNvPr id="37" name="TextBox 36"/>
+          <p:cNvSpPr txBox="1"/>
+          <p:nvPr/>
+        </p:nvSpPr>
+        <p:spPr>
+          <a:xfrm>
+            <a:off x="3474720" y="3410419"/>
+            <a:ext cx="5212080" cy="307777"/>
+          </a:xfrm>
+          <a:prstGeom prst="rect">
+            <a:avLst/>
+          </a:prstGeom>
+          <a:noFill/>
+        </p:spPr>
+        <p:txBody>
+          <a:bodyPr wrap="square" lIns="45720" rIns="45720">
+            <a:spAutoFit/>
+          </a:bodyPr>
+          <a:lstStyle/>
+          <a:p>
+            <a:pPr algn="ctr"/>
+            <a:r>
+              <a:rPr sz="1400" b="1" i="0" dirty="0">
+                <a:solidFill>
+                  <a:srgbClr val="004B9E"/>
+                </a:solidFill>
+                <a:latin typeface="Times New Roman" panose="02020603050405020304" pitchFamily="18" charset="0"/>
+                <a:cs typeface="Times New Roman" panose="02020603050405020304" pitchFamily="18" charset="0"/>
+              </a:rPr>
+              <a:t>Secure  |  Accessible  |  Compliant  |  Transparent  |  User-Centered</a:t>
+            </a:r>
+          </a:p>
+        </p:txBody>
+      </p:sp>
+      <p:sp>
+        <p:nvSpPr>
+          <p:cNvPr id="38" name="Rounded Rectangle 37"/>
+          <p:cNvSpPr/>
+          <p:nvPr/>
+        </p:nvSpPr>
+        <p:spPr>
+          <a:xfrm>
+            <a:off x="3566160" y="5223818"/>
+            <a:ext cx="5029200" cy="822960"/>
+          </a:xfrm>
+          <a:prstGeom prst="roundRect">
+            <a:avLst/>
+          </a:prstGeom>
+          <a:solidFill>
+            <a:srgbClr val="FFFFFF"/>
+          </a:solidFill>
+          <a:ln w="19050">
+            <a:solidFill>
+              <a:srgbClr val="0B6A3A"/>
+            </a:solidFill>
+          </a:ln>
+        </p:spPr>
+        <p:style>
+          <a:lnRef idx="1">
+            <a:schemeClr val="accent1"/>
+          </a:lnRef>
+          <a:fillRef idx="3">
+            <a:schemeClr val="accent1"/>
+          </a:fillRef>
+          <a:effectRef idx="2">
+            <a:schemeClr val="accent1"/>
+          </a:effectRef>
+          <a:fontRef idx="minor">
+            <a:schemeClr val="lt1"/>
+          </a:fontRef>
+        </p:style>
+        <p:txBody>
+          <a:bodyPr rtlCol="0" anchor="ctr"/>
+          <a:lstStyle/>
+          <a:p>
+            <a:pPr algn="ctr"/>
+            <a:endParaRPr sz="1400">
+              <a:latin typeface="Times New Roman" panose="02020603050405020304" pitchFamily="18" charset="0"/>
+              <a:cs typeface="Times New Roman" panose="02020603050405020304" pitchFamily="18" charset="0"/>
+            </a:endParaRPr>
+          </a:p>
+        </p:txBody>
+      </p:sp>
+      <p:sp>
+        <p:nvSpPr>
+          <p:cNvPr id="39" name="TextBox 38"/>
+          <p:cNvSpPr txBox="1"/>
+          <p:nvPr/>
+        </p:nvSpPr>
+        <p:spPr>
+          <a:xfrm>
+            <a:off x="3657600" y="5315258"/>
+            <a:ext cx="4846320" cy="738664"/>
+          </a:xfrm>
+          <a:prstGeom prst="rect">
+            <a:avLst/>
+          </a:prstGeom>
+          <a:noFill/>
+        </p:spPr>
+        <p:txBody>
+          <a:bodyPr wrap="square" lIns="45720" rIns="45720">
+            <a:spAutoFit/>
+          </a:bodyPr>
+          <a:lstStyle/>
+          <a:p>
+            <a:pPr algn="ctr"/>
+            <a:r>
+              <a:rPr sz="1400" b="1" i="0" dirty="0">
+                <a:solidFill>
+                  <a:srgbClr val="0B6A3A"/>
+                </a:solidFill>
+                <a:latin typeface="Times New Roman" panose="02020603050405020304" pitchFamily="18" charset="0"/>
+                <a:cs typeface="Times New Roman" panose="02020603050405020304" pitchFamily="18" charset="0"/>
+              </a:rPr>
+              <a:t>ACCESSIBILITY FOUNDATION</a:t>
+            </a:r>
+          </a:p>
+          <a:p>
+            <a:pPr algn="ctr"/>
+            <a:r>
+              <a:rPr sz="1400" b="1" i="0" dirty="0">
+                <a:solidFill>
+                  <a:srgbClr val="1E1E1E"/>
+                </a:solidFill>
+                <a:latin typeface="Times New Roman" panose="02020603050405020304" pitchFamily="18" charset="0"/>
+                <a:cs typeface="Times New Roman" panose="02020603050405020304" pitchFamily="18" charset="0"/>
+              </a:rPr>
+              <a:t>WCAG 2.1 Level AA  •  Nielsen's Heuristics</a:t>
+            </a:r>
+          </a:p>
+          <a:p>
+            <a:pPr algn="ctr"/>
+            <a:r>
+              <a:rPr sz="1400" b="0" i="0" dirty="0">
+                <a:solidFill>
+                  <a:srgbClr val="1E1E1E"/>
+                </a:solidFill>
+                <a:latin typeface="Times New Roman" panose="02020603050405020304" pitchFamily="18" charset="0"/>
+                <a:cs typeface="Times New Roman" panose="02020603050405020304" pitchFamily="18" charset="0"/>
+              </a:rPr>
+              <a:t>Guiding design, development, and evaluation</a:t>
+            </a:r>
+          </a:p>
+        </p:txBody>
+      </p:sp>
+      <p:sp>
+        <p:nvSpPr>
+          <p:cNvPr id="40" name="Rounded Rectangle 39"/>
+          <p:cNvSpPr/>
+          <p:nvPr/>
+        </p:nvSpPr>
+        <p:spPr>
+          <a:xfrm>
+            <a:off x="2926080" y="6229658"/>
+            <a:ext cx="6309360" cy="548640"/>
+          </a:xfrm>
+          <a:prstGeom prst="roundRect">
+            <a:avLst/>
+          </a:prstGeom>
+          <a:solidFill>
+            <a:srgbClr val="FFF3E0"/>
+          </a:solidFill>
+          <a:ln w="12700">
+            <a:solidFill>
+              <a:srgbClr val="D86B00"/>
+            </a:solidFill>
+          </a:ln>
+        </p:spPr>
+        <p:style>
+          <a:lnRef idx="1">
+            <a:schemeClr val="accent1"/>
+          </a:lnRef>
+          <a:fillRef idx="3">
+            <a:schemeClr val="accent1"/>
+          </a:fillRef>
+          <a:effectRef idx="2">
+            <a:schemeClr val="accent1"/>
+          </a:effectRef>
+          <a:fontRef idx="minor">
+            <a:schemeClr val="lt1"/>
+          </a:fontRef>
+        </p:style>
+        <p:txBody>
+          <a:bodyPr rtlCol="0" anchor="ctr"/>
+          <a:lstStyle/>
+          <a:p>
+            <a:pPr algn="ctr"/>
+            <a:endParaRPr sz="1400">
+              <a:latin typeface="Times New Roman" panose="02020603050405020304" pitchFamily="18" charset="0"/>
+              <a:cs typeface="Times New Roman" panose="02020603050405020304" pitchFamily="18" charset="0"/>
+            </a:endParaRPr>
+          </a:p>
+        </p:txBody>
+      </p:sp>
+      <p:sp>
+        <p:nvSpPr>
+          <p:cNvPr id="41" name="TextBox 40"/>
+          <p:cNvSpPr txBox="1"/>
+          <p:nvPr/>
+        </p:nvSpPr>
+        <p:spPr>
+          <a:xfrm>
+            <a:off x="3017520" y="6245234"/>
+            <a:ext cx="6126480" cy="523220"/>
+          </a:xfrm>
+          <a:prstGeom prst="rect">
+            <a:avLst/>
+          </a:prstGeom>
+          <a:noFill/>
+        </p:spPr>
+        <p:txBody>
+          <a:bodyPr wrap="square" lIns="45720" rIns="45720">
+            <a:spAutoFit/>
+          </a:bodyPr>
+          <a:lstStyle/>
+          <a:p>
+            <a:pPr algn="ctr"/>
+            <a:r>
+              <a:rPr sz="1400" b="1" i="0" dirty="0">
+                <a:solidFill>
+                  <a:srgbClr val="D86B00"/>
+                </a:solidFill>
+                <a:latin typeface="Times New Roman" panose="02020603050405020304" pitchFamily="18" charset="0"/>
+                <a:cs typeface="Times New Roman" panose="02020603050405020304" pitchFamily="18" charset="0"/>
+              </a:rPr>
+              <a:t>PRIMARY TARGET USERS: PEOPLE WITH DISABILITIES (</a:t>
+            </a:r>
+            <a:r>
+              <a:rPr sz="1400" b="1" i="0" dirty="0" err="1">
+                <a:solidFill>
+                  <a:srgbClr val="D86B00"/>
+                </a:solidFill>
+                <a:latin typeface="Times New Roman" panose="02020603050405020304" pitchFamily="18" charset="0"/>
+                <a:cs typeface="Times New Roman" panose="02020603050405020304" pitchFamily="18" charset="0"/>
+              </a:rPr>
+              <a:t>PwDs</a:t>
+            </a:r>
+            <a:r>
+              <a:rPr sz="1400" b="1" i="0" dirty="0">
+                <a:solidFill>
+                  <a:srgbClr val="D86B00"/>
+                </a:solidFill>
+                <a:latin typeface="Times New Roman" panose="02020603050405020304" pitchFamily="18" charset="0"/>
+                <a:cs typeface="Times New Roman" panose="02020603050405020304" pitchFamily="18" charset="0"/>
+              </a:rPr>
+              <a:t>)</a:t>
+            </a:r>
+          </a:p>
+          <a:p>
+            <a:pPr algn="ctr"/>
+            <a:r>
+              <a:rPr sz="1400" b="0" i="0" dirty="0">
+                <a:solidFill>
+                  <a:srgbClr val="1E1E1E"/>
+                </a:solidFill>
+                <a:latin typeface="Times New Roman" panose="02020603050405020304" pitchFamily="18" charset="0"/>
+                <a:cs typeface="Times New Roman" panose="02020603050405020304" pitchFamily="18" charset="0"/>
+              </a:rPr>
+              <a:t>Framework refined through expert evaluation</a:t>
+            </a:r>
+          </a:p>
+        </p:txBody>
+      </p:sp>
+      <p:sp>
+        <p:nvSpPr>
+          <p:cNvPr id="42" name="Right Arrow 41"/>
+          <p:cNvSpPr/>
+          <p:nvPr/>
+        </p:nvSpPr>
+        <p:spPr>
+          <a:xfrm>
+            <a:off x="3055598" y="2863285"/>
+            <a:ext cx="336082" cy="207172"/>
+          </a:xfrm>
+          <a:prstGeom prst="rightArrow">
+            <a:avLst/>
+          </a:prstGeom>
+          <a:solidFill>
+            <a:srgbClr val="1E1E1E"/>
+          </a:solidFill>
+          <a:ln>
+            <a:noFill/>
+          </a:ln>
+        </p:spPr>
+        <p:style>
+          <a:lnRef idx="1">
+            <a:schemeClr val="accent1"/>
+          </a:lnRef>
+          <a:fillRef idx="3">
+            <a:schemeClr val="accent1"/>
+          </a:fillRef>
+          <a:effectRef idx="2">
+            <a:schemeClr val="accent1"/>
+          </a:effectRef>
+          <a:fontRef idx="minor">
+            <a:schemeClr val="lt1"/>
+          </a:fontRef>
+        </p:style>
+        <p:txBody>
+          <a:bodyPr rtlCol="0" anchor="ctr"/>
+          <a:lstStyle/>
+          <a:p>
+            <a:pPr algn="ctr"/>
+            <a:endParaRPr sz="1400">
+              <a:latin typeface="Times New Roman" panose="02020603050405020304" pitchFamily="18" charset="0"/>
+              <a:cs typeface="Times New Roman" panose="02020603050405020304" pitchFamily="18" charset="0"/>
+            </a:endParaRPr>
+          </a:p>
+        </p:txBody>
+      </p:sp>
+      <p:sp>
+        <p:nvSpPr>
+          <p:cNvPr id="43" name="Left Arrow 42"/>
+          <p:cNvSpPr/>
+          <p:nvPr/>
+        </p:nvSpPr>
+        <p:spPr>
+          <a:xfrm>
+            <a:off x="8799786" y="3110407"/>
+            <a:ext cx="274320" cy="182880"/>
+          </a:xfrm>
+          <a:prstGeom prst="leftArrow">
+            <a:avLst/>
+          </a:prstGeom>
+          <a:solidFill>
+            <a:srgbClr val="1E1E1E"/>
+          </a:solidFill>
+          <a:ln>
+            <a:noFill/>
+          </a:ln>
+        </p:spPr>
+        <p:style>
+          <a:lnRef idx="1">
+            <a:schemeClr val="accent1"/>
+          </a:lnRef>
+          <a:fillRef idx="3">
+            <a:schemeClr val="accent1"/>
+          </a:fillRef>
+          <a:effectRef idx="2">
+            <a:schemeClr val="accent1"/>
+          </a:effectRef>
+          <a:fontRef idx="minor">
+            <a:schemeClr val="lt1"/>
+          </a:fontRef>
+        </p:style>
+        <p:txBody>
+          <a:bodyPr rtlCol="0" anchor="ctr"/>
+          <a:lstStyle/>
+          <a:p>
+            <a:pPr algn="ctr"/>
+            <a:endParaRPr sz="1400">
+              <a:latin typeface="Times New Roman" panose="02020603050405020304" pitchFamily="18" charset="0"/>
+              <a:cs typeface="Times New Roman" panose="02020603050405020304" pitchFamily="18" charset="0"/>
+            </a:endParaRPr>
+          </a:p>
+        </p:txBody>
+      </p:sp>
+      <p:cxnSp>
+        <p:nvCxnSpPr>
+          <p:cNvPr id="47" name="Connector 46"/>
+          <p:cNvCxnSpPr>
+            <a:cxnSpLocks/>
+          </p:cNvCxnSpPr>
+          <p:nvPr/>
+        </p:nvCxnSpPr>
+        <p:spPr>
+          <a:xfrm>
+            <a:off x="3044792" y="1005840"/>
+            <a:ext cx="581656" cy="0"/>
+          </a:xfrm>
+          <a:prstGeom prst="line">
+            <a:avLst/>
+          </a:prstGeom>
+          <a:ln w="28575"/>
+        </p:spPr>
+        <p:style>
+          <a:lnRef idx="1">
+            <a:schemeClr val="dk1"/>
+          </a:lnRef>
+          <a:fillRef idx="0">
+            <a:schemeClr val="dk1"/>
+          </a:fillRef>
+          <a:effectRef idx="0">
+            <a:schemeClr val="dk1"/>
+          </a:effectRef>
+          <a:fontRef idx="minor">
+            <a:schemeClr val="tx1"/>
+          </a:fontRef>
+        </p:style>
+      </p:cxnSp>
+      <p:cxnSp>
+        <p:nvCxnSpPr>
+          <p:cNvPr id="48" name="Connector 47"/>
+          <p:cNvCxnSpPr>
+            <a:cxnSpLocks/>
+          </p:cNvCxnSpPr>
+          <p:nvPr/>
+        </p:nvCxnSpPr>
+        <p:spPr>
+          <a:xfrm>
+            <a:off x="8645600" y="1005840"/>
+            <a:ext cx="311889" cy="0"/>
+          </a:xfrm>
+          <a:prstGeom prst="line">
+            <a:avLst/>
+          </a:prstGeom>
+          <a:ln w="28575"/>
+        </p:spPr>
+        <p:style>
+          <a:lnRef idx="1">
+            <a:schemeClr val="dk1"/>
+          </a:lnRef>
+          <a:fillRef idx="0">
+            <a:schemeClr val="dk1"/>
+          </a:fillRef>
+          <a:effectRef idx="0">
+            <a:schemeClr val="dk1"/>
+          </a:effectRef>
+          <a:fontRef idx="minor">
+            <a:schemeClr val="tx1"/>
+          </a:fontRef>
+        </p:style>
+      </p:cxnSp>
+      <p:cxnSp>
+        <p:nvCxnSpPr>
+          <p:cNvPr id="49" name="Connector 48"/>
+          <p:cNvCxnSpPr>
+            <a:cxnSpLocks/>
+          </p:cNvCxnSpPr>
+          <p:nvPr/>
+        </p:nvCxnSpPr>
+        <p:spPr>
+          <a:xfrm>
+            <a:off x="3049604" y="4807818"/>
+            <a:ext cx="516556" cy="0"/>
+          </a:xfrm>
+          <a:prstGeom prst="line">
+            <a:avLst/>
+          </a:prstGeom>
+          <a:ln w="28575"/>
+        </p:spPr>
+        <p:style>
+          <a:lnRef idx="1">
+            <a:schemeClr val="dk1"/>
+          </a:lnRef>
+          <a:fillRef idx="0">
+            <a:schemeClr val="dk1"/>
+          </a:fillRef>
+          <a:effectRef idx="0">
+            <a:schemeClr val="dk1"/>
+          </a:effectRef>
+          <a:fontRef idx="minor">
+            <a:schemeClr val="tx1"/>
+          </a:fontRef>
+        </p:style>
+      </p:cxnSp>
+      <p:cxnSp>
+        <p:nvCxnSpPr>
+          <p:cNvPr id="50" name="Connector 49"/>
+          <p:cNvCxnSpPr>
+            <a:cxnSpLocks/>
+          </p:cNvCxnSpPr>
+          <p:nvPr/>
+        </p:nvCxnSpPr>
+        <p:spPr>
+          <a:xfrm>
+            <a:off x="8595360" y="4807818"/>
+            <a:ext cx="372178" cy="0"/>
+          </a:xfrm>
+          <a:prstGeom prst="line">
+            <a:avLst/>
+          </a:prstGeom>
+          <a:ln w="28575"/>
+        </p:spPr>
+        <p:style>
+          <a:lnRef idx="1">
+            <a:schemeClr val="dk1"/>
+          </a:lnRef>
+          <a:fillRef idx="0">
+            <a:schemeClr val="dk1"/>
+          </a:fillRef>
+          <a:effectRef idx="0">
+            <a:schemeClr val="dk1"/>
+          </a:effectRef>
+          <a:fontRef idx="minor">
+            <a:schemeClr val="tx1"/>
+          </a:fontRef>
+        </p:style>
+      </p:cxnSp>
+      <p:sp>
+        <p:nvSpPr>
+          <p:cNvPr id="52" name="TextBox 4">
+            <a:extLst>
+              <a:ext uri="{FF2B5EF4-FFF2-40B4-BE49-F238E27FC236}">
+                <a16:creationId xmlns:a16="http://schemas.microsoft.com/office/drawing/2014/main" id="{A746C415-1075-AB62-5163-564019B8C9BE}"/>
+              </a:ext>
+            </a:extLst>
+          </p:cNvPr>
+          <p:cNvSpPr txBox="1"/>
+          <p:nvPr/>
+        </p:nvSpPr>
+        <p:spPr>
+          <a:xfrm>
+            <a:off x="447523" y="625803"/>
+            <a:ext cx="2534701" cy="430887"/>
+          </a:xfrm>
+          <a:prstGeom prst="rect">
+            <a:avLst/>
+          </a:prstGeom>
+        </p:spPr>
+        <p:txBody>
+          <a:bodyPr wrap="square" lIns="0" tIns="0" rIns="0" bIns="0" rtlCol="0" anchor="t">
+            <a:spAutoFit/>
+          </a:bodyPr>
+          <a:lstStyle/>
+          <a:p>
+            <a:pPr algn="l"/>
+            <a:r>
+              <a:rPr lang="en-US" sz="1400" dirty="0">
+                <a:solidFill>
+                  <a:srgbClr val="111827"/>
+                </a:solidFill>
+                <a:latin typeface="Times New Roman" panose="02020603050405020304" pitchFamily="18" charset="0"/>
+                <a:ea typeface="Times New Roman"/>
+                <a:cs typeface="Times New Roman" panose="02020603050405020304" pitchFamily="18" charset="0"/>
+                <a:sym typeface="Times New Roman"/>
+              </a:rPr>
+              <a:t>Data integrity, access control and </a:t>
+            </a:r>
+          </a:p>
+          <a:p>
+            <a:pPr algn="l"/>
+            <a:r>
+              <a:rPr lang="en-US" sz="1400" dirty="0">
+                <a:solidFill>
+                  <a:srgbClr val="111827"/>
+                </a:solidFill>
+                <a:latin typeface="Times New Roman" panose="02020603050405020304" pitchFamily="18" charset="0"/>
+                <a:ea typeface="Times New Roman"/>
+                <a:cs typeface="Times New Roman" panose="02020603050405020304" pitchFamily="18" charset="0"/>
+                <a:sym typeface="Times New Roman"/>
+              </a:rPr>
+              <a:t>patient-centered care</a:t>
+            </a:r>
+          </a:p>
+        </p:txBody>
+      </p:sp>
+      <p:sp>
+        <p:nvSpPr>
+          <p:cNvPr id="54" name="TextBox 5">
+            <a:extLst>
+              <a:ext uri="{FF2B5EF4-FFF2-40B4-BE49-F238E27FC236}">
+                <a16:creationId xmlns:a16="http://schemas.microsoft.com/office/drawing/2014/main" id="{8A81AA1D-0DCB-AAB5-07BB-0AA52B7B54D4}"/>
+              </a:ext>
+            </a:extLst>
+          </p:cNvPr>
+          <p:cNvSpPr txBox="1"/>
+          <p:nvPr/>
+        </p:nvSpPr>
+        <p:spPr>
+          <a:xfrm>
+            <a:off x="285821" y="1139645"/>
+            <a:ext cx="2667532" cy="861774"/>
+          </a:xfrm>
+          <a:prstGeom prst="rect">
+            <a:avLst/>
+          </a:prstGeom>
+        </p:spPr>
+        <p:txBody>
+          <a:bodyPr wrap="square" lIns="0" tIns="0" rIns="0" bIns="0" rtlCol="0" anchor="t">
+            <a:spAutoFit/>
+          </a:bodyPr>
+          <a:lstStyle/>
+          <a:p>
+            <a:pPr algn="l"/>
+            <a:r>
+              <a:rPr lang="en-US" sz="1400" dirty="0">
+                <a:solidFill>
+                  <a:srgbClr val="000000"/>
+                </a:solidFill>
+                <a:latin typeface="Times New Roman" panose="02020603050405020304" pitchFamily="18" charset="0"/>
+                <a:ea typeface="Times New Roman"/>
+                <a:cs typeface="Times New Roman" panose="02020603050405020304" pitchFamily="18" charset="0"/>
+                <a:sym typeface="Times New Roman"/>
+              </a:rPr>
+              <a:t>• </a:t>
+            </a:r>
+            <a:r>
+              <a:rPr lang="en-US" sz="1400" dirty="0">
+                <a:solidFill>
+                  <a:srgbClr val="000000"/>
+                </a:solidFill>
+                <a:latin typeface="Times New Roman" panose="02020603050405020304" pitchFamily="18" charset="0"/>
+                <a:cs typeface="Times New Roman" panose="02020603050405020304" pitchFamily="18" charset="0"/>
+                <a:sym typeface="Times New Roman"/>
+              </a:rPr>
+              <a:t>Patient data integrity</a:t>
+            </a:r>
+          </a:p>
+          <a:p>
+            <a:pPr algn="l"/>
+            <a:r>
+              <a:rPr lang="en-US" sz="1400" dirty="0">
+                <a:solidFill>
+                  <a:srgbClr val="000000"/>
+                </a:solidFill>
+                <a:latin typeface="Times New Roman" panose="02020603050405020304" pitchFamily="18" charset="0"/>
+                <a:cs typeface="Times New Roman" panose="02020603050405020304" pitchFamily="18" charset="0"/>
+                <a:sym typeface="Times New Roman"/>
+              </a:rPr>
+              <a:t>• Authorized access control</a:t>
+            </a:r>
+          </a:p>
+          <a:p>
+            <a:pPr algn="l"/>
+            <a:r>
+              <a:rPr lang="en-US" sz="1400" dirty="0">
+                <a:solidFill>
+                  <a:srgbClr val="000000"/>
+                </a:solidFill>
+                <a:latin typeface="Times New Roman" panose="02020603050405020304" pitchFamily="18" charset="0"/>
+                <a:cs typeface="Times New Roman" panose="02020603050405020304" pitchFamily="18" charset="0"/>
+                <a:sym typeface="Times New Roman"/>
+              </a:rPr>
+              <a:t>• Emergency access </a:t>
+            </a:r>
+            <a:r>
+              <a:rPr lang="en-US" sz="1400" dirty="0">
+                <a:solidFill>
+                  <a:srgbClr val="000000"/>
+                </a:solidFill>
+                <a:latin typeface="Times New Roman" panose="02020603050405020304" pitchFamily="18" charset="0"/>
+                <a:ea typeface="Times New Roman"/>
+                <a:cs typeface="Times New Roman" panose="02020603050405020304" pitchFamily="18" charset="0"/>
+                <a:sym typeface="Times New Roman"/>
+              </a:rPr>
+              <a:t>protocols</a:t>
+            </a:r>
+          </a:p>
+          <a:p>
+            <a:pPr algn="l"/>
+            <a:r>
+              <a:rPr lang="en-US" sz="1400" dirty="0">
+                <a:solidFill>
+                  <a:srgbClr val="000000"/>
+                </a:solidFill>
+                <a:latin typeface="Times New Roman" panose="02020603050405020304" pitchFamily="18" charset="0"/>
+                <a:ea typeface="Times New Roman"/>
+                <a:cs typeface="Times New Roman" panose="02020603050405020304" pitchFamily="18" charset="0"/>
+                <a:sym typeface="Times New Roman"/>
+              </a:rPr>
+              <a:t>• Care continuity</a:t>
+            </a:r>
+          </a:p>
+        </p:txBody>
+      </p:sp>
+      <p:cxnSp>
+        <p:nvCxnSpPr>
+          <p:cNvPr id="65" name="Straight Arrow Connector 64">
+            <a:extLst>
+              <a:ext uri="{FF2B5EF4-FFF2-40B4-BE49-F238E27FC236}">
+                <a16:creationId xmlns:a16="http://schemas.microsoft.com/office/drawing/2014/main" id="{AC353D0C-4E02-BC37-0912-72971552EE88}"/>
+              </a:ext>
+            </a:extLst>
+          </p:cNvPr>
+          <p:cNvCxnSpPr>
+            <a:cxnSpLocks/>
+            <a:stCxn id="18" idx="2"/>
+            <a:endCxn id="28" idx="0"/>
+          </p:cNvCxnSpPr>
+          <p:nvPr/>
+        </p:nvCxnSpPr>
+        <p:spPr>
+          <a:xfrm>
+            <a:off x="6141048" y="1097280"/>
+            <a:ext cx="2677" cy="183738"/>
+          </a:xfrm>
+          <a:prstGeom prst="straightConnector1">
+            <a:avLst/>
+          </a:prstGeom>
+          <a:ln>
+            <a:tailEnd type="triangle"/>
+          </a:ln>
+        </p:spPr>
+        <p:style>
+          <a:lnRef idx="2">
+            <a:schemeClr val="dk1"/>
+          </a:lnRef>
+          <a:fillRef idx="0">
+            <a:schemeClr val="dk1"/>
+          </a:fillRef>
+          <a:effectRef idx="1">
+            <a:schemeClr val="dk1"/>
+          </a:effectRef>
+          <a:fontRef idx="minor">
+            <a:schemeClr val="tx1"/>
+          </a:fontRef>
+        </p:style>
+      </p:cxnSp>
+      <p:cxnSp>
+        <p:nvCxnSpPr>
+          <p:cNvPr id="70" name="Straight Arrow Connector 69">
+            <a:extLst>
+              <a:ext uri="{FF2B5EF4-FFF2-40B4-BE49-F238E27FC236}">
+                <a16:creationId xmlns:a16="http://schemas.microsoft.com/office/drawing/2014/main" id="{3187D29B-425C-7811-E6D8-33130FEEB3BA}"/>
+              </a:ext>
+            </a:extLst>
+          </p:cNvPr>
+          <p:cNvCxnSpPr>
+            <a:cxnSpLocks/>
+          </p:cNvCxnSpPr>
+          <p:nvPr/>
+        </p:nvCxnSpPr>
+        <p:spPr>
+          <a:xfrm flipV="1">
+            <a:off x="6195645" y="3985695"/>
+            <a:ext cx="0" cy="273483"/>
+          </a:xfrm>
+          <a:prstGeom prst="straightConnector1">
+            <a:avLst/>
+          </a:prstGeom>
+          <a:ln>
+            <a:tailEnd type="triangle"/>
+          </a:ln>
+        </p:spPr>
+        <p:style>
+          <a:lnRef idx="2">
+            <a:schemeClr val="dk1"/>
+          </a:lnRef>
+          <a:fillRef idx="0">
+            <a:schemeClr val="dk1"/>
+          </a:fillRef>
+          <a:effectRef idx="1">
+            <a:schemeClr val="dk1"/>
+          </a:effectRef>
+          <a:fontRef idx="minor">
+            <a:schemeClr val="tx1"/>
+          </a:fontRef>
+        </p:style>
+      </p:cxnSp>
+      <p:cxnSp>
+        <p:nvCxnSpPr>
+          <p:cNvPr id="73" name="Straight Arrow Connector 72">
+            <a:extLst>
+              <a:ext uri="{FF2B5EF4-FFF2-40B4-BE49-F238E27FC236}">
+                <a16:creationId xmlns:a16="http://schemas.microsoft.com/office/drawing/2014/main" id="{B2E3839B-0A52-579D-AABC-9408E261BAB0}"/>
+              </a:ext>
+            </a:extLst>
+          </p:cNvPr>
+          <p:cNvCxnSpPr>
+            <a:cxnSpLocks/>
+          </p:cNvCxnSpPr>
+          <p:nvPr/>
+        </p:nvCxnSpPr>
+        <p:spPr>
+          <a:xfrm flipV="1">
+            <a:off x="6187267" y="5030572"/>
+            <a:ext cx="0" cy="182880"/>
+          </a:xfrm>
+          <a:prstGeom prst="straightConnector1">
+            <a:avLst/>
+          </a:prstGeom>
+          <a:ln>
+            <a:tailEnd type="triangle"/>
+          </a:ln>
+        </p:spPr>
+        <p:style>
+          <a:lnRef idx="2">
+            <a:schemeClr val="dk1"/>
+          </a:lnRef>
+          <a:fillRef idx="0">
+            <a:schemeClr val="dk1"/>
+          </a:fillRef>
+          <a:effectRef idx="1">
+            <a:schemeClr val="dk1"/>
+          </a:effectRef>
+          <a:fontRef idx="minor">
+            <a:schemeClr val="tx1"/>
+          </a:fontRef>
+        </p:style>
+      </p:cxnSp>
+      <p:cxnSp>
+        <p:nvCxnSpPr>
+          <p:cNvPr id="80" name="Straight Arrow Connector 79">
+            <a:extLst>
+              <a:ext uri="{FF2B5EF4-FFF2-40B4-BE49-F238E27FC236}">
+                <a16:creationId xmlns:a16="http://schemas.microsoft.com/office/drawing/2014/main" id="{A5976289-E570-F4F0-C13B-0FB444EDCA76}"/>
+              </a:ext>
+            </a:extLst>
+          </p:cNvPr>
+          <p:cNvCxnSpPr>
+            <a:cxnSpLocks/>
+          </p:cNvCxnSpPr>
+          <p:nvPr/>
+        </p:nvCxnSpPr>
+        <p:spPr>
+          <a:xfrm flipH="1">
+            <a:off x="6191288" y="6044267"/>
+            <a:ext cx="2677" cy="182880"/>
+          </a:xfrm>
+          <a:prstGeom prst="straightConnector1">
+            <a:avLst/>
+          </a:prstGeom>
+          <a:ln>
+            <a:tailEnd type="triangle"/>
+          </a:ln>
+        </p:spPr>
+        <p:style>
+          <a:lnRef idx="2">
+            <a:schemeClr val="dk1"/>
+          </a:lnRef>
+          <a:fillRef idx="0">
+            <a:schemeClr val="dk1"/>
+          </a:fillRef>
+          <a:effectRef idx="1">
+            <a:schemeClr val="dk1"/>
+          </a:effectRef>
+          <a:fontRef idx="minor">
+            <a:schemeClr val="tx1"/>
+          </a:fontRef>
+        </p:style>
+      </p:cxnSp>
     </p:spTree>
   </p:cSld>
   <p:clrMapOvr>
@@ -3131,44 +5821,44 @@
         <a:sysClr val="window" lastClr="FFFFFF"/>
       </a:lt1>
       <a:dk2>
-        <a:srgbClr val="1F497D"/>
+        <a:srgbClr val="44546A"/>
       </a:dk2>
       <a:lt2>
-        <a:srgbClr val="EEECE1"/>
+        <a:srgbClr val="E7E6E6"/>
       </a:lt2>
       <a:accent1>
-        <a:srgbClr val="4F81BD"/>
+        <a:srgbClr val="4472C4"/>
       </a:accent1>
       <a:accent2>
-        <a:srgbClr val="C0504D"/>
+        <a:srgbClr val="ED7D31"/>
       </a:accent2>
       <a:accent3>
-        <a:srgbClr val="9BBB59"/>
+        <a:srgbClr val="A5A5A5"/>
       </a:accent3>
       <a:accent4>
-        <a:srgbClr val="8064A2"/>
+        <a:srgbClr val="FFC000"/>
       </a:accent4>
       <a:accent5>
-        <a:srgbClr val="4BACC6"/>
+        <a:srgbClr val="5B9BD5"/>
       </a:accent5>
       <a:accent6>
-        <a:srgbClr val="F79646"/>
+        <a:srgbClr val="70AD47"/>
       </a:accent6>
       <a:hlink>
-        <a:srgbClr val="0000FF"/>
+        <a:srgbClr val="0563C1"/>
       </a:hlink>
       <a:folHlink>
-        <a:srgbClr val="800080"/>
+        <a:srgbClr val="954F72"/>
       </a:folHlink>
     </a:clrScheme>
     <a:fontScheme name="Office">
       <a:majorFont>
-        <a:latin typeface="Calibri"/>
+        <a:latin typeface="Calibri Light" panose="020F0302020204030204"/>
         <a:ea typeface=""/>
         <a:cs typeface=""/>
-        <a:font script="Jpan" typeface="ＭＳ Ｐゴシック"/>
+        <a:font script="Jpan" typeface="游ゴシック Light"/>
         <a:font script="Hang" typeface="맑은 고딕"/>
-        <a:font script="Hans" typeface="宋体"/>
+        <a:font script="Hans" typeface="等线 Light"/>
         <a:font script="Hant" typeface="新細明體"/>
         <a:font script="Arab" typeface="Times New Roman"/>
         <a:font script="Hebr" typeface="Times New Roman"/>
@@ -3196,14 +5886,31 @@
         <a:font script="Viet" typeface="Times New Roman"/>
         <a:font script="Uigh" typeface="Microsoft Uighur"/>
         <a:font script="Geor" typeface="Sylfaen"/>
+        <a:font script="Armn" typeface="Arial"/>
+        <a:font script="Bugi" typeface="Leelawadee UI"/>
+        <a:font script="Bopo" typeface="Microsoft JhengHei"/>
+        <a:font script="Java" typeface="Javanese Text"/>
+        <a:font script="Lisu" typeface="Segoe UI"/>
+        <a:font script="Mymr" typeface="Myanmar Text"/>
+        <a:font script="Nkoo" typeface="Ebrima"/>
+        <a:font script="Olck" typeface="Nirmala UI"/>
+        <a:font script="Osma" typeface="Ebrima"/>
+        <a:font script="Phag" typeface="Phagspa"/>
+        <a:font script="Syrn" typeface="Estrangelo Edessa"/>
+        <a:font script="Syrj" typeface="Estrangelo Edessa"/>
+        <a:font script="Syre" typeface="Estrangelo Edessa"/>
+        <a:font script="Sora" typeface="Nirmala UI"/>
+        <a:font script="Tale" typeface="Microsoft Tai Le"/>
+        <a:font script="Talu" typeface="Microsoft New Tai Lue"/>
+        <a:font script="Tfng" typeface="Ebrima"/>
       </a:majorFont>
       <a:minorFont>
-        <a:latin typeface="Calibri"/>
+        <a:latin typeface="Calibri" panose="020F0502020204030204"/>
         <a:ea typeface=""/>
         <a:cs typeface=""/>
-        <a:font script="Jpan" typeface="ＭＳ Ｐゴシック"/>
+        <a:font script="Jpan" typeface="游ゴシック"/>
         <a:font script="Hang" typeface="맑은 고딕"/>
-        <a:font script="Hans" typeface="宋体"/>
+        <a:font script="Hans" typeface="等线"/>
         <a:font script="Hant" typeface="新細明體"/>
         <a:font script="Arab" typeface="Arial"/>
         <a:font script="Hebr" typeface="Arial"/>
@@ -3231,6 +5938,23 @@
         <a:font script="Viet" typeface="Arial"/>
         <a:font script="Uigh" typeface="Microsoft Uighur"/>
         <a:font script="Geor" typeface="Sylfaen"/>
+        <a:font script="Armn" typeface="Arial"/>
+        <a:font script="Bugi" typeface="Leelawadee UI"/>
+        <a:font script="Bopo" typeface="Microsoft JhengHei"/>
+        <a:font script="Java" typeface="Javanese Text"/>
+        <a:font script="Lisu" typeface="Segoe UI"/>
+        <a:font script="Mymr" typeface="Myanmar Text"/>
+        <a:font script="Nkoo" typeface="Ebrima"/>
+        <a:font script="Olck" typeface="Nirmala UI"/>
+        <a:font script="Osma" typeface="Ebrima"/>
+        <a:font script="Phag" typeface="Phagspa"/>
+        <a:font script="Syrn" typeface="Estrangelo Edessa"/>
+        <a:font script="Syrj" typeface="Estrangelo Edessa"/>
+        <a:font script="Syre" typeface="Estrangelo Edessa"/>
+        <a:font script="Sora" typeface="Nirmala UI"/>
+        <a:font script="Tale" typeface="Microsoft Tai Le"/>
+        <a:font script="Talu" typeface="Microsoft New Tai Lue"/>
+        <a:font script="Tfng" typeface="Ebrima"/>
       </a:minorFont>
     </a:fontScheme>
     <a:fmtScheme name="Office">
@@ -3242,200 +5966,141 @@
           <a:gsLst>
             <a:gs pos="0">
               <a:schemeClr val="phClr">
-                <a:tint val="50000"/>
-                <a:satMod val="300000"/>
+                <a:lumMod val="110000"/>
+                <a:satMod val="105000"/>
+                <a:tint val="67000"/>
               </a:schemeClr>
             </a:gs>
-            <a:gs pos="35000">
+            <a:gs pos="50000">
               <a:schemeClr val="phClr">
-                <a:tint val="37000"/>
-                <a:satMod val="300000"/>
+                <a:lumMod val="105000"/>
+                <a:satMod val="103000"/>
+                <a:tint val="73000"/>
               </a:schemeClr>
             </a:gs>
             <a:gs pos="100000">
               <a:schemeClr val="phClr">
-                <a:tint val="15000"/>
-                <a:satMod val="350000"/>
+                <a:lumMod val="105000"/>
+                <a:satMod val="109000"/>
+                <a:tint val="81000"/>
               </a:schemeClr>
             </a:gs>
           </a:gsLst>
-          <a:lin ang="16200000" scaled="1"/>
+          <a:lin ang="5400000" scaled="0"/>
         </a:gradFill>
         <a:gradFill rotWithShape="1">
           <a:gsLst>
             <a:gs pos="0">
               <a:schemeClr val="phClr">
-                <a:tint val="100000"/>
+                <a:satMod val="103000"/>
+                <a:lumMod val="102000"/>
+                <a:tint val="94000"/>
+              </a:schemeClr>
+            </a:gs>
+            <a:gs pos="50000">
+              <a:schemeClr val="phClr">
+                <a:satMod val="110000"/>
+                <a:lumMod val="100000"/>
                 <a:shade val="100000"/>
-                <a:satMod val="130000"/>
               </a:schemeClr>
             </a:gs>
             <a:gs pos="100000">
               <a:schemeClr val="phClr">
-                <a:tint val="50000"/>
-                <a:shade val="100000"/>
-                <a:satMod val="350000"/>
+                <a:lumMod val="99000"/>
+                <a:satMod val="120000"/>
+                <a:shade val="78000"/>
               </a:schemeClr>
             </a:gs>
           </a:gsLst>
-          <a:lin ang="16200000" scaled="0"/>
+          <a:lin ang="5400000" scaled="0"/>
         </a:gradFill>
       </a:fillStyleLst>
       <a:lnStyleLst>
-        <a:ln w="9525" cap="flat" cmpd="sng" algn="ctr">
-          <a:solidFill>
-            <a:schemeClr val="phClr">
-              <a:shade val="95000"/>
-              <a:satMod val="105000"/>
-            </a:schemeClr>
-          </a:solidFill>
-          <a:prstDash val="solid"/>
-        </a:ln>
-        <a:ln w="25400" cap="flat" cmpd="sng" algn="ctr">
+        <a:ln w="6350" cap="flat" cmpd="sng" algn="ctr">
           <a:solidFill>
             <a:schemeClr val="phClr"/>
           </a:solidFill>
           <a:prstDash val="solid"/>
+          <a:miter lim="800000"/>
         </a:ln>
-        <a:ln w="38100" cap="flat" cmpd="sng" algn="ctr">
+        <a:ln w="12700" cap="flat" cmpd="sng" algn="ctr">
           <a:solidFill>
             <a:schemeClr val="phClr"/>
           </a:solidFill>
           <a:prstDash val="solid"/>
+          <a:miter lim="800000"/>
+        </a:ln>
+        <a:ln w="19050" cap="flat" cmpd="sng" algn="ctr">
+          <a:solidFill>
+            <a:schemeClr val="phClr"/>
+          </a:solidFill>
+          <a:prstDash val="solid"/>
+          <a:miter lim="800000"/>
         </a:ln>
       </a:lnStyleLst>
       <a:effectStyleLst>
         <a:effectStyle>
+          <a:effectLst/>
+        </a:effectStyle>
+        <a:effectStyle>
+          <a:effectLst/>
+        </a:effectStyle>
+        <a:effectStyle>
           <a:effectLst>
-            <a:outerShdw blurRad="40000" dist="20000" dir="5400000" rotWithShape="0">
+            <a:outerShdw blurRad="57150" dist="19050" dir="5400000" algn="ctr" rotWithShape="0">
               <a:srgbClr val="000000">
-                <a:alpha val="38000"/>
+                <a:alpha val="63000"/>
               </a:srgbClr>
             </a:outerShdw>
           </a:effectLst>
-        </a:effectStyle>
-        <a:effectStyle>
-          <a:effectLst>
-            <a:outerShdw blurRad="40000" dist="23000" dir="5400000" rotWithShape="0">
-              <a:srgbClr val="000000">
-                <a:alpha val="35000"/>
-              </a:srgbClr>
-            </a:outerShdw>
-          </a:effectLst>
-        </a:effectStyle>
-        <a:effectStyle>
-          <a:effectLst>
-            <a:outerShdw blurRad="40000" dist="23000" dir="5400000" rotWithShape="0">
-              <a:srgbClr val="000000">
-                <a:alpha val="35000"/>
-              </a:srgbClr>
-            </a:outerShdw>
-          </a:effectLst>
-          <a:scene3d>
-            <a:camera prst="orthographicFront">
-              <a:rot lat="0" lon="0" rev="0"/>
-            </a:camera>
-            <a:lightRig rig="threePt" dir="t">
-              <a:rot lat="0" lon="0" rev="1200000"/>
-            </a:lightRig>
-          </a:scene3d>
-          <a:sp3d>
-            <a:bevelT w="63500" h="25400"/>
-          </a:sp3d>
         </a:effectStyle>
       </a:effectStyleLst>
       <a:bgFillStyleLst>
         <a:solidFill>
           <a:schemeClr val="phClr"/>
         </a:solidFill>
+        <a:solidFill>
+          <a:schemeClr val="phClr">
+            <a:tint val="95000"/>
+            <a:satMod val="170000"/>
+          </a:schemeClr>
+        </a:solidFill>
         <a:gradFill rotWithShape="1">
           <a:gsLst>
             <a:gs pos="0">
               <a:schemeClr val="phClr">
-                <a:tint val="40000"/>
-                <a:satMod val="350000"/>
+                <a:tint val="93000"/>
+                <a:satMod val="150000"/>
+                <a:shade val="98000"/>
+                <a:lumMod val="102000"/>
               </a:schemeClr>
             </a:gs>
-            <a:gs pos="40000">
+            <a:gs pos="50000">
               <a:schemeClr val="phClr">
-                <a:tint val="45000"/>
-                <a:shade val="99000"/>
-                <a:satMod val="350000"/>
+                <a:tint val="98000"/>
+                <a:satMod val="130000"/>
+                <a:shade val="90000"/>
+                <a:lumMod val="103000"/>
               </a:schemeClr>
             </a:gs>
             <a:gs pos="100000">
               <a:schemeClr val="phClr">
-                <a:shade val="20000"/>
-                <a:satMod val="255000"/>
+                <a:shade val="63000"/>
+                <a:satMod val="120000"/>
               </a:schemeClr>
             </a:gs>
           </a:gsLst>
-          <a:path path="circle">
-            <a:fillToRect l="50000" t="-80000" r="50000" b="180000"/>
-          </a:path>
-        </a:gradFill>
-        <a:gradFill rotWithShape="1">
-          <a:gsLst>
-            <a:gs pos="0">
-              <a:schemeClr val="phClr">
-                <a:tint val="80000"/>
-                <a:satMod val="300000"/>
-              </a:schemeClr>
-            </a:gs>
-            <a:gs pos="100000">
-              <a:schemeClr val="phClr">
-                <a:shade val="30000"/>
-                <a:satMod val="200000"/>
-              </a:schemeClr>
-            </a:gs>
-          </a:gsLst>
-          <a:path path="circle">
-            <a:fillToRect l="50000" t="50000" r="50000" b="50000"/>
-          </a:path>
+          <a:lin ang="5400000" scaled="0"/>
         </a:gradFill>
       </a:bgFillStyleLst>
     </a:fmtScheme>
   </a:themeElements>
-  <a:objectDefaults>
-    <a:spDef>
-      <a:spPr/>
-      <a:bodyPr/>
-      <a:lstStyle/>
-      <a:style>
-        <a:lnRef idx="1">
-          <a:schemeClr val="accent1"/>
-        </a:lnRef>
-        <a:fillRef idx="3">
-          <a:schemeClr val="accent1"/>
-        </a:fillRef>
-        <a:effectRef idx="2">
-          <a:schemeClr val="accent1"/>
-        </a:effectRef>
-        <a:fontRef idx="minor">
-          <a:schemeClr val="lt1"/>
-        </a:fontRef>
-      </a:style>
-    </a:spDef>
-    <a:lnDef>
-      <a:spPr/>
-      <a:bodyPr/>
-      <a:lstStyle/>
-      <a:style>
-        <a:lnRef idx="2">
-          <a:schemeClr val="accent1"/>
-        </a:lnRef>
-        <a:fillRef idx="0">
-          <a:schemeClr val="accent1"/>
-        </a:fillRef>
-        <a:effectRef idx="1">
-          <a:schemeClr val="accent1"/>
-        </a:effectRef>
-        <a:fontRef idx="minor">
-          <a:schemeClr val="tx1"/>
-        </a:fontRef>
-      </a:style>
-    </a:lnDef>
-  </a:objectDefaults>
+  <a:objectDefaults/>
   <a:extraClrSchemeLst/>
+  <a:extLst>
+    <a:ext uri="{05A4C25C-085E-4340-85A3-A5531E510DB2}">
+      <thm15:themeFamily xmlns:thm15="http://schemas.microsoft.com/office/thememl/2012/main" name="Office Theme" id="{62F939B6-93AF-4DB8-9C6B-D6C7DFDC589F}" vid="{4A3C46E8-61CC-4603-A589-7422A47A8E4A}"/>
+    </a:ext>
+  </a:extLst>
 </a:theme>
 </file>